--- a/presentation_final.pptx
+++ b/presentation_final.pptx
@@ -3106,25 +3106,23 @@
       <p:grpSpPr/>
       <p:sp>
         <p:nvSpPr>
-          <p:cNvPr id="2" name="Rounded Rectangle 1"/>
+          <p:cNvPr id="2" name="Rectangle 1"/>
           <p:cNvSpPr/>
           <p:nvPr/>
         </p:nvSpPr>
         <p:spPr>
           <a:xfrm>
-            <a:off x="731520" y="731520"/>
-            <a:ext cx="10725912" cy="5394960"/>
-          </a:xfrm>
-          <a:prstGeom prst="roundRect">
+            <a:off x="0" y="0"/>
+            <a:ext cx="12191695" cy="6858000"/>
+          </a:xfrm>
+          <a:prstGeom prst="rect">
             <a:avLst/>
           </a:prstGeom>
           <a:solidFill>
-            <a:srgbClr val="FFFFFF"/>
+            <a:srgbClr val="DCE8F8"/>
           </a:solidFill>
-          <a:ln w="12700">
-            <a:solidFill>
-              <a:srgbClr val="2563EB"/>
-            </a:solidFill>
+          <a:ln>
+            <a:noFill/>
           </a:ln>
         </p:spPr>
         <p:style>
@@ -3151,25 +3149,23 @@
       </p:sp>
       <p:sp>
         <p:nvSpPr>
-          <p:cNvPr id="3" name="Rounded Rectangle 2"/>
+          <p:cNvPr id="3" name="Rectangle 2"/>
           <p:cNvSpPr/>
           <p:nvPr/>
         </p:nvSpPr>
         <p:spPr>
           <a:xfrm>
-            <a:off x="1097280" y="1097280"/>
-            <a:ext cx="5943600" cy="384048"/>
-          </a:xfrm>
-          <a:prstGeom prst="roundRect">
+            <a:off x="0" y="0"/>
+            <a:ext cx="12191695" cy="1280160"/>
+          </a:xfrm>
+          <a:prstGeom prst="rect">
             <a:avLst/>
           </a:prstGeom>
           <a:solidFill>
-            <a:srgbClr val="EFF6FF"/>
+            <a:srgbClr val="FFFFFF"/>
           </a:solidFill>
           <a:ln>
-            <a:solidFill>
-              <a:srgbClr val="2563EB"/>
-            </a:solidFill>
+            <a:noFill/>
           </a:ln>
         </p:spPr>
         <p:style>
@@ -3190,102 +3186,30 @@
           <a:bodyPr rtlCol="0" anchor="ctr"/>
           <a:lstStyle/>
           <a:p>
-            <a:pPr algn="ctr">
-              <a:defRPr sz="1100" b="1">
-                <a:solidFill>
-                  <a:srgbClr val="2563EB"/>
-                </a:solidFill>
-                <a:latin typeface="Calibri"/>
-              </a:defRPr>
-            </a:pPr>
-            <a:r>
-              <a:t>DEPARTMENT OF ARTIFICIAL INTELLIGENCE &amp; MACHINE LEARNING</a:t>
-            </a:r>
-          </a:p>
-        </p:txBody>
-      </p:sp>
-      <p:sp>
-        <p:nvSpPr>
-          <p:cNvPr id="4" name="TextBox 3"/>
-          <p:cNvSpPr txBox="1"/>
-          <p:nvPr/>
-        </p:nvSpPr>
-        <p:spPr>
-          <a:xfrm>
-            <a:off x="1097280" y="1691640"/>
-            <a:ext cx="9966960" cy="2011680"/>
-          </a:xfrm>
-          <a:prstGeom prst="rect">
-            <a:avLst/>
-          </a:prstGeom>
-          <a:noFill/>
-        </p:spPr>
-        <p:txBody>
-          <a:bodyPr wrap="square">
-            <a:spAutoFit/>
-          </a:bodyPr>
-          <a:lstStyle/>
-          <a:p>
-            <a:pPr>
-              <a:defRPr sz="3600" b="1">
-                <a:solidFill>
-                  <a:srgbClr val="0F172A"/>
-                </a:solidFill>
-                <a:latin typeface="Calibri"/>
-              </a:defRPr>
-            </a:pPr>
-            <a:r>
-              <a:t>Video Activity Recognition</a:t>
-            </a:r>
-          </a:p>
-          <a:p>
-            <a:pPr>
-              <a:defRPr sz="2000" b="1">
-                <a:solidFill>
-                  <a:srgbClr val="2563EB"/>
-                </a:solidFill>
-                <a:latin typeface="Calibri"/>
-              </a:defRPr>
-            </a:pPr>
-            <a:r>
-              <a:t>Using 3D Convolutional Neural Networks (3D-CNN) &amp; Grad-CAM Explainable AI</a:t>
-            </a:r>
-          </a:p>
-          <a:p>
-            <a:pPr>
-              <a:defRPr sz="1400">
-                <a:solidFill>
-                  <a:srgbClr val="64748B"/>
-                </a:solidFill>
-                <a:latin typeface="Calibri"/>
-              </a:defRPr>
-            </a:pPr>
-            <a:r>
-              <a:t>Spatiotemporal Action Classification with Real-Time Attention Heatmaps &amp; Live Camera Predictor</a:t>
-            </a:r>
-          </a:p>
-        </p:txBody>
-      </p:sp>
-      <p:sp>
-        <p:nvSpPr>
-          <p:cNvPr id="5" name="Rounded Rectangle 4"/>
+            <a:pPr algn="ctr"/>
+          </a:p>
+        </p:txBody>
+      </p:sp>
+      <p:sp>
+        <p:nvSpPr>
+          <p:cNvPr id="4" name="Oval 3"/>
           <p:cNvSpPr/>
           <p:nvPr/>
         </p:nvSpPr>
         <p:spPr>
           <a:xfrm>
-            <a:off x="1097280" y="3977639"/>
-            <a:ext cx="2377440" cy="1371600"/>
-          </a:xfrm>
-          <a:prstGeom prst="roundRect">
+            <a:off x="137160" y="73152"/>
+            <a:ext cx="1097280" cy="1097280"/>
+          </a:xfrm>
+          <a:prstGeom prst="ellipse">
             <a:avLst/>
           </a:prstGeom>
           <a:solidFill>
-            <a:srgbClr val="EFF6FF"/>
+            <a:srgbClr val="C8CDD7"/>
           </a:solidFill>
-          <a:ln w="12700">
+          <a:ln>
             <a:solidFill>
-              <a:srgbClr val="2563EB"/>
+              <a:srgbClr val="8C96A0"/>
             </a:solidFill>
           </a:ln>
         </p:spPr>
@@ -3307,79 +3231,44 @@
           <a:bodyPr rtlCol="0" anchor="ctr"/>
           <a:lstStyle/>
           <a:p>
-            <a:pPr algn="ctr"/>
-          </a:p>
-        </p:txBody>
-      </p:sp>
-      <p:sp>
-        <p:nvSpPr>
-          <p:cNvPr id="6" name="TextBox 5"/>
-          <p:cNvSpPr txBox="1"/>
-          <p:nvPr/>
-        </p:nvSpPr>
-        <p:spPr>
-          <a:xfrm>
-            <a:off x="1188720" y="4069080"/>
-            <a:ext cx="2194560" cy="1188720"/>
-          </a:xfrm>
-          <a:prstGeom prst="rect">
-            <a:avLst/>
-          </a:prstGeom>
-          <a:noFill/>
-        </p:spPr>
-        <p:txBody>
-          <a:bodyPr wrap="square">
-            <a:spAutoFit/>
-          </a:bodyPr>
-          <a:lstStyle/>
-          <a:p>
-            <a:pPr>
-              <a:defRPr sz="1000" b="1">
-                <a:solidFill>
-                  <a:srgbClr val="2563EB"/>
-                </a:solidFill>
-                <a:latin typeface="Calibri"/>
-              </a:defRPr>
-            </a:pPr>
-            <a:r>
-              <a:t>ARCHITECTURE</a:t>
-            </a:r>
-          </a:p>
-          <a:p>
-            <a:pPr>
-              <a:defRPr sz="1200" b="1">
-                <a:solidFill>
-                  <a:srgbClr val="1E293B"/>
-                </a:solidFill>
-                <a:latin typeface="Calibri"/>
-              </a:defRPr>
-            </a:pPr>
-            <a:r>
-              <a:t>3D-CNN (Conv3D)</a:t>
-            </a:r>
-          </a:p>
-        </p:txBody>
-      </p:sp>
-      <p:sp>
-        <p:nvSpPr>
-          <p:cNvPr id="7" name="Rounded Rectangle 6"/>
+            <a:pPr algn="ctr">
+              <a:defRPr sz="800" b="1">
+                <a:solidFill>
+                  <a:srgbClr val="0F172A"/>
+                </a:solidFill>
+                <a:latin typeface="Calibri"/>
+              </a:defRPr>
+            </a:pPr>
+            <a:r>
+              <a:t>GNDEC</a:t>
+            </a:r>
+            <a:br/>
+            <a:r>
+              <a:t>LOGO</a:t>
+            </a:r>
+          </a:p>
+        </p:txBody>
+      </p:sp>
+      <p:sp>
+        <p:nvSpPr>
+          <p:cNvPr id="5" name="Rounded Rectangle 4"/>
           <p:cNvSpPr/>
           <p:nvPr/>
         </p:nvSpPr>
         <p:spPr>
           <a:xfrm>
-            <a:off x="3611880" y="3977639"/>
-            <a:ext cx="2377440" cy="1371600"/>
+            <a:off x="10927080" y="91440"/>
+            <a:ext cx="1097280" cy="1097280"/>
           </a:xfrm>
           <a:prstGeom prst="roundRect">
             <a:avLst/>
           </a:prstGeom>
           <a:solidFill>
-            <a:srgbClr val="EFF6FF"/>
+            <a:srgbClr val="DAA520"/>
           </a:solidFill>
-          <a:ln w="12700">
+          <a:ln>
             <a:solidFill>
-              <a:srgbClr val="2563EB"/>
+              <a:srgbClr val="B4820A"/>
             </a:solidFill>
           </a:ln>
         </p:spPr>
@@ -3401,20 +3290,34 @@
           <a:bodyPr rtlCol="0" anchor="ctr"/>
           <a:lstStyle/>
           <a:p>
-            <a:pPr algn="ctr"/>
-          </a:p>
-        </p:txBody>
-      </p:sp>
-      <p:sp>
-        <p:nvSpPr>
-          <p:cNvPr id="8" name="TextBox 7"/>
+            <a:pPr algn="ctr">
+              <a:defRPr sz="1100" b="1">
+                <a:solidFill>
+                  <a:srgbClr val="FFFFFF"/>
+                </a:solidFill>
+                <a:latin typeface="Calibri"/>
+              </a:defRPr>
+            </a:pPr>
+            <a:r>
+              <a:t>NAAC</a:t>
+            </a:r>
+            <a:br/>
+            <a:r>
+              <a:t>A+</a:t>
+            </a:r>
+          </a:p>
+        </p:txBody>
+      </p:sp>
+      <p:sp>
+        <p:nvSpPr>
+          <p:cNvPr id="6" name="TextBox 5"/>
           <p:cNvSpPr txBox="1"/>
           <p:nvPr/>
         </p:nvSpPr>
         <p:spPr>
           <a:xfrm>
-            <a:off x="3703320" y="4069080"/>
-            <a:ext cx="2194560" cy="1188720"/>
+            <a:off x="1371600" y="73152"/>
+            <a:ext cx="9418320" cy="566928"/>
           </a:xfrm>
           <a:prstGeom prst="rect">
             <a:avLst/>
@@ -3422,59 +3325,80 @@
           <a:noFill/>
         </p:spPr>
         <p:txBody>
-          <a:bodyPr wrap="square">
+          <a:bodyPr wrap="none">
             <a:spAutoFit/>
           </a:bodyPr>
           <a:lstStyle/>
           <a:p>
-            <a:pPr>
-              <a:defRPr sz="1000" b="1">
-                <a:solidFill>
-                  <a:srgbClr val="2563EB"/>
-                </a:solidFill>
-                <a:latin typeface="Calibri"/>
-              </a:defRPr>
-            </a:pPr>
-            <a:r>
-              <a:t>EXPLAINABILITY</a:t>
-            </a:r>
-          </a:p>
-          <a:p>
-            <a:pPr>
-              <a:defRPr sz="1200" b="1">
-                <a:solidFill>
-                  <a:srgbClr val="1E293B"/>
-                </a:solidFill>
-                <a:latin typeface="Calibri"/>
-              </a:defRPr>
-            </a:pPr>
-            <a:r>
-              <a:t>3D Grad-CAM (XAI)</a:t>
-            </a:r>
-          </a:p>
-        </p:txBody>
-      </p:sp>
-      <p:sp>
-        <p:nvSpPr>
-          <p:cNvPr id="9" name="Rounded Rectangle 8"/>
+            <a:pPr algn="ctr">
+              <a:defRPr sz="2400" b="1">
+                <a:solidFill>
+                  <a:srgbClr val="0F172A"/>
+                </a:solidFill>
+                <a:latin typeface="Calibri"/>
+              </a:defRPr>
+            </a:pPr>
+            <a:r>
+              <a:t>GURU NANAK DEV ENGINEERING COLLEGE, BIDAR</a:t>
+            </a:r>
+          </a:p>
+        </p:txBody>
+      </p:sp>
+      <p:sp>
+        <p:nvSpPr>
+          <p:cNvPr id="7" name="TextBox 6"/>
+          <p:cNvSpPr txBox="1"/>
+          <p:nvPr/>
+        </p:nvSpPr>
+        <p:spPr>
+          <a:xfrm>
+            <a:off x="1371600" y="621792"/>
+            <a:ext cx="9418320" cy="502920"/>
+          </a:xfrm>
+          <a:prstGeom prst="rect">
+            <a:avLst/>
+          </a:prstGeom>
+          <a:noFill/>
+        </p:spPr>
+        <p:txBody>
+          <a:bodyPr wrap="none">
+            <a:spAutoFit/>
+          </a:bodyPr>
+          <a:lstStyle/>
+          <a:p>
+            <a:pPr algn="ctr">
+              <a:defRPr sz="2000" b="1">
+                <a:solidFill>
+                  <a:srgbClr val="0F172A"/>
+                </a:solidFill>
+                <a:latin typeface="Calibri"/>
+              </a:defRPr>
+            </a:pPr>
+            <a:r>
+              <a:t>DEPARTMENT OF AI &amp; ML</a:t>
+            </a:r>
+          </a:p>
+        </p:txBody>
+      </p:sp>
+      <p:sp>
+        <p:nvSpPr>
+          <p:cNvPr id="8" name="Rectangle 7"/>
           <p:cNvSpPr/>
           <p:nvPr/>
         </p:nvSpPr>
         <p:spPr>
           <a:xfrm>
-            <a:off x="6126480" y="3977639"/>
-            <a:ext cx="2377440" cy="1371600"/>
-          </a:xfrm>
-          <a:prstGeom prst="roundRect">
+            <a:off x="457200" y="1298448"/>
+            <a:ext cx="11274552" cy="22860"/>
+          </a:xfrm>
+          <a:prstGeom prst="rect">
             <a:avLst/>
           </a:prstGeom>
           <a:solidFill>
-            <a:srgbClr val="EFF6FF"/>
+            <a:srgbClr val="B4C3D7"/>
           </a:solidFill>
-          <a:ln w="12700">
-            <a:solidFill>
-              <a:srgbClr val="2563EB"/>
-            </a:solidFill>
+          <a:ln>
+            <a:noFill/>
           </a:ln>
         </p:spPr>
         <p:style>
@@ -3501,14 +3425,50 @@
       </p:sp>
       <p:sp>
         <p:nvSpPr>
+          <p:cNvPr id="9" name="TextBox 8"/>
+          <p:cNvSpPr txBox="1"/>
+          <p:nvPr/>
+        </p:nvSpPr>
+        <p:spPr>
+          <a:xfrm>
+            <a:off x="1828800" y="1444752"/>
+            <a:ext cx="8531352" cy="411480"/>
+          </a:xfrm>
+          <a:prstGeom prst="rect">
+            <a:avLst/>
+          </a:prstGeom>
+          <a:noFill/>
+        </p:spPr>
+        <p:txBody>
+          <a:bodyPr wrap="none">
+            <a:spAutoFit/>
+          </a:bodyPr>
+          <a:lstStyle/>
+          <a:p>
+            <a:pPr algn="ctr">
+              <a:defRPr sz="1600" b="1">
+                <a:solidFill>
+                  <a:srgbClr val="1E293B"/>
+                </a:solidFill>
+                <a:latin typeface="Calibri"/>
+              </a:defRPr>
+            </a:pPr>
+            <a:r>
+              <a:t>Major Project</a:t>
+            </a:r>
+          </a:p>
+        </p:txBody>
+      </p:sp>
+      <p:sp>
+        <p:nvSpPr>
           <p:cNvPr id="10" name="TextBox 9"/>
           <p:cNvSpPr txBox="1"/>
           <p:nvPr/>
         </p:nvSpPr>
         <p:spPr>
           <a:xfrm>
-            <a:off x="6217920" y="4069080"/>
-            <a:ext cx="2194560" cy="1188720"/>
+            <a:off x="1097280" y="1920240"/>
+            <a:ext cx="9994392" cy="1280160"/>
           </a:xfrm>
           <a:prstGeom prst="rect">
             <a:avLst/>
@@ -3521,54 +3481,52 @@
           </a:bodyPr>
           <a:lstStyle/>
           <a:p>
-            <a:pPr>
-              <a:defRPr sz="1000" b="1">
-                <a:solidFill>
-                  <a:srgbClr val="2563EB"/>
-                </a:solidFill>
-                <a:latin typeface="Calibri"/>
-              </a:defRPr>
-            </a:pPr>
-            <a:r>
-              <a:t>FRAMEWORK</a:t>
-            </a:r>
-          </a:p>
-          <a:p>
-            <a:pPr>
-              <a:defRPr sz="1200" b="1">
-                <a:solidFill>
-                  <a:srgbClr val="1E293B"/>
-                </a:solidFill>
-                <a:latin typeface="Calibri"/>
-              </a:defRPr>
-            </a:pPr>
-            <a:r>
-              <a:t>PyTorch 2.1 &amp; OpenCV</a:t>
-            </a:r>
-          </a:p>
-        </p:txBody>
-      </p:sp>
-      <p:sp>
-        <p:nvSpPr>
-          <p:cNvPr id="11" name="Rounded Rectangle 10"/>
+            <a:pPr algn="ctr">
+              <a:defRPr sz="2200" b="1">
+                <a:solidFill>
+                  <a:srgbClr val="0F172A"/>
+                </a:solidFill>
+                <a:latin typeface="Calibri"/>
+              </a:defRPr>
+            </a:pPr>
+            <a:r>
+              <a:t>Spatiotemporal Explainable Human Activity Recognition using</a:t>
+            </a:r>
+          </a:p>
+          <a:p>
+            <a:pPr algn="ctr">
+              <a:defRPr sz="2200" b="1">
+                <a:solidFill>
+                  <a:srgbClr val="0F172A"/>
+                </a:solidFill>
+                <a:latin typeface="Calibri"/>
+              </a:defRPr>
+            </a:pPr>
+            <a:r>
+              <a:t>3D Convolutional Neural Networks and Grad-CAM</a:t>
+            </a:r>
+          </a:p>
+        </p:txBody>
+      </p:sp>
+      <p:sp>
+        <p:nvSpPr>
+          <p:cNvPr id="11" name="Rectangle 10"/>
           <p:cNvSpPr/>
           <p:nvPr/>
         </p:nvSpPr>
         <p:spPr>
           <a:xfrm>
-            <a:off x="8641080" y="3977639"/>
-            <a:ext cx="2377440" cy="1371600"/>
-          </a:xfrm>
-          <a:prstGeom prst="roundRect">
+            <a:off x="457200" y="3337560"/>
+            <a:ext cx="11274552" cy="22860"/>
+          </a:xfrm>
+          <a:prstGeom prst="rect">
             <a:avLst/>
           </a:prstGeom>
           <a:solidFill>
-            <a:srgbClr val="EFF6FF"/>
+            <a:srgbClr val="B4C3D7"/>
           </a:solidFill>
-          <a:ln w="12700">
-            <a:solidFill>
-              <a:srgbClr val="2563EB"/>
-            </a:solidFill>
+          <a:ln>
+            <a:noFill/>
           </a:ln>
         </p:spPr>
         <p:style>
@@ -3601,8 +3559,8 @@
         </p:nvSpPr>
         <p:spPr>
           <a:xfrm>
-            <a:off x="8732520" y="4069080"/>
-            <a:ext cx="2194560" cy="1188720"/>
+            <a:off x="731520" y="3520440"/>
+            <a:ext cx="4572000" cy="2560320"/>
           </a:xfrm>
           <a:prstGeom prst="rect">
             <a:avLst/>
@@ -3616,20 +3574,43 @@
           <a:lstStyle/>
           <a:p>
             <a:pPr>
-              <a:defRPr sz="1000" b="1">
-                <a:solidFill>
-                  <a:srgbClr val="2563EB"/>
-                </a:solidFill>
-                <a:latin typeface="Calibri"/>
-              </a:defRPr>
-            </a:pPr>
-            <a:r>
-              <a:t>LIVE INTERFACE</a:t>
+              <a:defRPr sz="1500" b="0">
+                <a:solidFill>
+                  <a:srgbClr val="1E293B"/>
+                </a:solidFill>
+                <a:latin typeface="Calibri"/>
+              </a:defRPr>
+            </a:pPr>
+            <a:r>
+              <a:t>Project Guide</a:t>
             </a:r>
           </a:p>
           <a:p>
             <a:pPr>
-              <a:defRPr sz="1200" b="1">
+              <a:defRPr sz="800"/>
+            </a:pPr>
+          </a:p>
+          <a:p>
+            <a:pPr>
+              <a:defRPr sz="1500" b="1">
+                <a:solidFill>
+                  <a:srgbClr val="0F172A"/>
+                </a:solidFill>
+                <a:latin typeface="Calibri"/>
+              </a:defRPr>
+            </a:pPr>
+            <a:r>
+              <a:t>Prof. Rony Preetam Prakash</a:t>
+            </a:r>
+          </a:p>
+          <a:p>
+            <a:pPr>
+              <a:defRPr sz="800"/>
+            </a:pPr>
+          </a:p>
+          <a:p>
+            <a:pPr>
+              <a:defRPr sz="1400" b="0">
                 <a:solidFill>
                   <a:srgbClr val="1E293B"/>
                 </a:solidFill>
@@ -3637,7 +3618,95 @@
               </a:defRPr>
             </a:pPr>
             <a:r>
-              <a:t>30 FPS Real-Time Predictor</a:t>
+              <a:t>AIML GNDEC</a:t>
+            </a:r>
+          </a:p>
+        </p:txBody>
+      </p:sp>
+      <p:sp>
+        <p:nvSpPr>
+          <p:cNvPr id="13" name="TextBox 12"/>
+          <p:cNvSpPr txBox="1"/>
+          <p:nvPr/>
+        </p:nvSpPr>
+        <p:spPr>
+          <a:xfrm>
+            <a:off x="6858000" y="3520440"/>
+            <a:ext cx="4572000" cy="2560320"/>
+          </a:xfrm>
+          <a:prstGeom prst="rect">
+            <a:avLst/>
+          </a:prstGeom>
+          <a:noFill/>
+        </p:spPr>
+        <p:txBody>
+          <a:bodyPr wrap="square">
+            <a:spAutoFit/>
+          </a:bodyPr>
+          <a:lstStyle/>
+          <a:p>
+            <a:pPr algn="r">
+              <a:defRPr sz="1500" b="0">
+                <a:solidFill>
+                  <a:srgbClr val="1E293B"/>
+                </a:solidFill>
+                <a:latin typeface="Calibri"/>
+              </a:defRPr>
+            </a:pPr>
+            <a:r>
+              <a:t>Team Members</a:t>
+            </a:r>
+          </a:p>
+          <a:p>
+            <a:pPr algn="r">
+              <a:defRPr sz="1400" b="1">
+                <a:solidFill>
+                  <a:srgbClr val="0F172A"/>
+                </a:solidFill>
+                <a:latin typeface="Calibri"/>
+              </a:defRPr>
+            </a:pPr>
+            <a:r>
+              <a:t>Nitin Pandre</a:t>
+            </a:r>
+          </a:p>
+          <a:p>
+            <a:pPr algn="r">
+              <a:defRPr sz="1400" b="1">
+                <a:solidFill>
+                  <a:srgbClr val="0F172A"/>
+                </a:solidFill>
+                <a:latin typeface="Calibri"/>
+              </a:defRPr>
+            </a:pPr>
+            <a:r>
+              <a:t>Sachin Tamballe</a:t>
+            </a:r>
+          </a:p>
+          <a:p>
+            <a:pPr algn="r">
+              <a:defRPr sz="1400" b="1">
+                <a:solidFill>
+                  <a:srgbClr val="0F172A"/>
+                </a:solidFill>
+                <a:latin typeface="Calibri"/>
+              </a:defRPr>
+            </a:pPr>
+            <a:r>
+              <a:t>Vinayak Budnoor</a:t>
+            </a:r>
+          </a:p>
+          <a:p>
+            <a:pPr algn="r">
+              <a:defRPr sz="1400" b="1">
+                <a:solidFill>
+                  <a:srgbClr val="0F172A"/>
+                </a:solidFill>
+                <a:latin typeface="Calibri"/>
+              </a:defRPr>
+            </a:pPr>
+            <a:r>
+              <a:t>Prashanth Levadi</a:t>
             </a:r>
           </a:p>
         </p:txBody>
@@ -3662,97 +3731,23 @@
       <p:grpSpPr/>
       <p:sp>
         <p:nvSpPr>
-          <p:cNvPr id="2" name="TextBox 1"/>
-          <p:cNvSpPr txBox="1"/>
-          <p:nvPr/>
-        </p:nvSpPr>
-        <p:spPr>
-          <a:xfrm>
-            <a:off x="731520" y="320040"/>
-            <a:ext cx="10725912" cy="320040"/>
-          </a:xfrm>
-          <a:prstGeom prst="rect">
-            <a:avLst/>
-          </a:prstGeom>
-          <a:noFill/>
-        </p:spPr>
-        <p:txBody>
-          <a:bodyPr wrap="none">
-            <a:spAutoFit/>
-          </a:bodyPr>
-          <a:lstStyle/>
-          <a:p>
-            <a:pPr>
-              <a:defRPr sz="1000" b="1">
-                <a:solidFill>
-                  <a:srgbClr val="2563EB"/>
-                </a:solidFill>
-                <a:latin typeface="Calibri"/>
-              </a:defRPr>
-            </a:pPr>
-            <a:r>
-              <a:t>DEPARTMENT OF ARTIFICIAL INTELLIGENCE &amp; MACHINE LEARNING (AI &amp; ML)</a:t>
-            </a:r>
-          </a:p>
-        </p:txBody>
-      </p:sp>
-      <p:sp>
-        <p:nvSpPr>
-          <p:cNvPr id="3" name="TextBox 2"/>
-          <p:cNvSpPr txBox="1"/>
-          <p:nvPr/>
-        </p:nvSpPr>
-        <p:spPr>
-          <a:xfrm>
-            <a:off x="731520" y="594360"/>
-            <a:ext cx="10725912" cy="640080"/>
-          </a:xfrm>
-          <a:prstGeom prst="rect">
-            <a:avLst/>
-          </a:prstGeom>
-          <a:noFill/>
-        </p:spPr>
-        <p:txBody>
-          <a:bodyPr wrap="none">
-            <a:spAutoFit/>
-          </a:bodyPr>
-          <a:lstStyle/>
-          <a:p>
-            <a:pPr>
-              <a:defRPr sz="2200" b="1">
-                <a:solidFill>
-                  <a:srgbClr val="0F172A"/>
-                </a:solidFill>
-                <a:latin typeface="Calibri"/>
-              </a:defRPr>
-            </a:pPr>
-            <a:r>
-              <a:t>Video Preprocessing &amp; Data Engineering</a:t>
-            </a:r>
-          </a:p>
-        </p:txBody>
-      </p:sp>
-      <p:sp>
-        <p:nvSpPr>
-          <p:cNvPr id="4" name="Rectangle 3"/>
+          <p:cNvPr id="2" name="Rectangle 1"/>
           <p:cNvSpPr/>
           <p:nvPr/>
         </p:nvSpPr>
         <p:spPr>
           <a:xfrm>
-            <a:off x="731520" y="1234440"/>
-            <a:ext cx="10725912" cy="18288"/>
+            <a:off x="0" y="0"/>
+            <a:ext cx="12191695" cy="6858000"/>
           </a:xfrm>
           <a:prstGeom prst="rect">
             <a:avLst/>
           </a:prstGeom>
           <a:solidFill>
-            <a:srgbClr val="2563EB"/>
+            <a:srgbClr val="DCE8F8"/>
           </a:solidFill>
           <a:ln>
-            <a:solidFill>
-              <a:srgbClr val="2563EB"/>
-            </a:solidFill>
+            <a:noFill/>
           </a:ln>
         </p:spPr>
         <p:style>
@@ -3779,25 +3774,23 @@
       </p:sp>
       <p:sp>
         <p:nvSpPr>
-          <p:cNvPr id="5" name="Rectangle 4"/>
+          <p:cNvPr id="3" name="Rectangle 2"/>
           <p:cNvSpPr/>
           <p:nvPr/>
         </p:nvSpPr>
         <p:spPr>
           <a:xfrm>
-            <a:off x="731520" y="6400800"/>
-            <a:ext cx="10725912" cy="13716"/>
+            <a:off x="0" y="0"/>
+            <a:ext cx="12191695" cy="1143000"/>
           </a:xfrm>
           <a:prstGeom prst="rect">
             <a:avLst/>
           </a:prstGeom>
           <a:solidFill>
-            <a:srgbClr val="E2E8F0"/>
+            <a:srgbClr val="FFFFFF"/>
           </a:solidFill>
           <a:ln>
-            <a:solidFill>
-              <a:srgbClr val="E2E8F0"/>
-            </a:solidFill>
+            <a:noFill/>
           </a:ln>
         </p:spPr>
         <p:style>
@@ -3824,14 +3817,14 @@
       </p:sp>
       <p:sp>
         <p:nvSpPr>
-          <p:cNvPr id="6" name="TextBox 5"/>
+          <p:cNvPr id="4" name="TextBox 3"/>
           <p:cNvSpPr txBox="1"/>
           <p:nvPr/>
         </p:nvSpPr>
         <p:spPr>
           <a:xfrm>
-            <a:off x="731520" y="6419088"/>
-            <a:ext cx="10725912" cy="320040"/>
+            <a:off x="365760" y="45720"/>
+            <a:ext cx="11457432" cy="502920"/>
           </a:xfrm>
           <a:prstGeom prst="rect">
             <a:avLst/>
@@ -3844,23 +3837,260 @@
           </a:bodyPr>
           <a:lstStyle/>
           <a:p>
-            <a:pPr>
-              <a:defRPr sz="950">
-                <a:solidFill>
-                  <a:srgbClr val="64748B"/>
-                </a:solidFill>
-                <a:latin typeface="Calibri"/>
-              </a:defRPr>
-            </a:pPr>
-            <a:r>
-              <a:t>Video Activity Recognition with 3D CNN &amp; Grad-CAM  |  Dept of AI &amp; ML</a:t>
-            </a:r>
-          </a:p>
-        </p:txBody>
-      </p:sp>
-      <p:sp>
-        <p:nvSpPr>
-          <p:cNvPr id="7" name="Rounded Rectangle 6"/>
+            <a:pPr algn="ctr">
+              <a:defRPr sz="1700" b="1">
+                <a:solidFill>
+                  <a:srgbClr val="0F172A"/>
+                </a:solidFill>
+                <a:latin typeface="Calibri"/>
+              </a:defRPr>
+            </a:pPr>
+            <a:r>
+              <a:t>GURU NANAK DEV ENGINEERING COLLEGE, BIDAR</a:t>
+            </a:r>
+          </a:p>
+        </p:txBody>
+      </p:sp>
+      <p:sp>
+        <p:nvSpPr>
+          <p:cNvPr id="5" name="TextBox 4"/>
+          <p:cNvSpPr txBox="1"/>
+          <p:nvPr/>
+        </p:nvSpPr>
+        <p:spPr>
+          <a:xfrm>
+            <a:off x="365760" y="502920"/>
+            <a:ext cx="11457432" cy="384048"/>
+          </a:xfrm>
+          <a:prstGeom prst="rect">
+            <a:avLst/>
+          </a:prstGeom>
+          <a:noFill/>
+        </p:spPr>
+        <p:txBody>
+          <a:bodyPr wrap="none">
+            <a:spAutoFit/>
+          </a:bodyPr>
+          <a:lstStyle/>
+          <a:p>
+            <a:pPr algn="ctr">
+              <a:defRPr sz="1300" b="1">
+                <a:solidFill>
+                  <a:srgbClr val="2563EB"/>
+                </a:solidFill>
+                <a:latin typeface="Calibri"/>
+              </a:defRPr>
+            </a:pPr>
+            <a:r>
+              <a:t>DEPARTMENT OF AI &amp; ML</a:t>
+            </a:r>
+          </a:p>
+        </p:txBody>
+      </p:sp>
+      <p:sp>
+        <p:nvSpPr>
+          <p:cNvPr id="6" name="Rectangle 5"/>
+          <p:cNvSpPr/>
+          <p:nvPr/>
+        </p:nvSpPr>
+        <p:spPr>
+          <a:xfrm>
+            <a:off x="0" y="1143000"/>
+            <a:ext cx="12191695" cy="27432"/>
+          </a:xfrm>
+          <a:prstGeom prst="rect">
+            <a:avLst/>
+          </a:prstGeom>
+          <a:solidFill>
+            <a:srgbClr val="2563EB"/>
+          </a:solidFill>
+          <a:ln>
+            <a:noFill/>
+          </a:ln>
+        </p:spPr>
+        <p:style>
+          <a:lnRef idx="1">
+            <a:schemeClr val="accent1"/>
+          </a:lnRef>
+          <a:fillRef idx="3">
+            <a:schemeClr val="accent1"/>
+          </a:fillRef>
+          <a:effectRef idx="2">
+            <a:schemeClr val="accent1"/>
+          </a:effectRef>
+          <a:fontRef idx="minor">
+            <a:schemeClr val="lt1"/>
+          </a:fontRef>
+        </p:style>
+        <p:txBody>
+          <a:bodyPr rtlCol="0" anchor="ctr"/>
+          <a:lstStyle/>
+          <a:p>
+            <a:pPr algn="ctr"/>
+          </a:p>
+        </p:txBody>
+      </p:sp>
+      <p:sp>
+        <p:nvSpPr>
+          <p:cNvPr id="7" name="Rectangle 6"/>
+          <p:cNvSpPr/>
+          <p:nvPr/>
+        </p:nvSpPr>
+        <p:spPr>
+          <a:xfrm>
+            <a:off x="457200" y="1234440"/>
+            <a:ext cx="11274552" cy="475488"/>
+          </a:xfrm>
+          <a:prstGeom prst="rect">
+            <a:avLst/>
+          </a:prstGeom>
+          <a:solidFill>
+            <a:srgbClr val="0F172A"/>
+          </a:solidFill>
+          <a:ln>
+            <a:noFill/>
+          </a:ln>
+        </p:spPr>
+        <p:style>
+          <a:lnRef idx="1">
+            <a:schemeClr val="accent1"/>
+          </a:lnRef>
+          <a:fillRef idx="3">
+            <a:schemeClr val="accent1"/>
+          </a:fillRef>
+          <a:effectRef idx="2">
+            <a:schemeClr val="accent1"/>
+          </a:effectRef>
+          <a:fontRef idx="minor">
+            <a:schemeClr val="lt1"/>
+          </a:fontRef>
+        </p:style>
+        <p:txBody>
+          <a:bodyPr rtlCol="0" anchor="ctr"/>
+          <a:lstStyle/>
+          <a:p>
+            <a:pPr algn="ctr"/>
+          </a:p>
+        </p:txBody>
+      </p:sp>
+      <p:sp>
+        <p:nvSpPr>
+          <p:cNvPr id="8" name="TextBox 7"/>
+          <p:cNvSpPr txBox="1"/>
+          <p:nvPr/>
+        </p:nvSpPr>
+        <p:spPr>
+          <a:xfrm>
+            <a:off x="548640" y="1252728"/>
+            <a:ext cx="11091672" cy="420624"/>
+          </a:xfrm>
+          <a:prstGeom prst="rect">
+            <a:avLst/>
+          </a:prstGeom>
+          <a:noFill/>
+        </p:spPr>
+        <p:txBody>
+          <a:bodyPr wrap="none">
+            <a:spAutoFit/>
+          </a:bodyPr>
+          <a:lstStyle/>
+          <a:p>
+            <a:pPr algn="ctr">
+              <a:defRPr sz="1800" b="1">
+                <a:solidFill>
+                  <a:srgbClr val="FFFFFF"/>
+                </a:solidFill>
+                <a:latin typeface="Calibri"/>
+              </a:defRPr>
+            </a:pPr>
+            <a:r>
+              <a:t>Video Preprocessing &amp; Data Engineering</a:t>
+            </a:r>
+          </a:p>
+        </p:txBody>
+      </p:sp>
+      <p:sp>
+        <p:nvSpPr>
+          <p:cNvPr id="9" name="Rectangle 8"/>
+          <p:cNvSpPr/>
+          <p:nvPr/>
+        </p:nvSpPr>
+        <p:spPr>
+          <a:xfrm>
+            <a:off x="0" y="6583680"/>
+            <a:ext cx="12191695" cy="274320"/>
+          </a:xfrm>
+          <a:prstGeom prst="rect">
+            <a:avLst/>
+          </a:prstGeom>
+          <a:solidFill>
+            <a:srgbClr val="0F172A"/>
+          </a:solidFill>
+          <a:ln>
+            <a:noFill/>
+          </a:ln>
+        </p:spPr>
+        <p:style>
+          <a:lnRef idx="1">
+            <a:schemeClr val="accent1"/>
+          </a:lnRef>
+          <a:fillRef idx="3">
+            <a:schemeClr val="accent1"/>
+          </a:fillRef>
+          <a:effectRef idx="2">
+            <a:schemeClr val="accent1"/>
+          </a:effectRef>
+          <a:fontRef idx="minor">
+            <a:schemeClr val="lt1"/>
+          </a:fontRef>
+        </p:style>
+        <p:txBody>
+          <a:bodyPr rtlCol="0" anchor="ctr"/>
+          <a:lstStyle/>
+          <a:p>
+            <a:pPr algn="ctr"/>
+          </a:p>
+        </p:txBody>
+      </p:sp>
+      <p:sp>
+        <p:nvSpPr>
+          <p:cNvPr id="10" name="TextBox 9"/>
+          <p:cNvSpPr txBox="1"/>
+          <p:nvPr/>
+        </p:nvSpPr>
+        <p:spPr>
+          <a:xfrm>
+            <a:off x="365760" y="6601968"/>
+            <a:ext cx="11457432" cy="256032"/>
+          </a:xfrm>
+          <a:prstGeom prst="rect">
+            <a:avLst/>
+          </a:prstGeom>
+          <a:noFill/>
+        </p:spPr>
+        <p:txBody>
+          <a:bodyPr wrap="none">
+            <a:spAutoFit/>
+          </a:bodyPr>
+          <a:lstStyle/>
+          <a:p>
+            <a:pPr algn="ctr">
+              <a:defRPr sz="900">
+                <a:solidFill>
+                  <a:srgbClr val="FFFFFF"/>
+                </a:solidFill>
+                <a:latin typeface="Calibri"/>
+              </a:defRPr>
+            </a:pPr>
+            <a:r>
+              <a:t>Video Activity Recognition with 3D CNN &amp; Grad-CAM  |  AIML GNDEC</a:t>
+            </a:r>
+          </a:p>
+        </p:txBody>
+      </p:sp>
+      <p:sp>
+        <p:nvSpPr>
+          <p:cNvPr id="11" name="Rounded Rectangle 10"/>
           <p:cNvSpPr/>
           <p:nvPr/>
         </p:nvSpPr>
@@ -3905,7 +4135,7 @@
       </p:sp>
       <p:sp>
         <p:nvSpPr>
-          <p:cNvPr id="8" name="TextBox 7"/>
+          <p:cNvPr id="12" name="TextBox 11"/>
           <p:cNvSpPr txBox="1"/>
           <p:nvPr/>
         </p:nvSpPr>
@@ -3961,7 +4191,7 @@
       </p:sp>
       <p:sp>
         <p:nvSpPr>
-          <p:cNvPr id="9" name="Rounded Rectangle 8"/>
+          <p:cNvPr id="13" name="Rounded Rectangle 12"/>
           <p:cNvSpPr/>
           <p:nvPr/>
         </p:nvSpPr>
@@ -4006,7 +4236,7 @@
       </p:sp>
       <p:sp>
         <p:nvSpPr>
-          <p:cNvPr id="10" name="TextBox 9"/>
+          <p:cNvPr id="14" name="TextBox 13"/>
           <p:cNvSpPr txBox="1"/>
           <p:nvPr/>
         </p:nvSpPr>
@@ -4062,7 +4292,7 @@
       </p:sp>
       <p:sp>
         <p:nvSpPr>
-          <p:cNvPr id="11" name="Rounded Rectangle 10"/>
+          <p:cNvPr id="15" name="Rounded Rectangle 14"/>
           <p:cNvSpPr/>
           <p:nvPr/>
         </p:nvSpPr>
@@ -4107,7 +4337,7 @@
       </p:sp>
       <p:sp>
         <p:nvSpPr>
-          <p:cNvPr id="12" name="TextBox 11"/>
+          <p:cNvPr id="16" name="TextBox 15"/>
           <p:cNvSpPr txBox="1"/>
           <p:nvPr/>
         </p:nvSpPr>
@@ -4163,7 +4393,7 @@
       </p:sp>
       <p:sp>
         <p:nvSpPr>
-          <p:cNvPr id="13" name="Rounded Rectangle 12"/>
+          <p:cNvPr id="17" name="Rounded Rectangle 16"/>
           <p:cNvSpPr/>
           <p:nvPr/>
         </p:nvSpPr>
@@ -4208,7 +4438,7 @@
       </p:sp>
       <p:sp>
         <p:nvSpPr>
-          <p:cNvPr id="14" name="TextBox 13"/>
+          <p:cNvPr id="18" name="TextBox 17"/>
           <p:cNvSpPr txBox="1"/>
           <p:nvPr/>
         </p:nvSpPr>
@@ -4275,97 +4505,23 @@
       <p:grpSpPr/>
       <p:sp>
         <p:nvSpPr>
-          <p:cNvPr id="2" name="TextBox 1"/>
-          <p:cNvSpPr txBox="1"/>
-          <p:nvPr/>
-        </p:nvSpPr>
-        <p:spPr>
-          <a:xfrm>
-            <a:off x="731520" y="320040"/>
-            <a:ext cx="10725912" cy="320040"/>
-          </a:xfrm>
-          <a:prstGeom prst="rect">
-            <a:avLst/>
-          </a:prstGeom>
-          <a:noFill/>
-        </p:spPr>
-        <p:txBody>
-          <a:bodyPr wrap="none">
-            <a:spAutoFit/>
-          </a:bodyPr>
-          <a:lstStyle/>
-          <a:p>
-            <a:pPr>
-              <a:defRPr sz="1000" b="1">
-                <a:solidFill>
-                  <a:srgbClr val="2563EB"/>
-                </a:solidFill>
-                <a:latin typeface="Calibri"/>
-              </a:defRPr>
-            </a:pPr>
-            <a:r>
-              <a:t>DEPARTMENT OF ARTIFICIAL INTELLIGENCE &amp; MACHINE LEARNING (AI &amp; ML)</a:t>
-            </a:r>
-          </a:p>
-        </p:txBody>
-      </p:sp>
-      <p:sp>
-        <p:nvSpPr>
-          <p:cNvPr id="3" name="TextBox 2"/>
-          <p:cNvSpPr txBox="1"/>
-          <p:nvPr/>
-        </p:nvSpPr>
-        <p:spPr>
-          <a:xfrm>
-            <a:off x="731520" y="594360"/>
-            <a:ext cx="10725912" cy="640080"/>
-          </a:xfrm>
-          <a:prstGeom prst="rect">
-            <a:avLst/>
-          </a:prstGeom>
-          <a:noFill/>
-        </p:spPr>
-        <p:txBody>
-          <a:bodyPr wrap="none">
-            <a:spAutoFit/>
-          </a:bodyPr>
-          <a:lstStyle/>
-          <a:p>
-            <a:pPr>
-              <a:defRPr sz="2200" b="1">
-                <a:solidFill>
-                  <a:srgbClr val="0F172A"/>
-                </a:solidFill>
-                <a:latin typeface="Calibri"/>
-              </a:defRPr>
-            </a:pPr>
-            <a:r>
-              <a:t>Explainable AI (XAI) using 3D Grad-CAM</a:t>
-            </a:r>
-          </a:p>
-        </p:txBody>
-      </p:sp>
-      <p:sp>
-        <p:nvSpPr>
-          <p:cNvPr id="4" name="Rectangle 3"/>
+          <p:cNvPr id="2" name="Rectangle 1"/>
           <p:cNvSpPr/>
           <p:nvPr/>
         </p:nvSpPr>
         <p:spPr>
           <a:xfrm>
-            <a:off x="731520" y="1234440"/>
-            <a:ext cx="10725912" cy="18288"/>
+            <a:off x="0" y="0"/>
+            <a:ext cx="12191695" cy="6858000"/>
           </a:xfrm>
           <a:prstGeom prst="rect">
             <a:avLst/>
           </a:prstGeom>
           <a:solidFill>
-            <a:srgbClr val="2563EB"/>
+            <a:srgbClr val="DCE8F8"/>
           </a:solidFill>
           <a:ln>
-            <a:solidFill>
-              <a:srgbClr val="2563EB"/>
-            </a:solidFill>
+            <a:noFill/>
           </a:ln>
         </p:spPr>
         <p:style>
@@ -4392,25 +4548,23 @@
       </p:sp>
       <p:sp>
         <p:nvSpPr>
-          <p:cNvPr id="5" name="Rectangle 4"/>
+          <p:cNvPr id="3" name="Rectangle 2"/>
           <p:cNvSpPr/>
           <p:nvPr/>
         </p:nvSpPr>
         <p:spPr>
           <a:xfrm>
-            <a:off x="731520" y="6400800"/>
-            <a:ext cx="10725912" cy="13716"/>
+            <a:off x="0" y="0"/>
+            <a:ext cx="12191695" cy="1143000"/>
           </a:xfrm>
           <a:prstGeom prst="rect">
             <a:avLst/>
           </a:prstGeom>
           <a:solidFill>
-            <a:srgbClr val="E2E8F0"/>
+            <a:srgbClr val="FFFFFF"/>
           </a:solidFill>
           <a:ln>
-            <a:solidFill>
-              <a:srgbClr val="E2E8F0"/>
-            </a:solidFill>
+            <a:noFill/>
           </a:ln>
         </p:spPr>
         <p:style>
@@ -4437,14 +4591,14 @@
       </p:sp>
       <p:sp>
         <p:nvSpPr>
-          <p:cNvPr id="6" name="TextBox 5"/>
+          <p:cNvPr id="4" name="TextBox 3"/>
           <p:cNvSpPr txBox="1"/>
           <p:nvPr/>
         </p:nvSpPr>
         <p:spPr>
           <a:xfrm>
-            <a:off x="731520" y="6419088"/>
-            <a:ext cx="10725912" cy="320040"/>
+            <a:off x="365760" y="45720"/>
+            <a:ext cx="11457432" cy="502920"/>
           </a:xfrm>
           <a:prstGeom prst="rect">
             <a:avLst/>
@@ -4457,23 +4611,260 @@
           </a:bodyPr>
           <a:lstStyle/>
           <a:p>
-            <a:pPr>
-              <a:defRPr sz="950">
-                <a:solidFill>
-                  <a:srgbClr val="64748B"/>
-                </a:solidFill>
-                <a:latin typeface="Calibri"/>
-              </a:defRPr>
-            </a:pPr>
-            <a:r>
-              <a:t>Video Activity Recognition with 3D CNN &amp; Grad-CAM  |  Dept of AI &amp; ML</a:t>
-            </a:r>
-          </a:p>
-        </p:txBody>
-      </p:sp>
-      <p:sp>
-        <p:nvSpPr>
-          <p:cNvPr id="7" name="Rounded Rectangle 6"/>
+            <a:pPr algn="ctr">
+              <a:defRPr sz="1700" b="1">
+                <a:solidFill>
+                  <a:srgbClr val="0F172A"/>
+                </a:solidFill>
+                <a:latin typeface="Calibri"/>
+              </a:defRPr>
+            </a:pPr>
+            <a:r>
+              <a:t>GURU NANAK DEV ENGINEERING COLLEGE, BIDAR</a:t>
+            </a:r>
+          </a:p>
+        </p:txBody>
+      </p:sp>
+      <p:sp>
+        <p:nvSpPr>
+          <p:cNvPr id="5" name="TextBox 4"/>
+          <p:cNvSpPr txBox="1"/>
+          <p:nvPr/>
+        </p:nvSpPr>
+        <p:spPr>
+          <a:xfrm>
+            <a:off x="365760" y="502920"/>
+            <a:ext cx="11457432" cy="384048"/>
+          </a:xfrm>
+          <a:prstGeom prst="rect">
+            <a:avLst/>
+          </a:prstGeom>
+          <a:noFill/>
+        </p:spPr>
+        <p:txBody>
+          <a:bodyPr wrap="none">
+            <a:spAutoFit/>
+          </a:bodyPr>
+          <a:lstStyle/>
+          <a:p>
+            <a:pPr algn="ctr">
+              <a:defRPr sz="1300" b="1">
+                <a:solidFill>
+                  <a:srgbClr val="2563EB"/>
+                </a:solidFill>
+                <a:latin typeface="Calibri"/>
+              </a:defRPr>
+            </a:pPr>
+            <a:r>
+              <a:t>DEPARTMENT OF AI &amp; ML</a:t>
+            </a:r>
+          </a:p>
+        </p:txBody>
+      </p:sp>
+      <p:sp>
+        <p:nvSpPr>
+          <p:cNvPr id="6" name="Rectangle 5"/>
+          <p:cNvSpPr/>
+          <p:nvPr/>
+        </p:nvSpPr>
+        <p:spPr>
+          <a:xfrm>
+            <a:off x="0" y="1143000"/>
+            <a:ext cx="12191695" cy="27432"/>
+          </a:xfrm>
+          <a:prstGeom prst="rect">
+            <a:avLst/>
+          </a:prstGeom>
+          <a:solidFill>
+            <a:srgbClr val="2563EB"/>
+          </a:solidFill>
+          <a:ln>
+            <a:noFill/>
+          </a:ln>
+        </p:spPr>
+        <p:style>
+          <a:lnRef idx="1">
+            <a:schemeClr val="accent1"/>
+          </a:lnRef>
+          <a:fillRef idx="3">
+            <a:schemeClr val="accent1"/>
+          </a:fillRef>
+          <a:effectRef idx="2">
+            <a:schemeClr val="accent1"/>
+          </a:effectRef>
+          <a:fontRef idx="minor">
+            <a:schemeClr val="lt1"/>
+          </a:fontRef>
+        </p:style>
+        <p:txBody>
+          <a:bodyPr rtlCol="0" anchor="ctr"/>
+          <a:lstStyle/>
+          <a:p>
+            <a:pPr algn="ctr"/>
+          </a:p>
+        </p:txBody>
+      </p:sp>
+      <p:sp>
+        <p:nvSpPr>
+          <p:cNvPr id="7" name="Rectangle 6"/>
+          <p:cNvSpPr/>
+          <p:nvPr/>
+        </p:nvSpPr>
+        <p:spPr>
+          <a:xfrm>
+            <a:off x="457200" y="1234440"/>
+            <a:ext cx="11274552" cy="475488"/>
+          </a:xfrm>
+          <a:prstGeom prst="rect">
+            <a:avLst/>
+          </a:prstGeom>
+          <a:solidFill>
+            <a:srgbClr val="0F172A"/>
+          </a:solidFill>
+          <a:ln>
+            <a:noFill/>
+          </a:ln>
+        </p:spPr>
+        <p:style>
+          <a:lnRef idx="1">
+            <a:schemeClr val="accent1"/>
+          </a:lnRef>
+          <a:fillRef idx="3">
+            <a:schemeClr val="accent1"/>
+          </a:fillRef>
+          <a:effectRef idx="2">
+            <a:schemeClr val="accent1"/>
+          </a:effectRef>
+          <a:fontRef idx="minor">
+            <a:schemeClr val="lt1"/>
+          </a:fontRef>
+        </p:style>
+        <p:txBody>
+          <a:bodyPr rtlCol="0" anchor="ctr"/>
+          <a:lstStyle/>
+          <a:p>
+            <a:pPr algn="ctr"/>
+          </a:p>
+        </p:txBody>
+      </p:sp>
+      <p:sp>
+        <p:nvSpPr>
+          <p:cNvPr id="8" name="TextBox 7"/>
+          <p:cNvSpPr txBox="1"/>
+          <p:nvPr/>
+        </p:nvSpPr>
+        <p:spPr>
+          <a:xfrm>
+            <a:off x="548640" y="1252728"/>
+            <a:ext cx="11091672" cy="420624"/>
+          </a:xfrm>
+          <a:prstGeom prst="rect">
+            <a:avLst/>
+          </a:prstGeom>
+          <a:noFill/>
+        </p:spPr>
+        <p:txBody>
+          <a:bodyPr wrap="none">
+            <a:spAutoFit/>
+          </a:bodyPr>
+          <a:lstStyle/>
+          <a:p>
+            <a:pPr algn="ctr">
+              <a:defRPr sz="1800" b="1">
+                <a:solidFill>
+                  <a:srgbClr val="FFFFFF"/>
+                </a:solidFill>
+                <a:latin typeface="Calibri"/>
+              </a:defRPr>
+            </a:pPr>
+            <a:r>
+              <a:t>Explainable AI (XAI) using 3D Grad-CAM</a:t>
+            </a:r>
+          </a:p>
+        </p:txBody>
+      </p:sp>
+      <p:sp>
+        <p:nvSpPr>
+          <p:cNvPr id="9" name="Rectangle 8"/>
+          <p:cNvSpPr/>
+          <p:nvPr/>
+        </p:nvSpPr>
+        <p:spPr>
+          <a:xfrm>
+            <a:off x="0" y="6583680"/>
+            <a:ext cx="12191695" cy="274320"/>
+          </a:xfrm>
+          <a:prstGeom prst="rect">
+            <a:avLst/>
+          </a:prstGeom>
+          <a:solidFill>
+            <a:srgbClr val="0F172A"/>
+          </a:solidFill>
+          <a:ln>
+            <a:noFill/>
+          </a:ln>
+        </p:spPr>
+        <p:style>
+          <a:lnRef idx="1">
+            <a:schemeClr val="accent1"/>
+          </a:lnRef>
+          <a:fillRef idx="3">
+            <a:schemeClr val="accent1"/>
+          </a:fillRef>
+          <a:effectRef idx="2">
+            <a:schemeClr val="accent1"/>
+          </a:effectRef>
+          <a:fontRef idx="minor">
+            <a:schemeClr val="lt1"/>
+          </a:fontRef>
+        </p:style>
+        <p:txBody>
+          <a:bodyPr rtlCol="0" anchor="ctr"/>
+          <a:lstStyle/>
+          <a:p>
+            <a:pPr algn="ctr"/>
+          </a:p>
+        </p:txBody>
+      </p:sp>
+      <p:sp>
+        <p:nvSpPr>
+          <p:cNvPr id="10" name="TextBox 9"/>
+          <p:cNvSpPr txBox="1"/>
+          <p:nvPr/>
+        </p:nvSpPr>
+        <p:spPr>
+          <a:xfrm>
+            <a:off x="365760" y="6601968"/>
+            <a:ext cx="11457432" cy="256032"/>
+          </a:xfrm>
+          <a:prstGeom prst="rect">
+            <a:avLst/>
+          </a:prstGeom>
+          <a:noFill/>
+        </p:spPr>
+        <p:txBody>
+          <a:bodyPr wrap="none">
+            <a:spAutoFit/>
+          </a:bodyPr>
+          <a:lstStyle/>
+          <a:p>
+            <a:pPr algn="ctr">
+              <a:defRPr sz="900">
+                <a:solidFill>
+                  <a:srgbClr val="FFFFFF"/>
+                </a:solidFill>
+                <a:latin typeface="Calibri"/>
+              </a:defRPr>
+            </a:pPr>
+            <a:r>
+              <a:t>Video Activity Recognition with 3D CNN &amp; Grad-CAM  |  AIML GNDEC</a:t>
+            </a:r>
+          </a:p>
+        </p:txBody>
+      </p:sp>
+      <p:sp>
+        <p:nvSpPr>
+          <p:cNvPr id="11" name="Rounded Rectangle 10"/>
           <p:cNvSpPr/>
           <p:nvPr/>
         </p:nvSpPr>
@@ -4518,7 +4909,7 @@
       </p:sp>
       <p:sp>
         <p:nvSpPr>
-          <p:cNvPr id="8" name="TextBox 7"/>
+          <p:cNvPr id="12" name="TextBox 11"/>
           <p:cNvSpPr txBox="1"/>
           <p:nvPr/>
         </p:nvSpPr>
@@ -4634,7 +5025,7 @@
       </p:sp>
       <p:sp>
         <p:nvSpPr>
-          <p:cNvPr id="9" name="Rounded Rectangle 8"/>
+          <p:cNvPr id="13" name="Rounded Rectangle 12"/>
           <p:cNvSpPr/>
           <p:nvPr/>
         </p:nvSpPr>
@@ -4679,7 +5070,7 @@
       </p:sp>
       <p:sp>
         <p:nvSpPr>
-          <p:cNvPr id="10" name="TextBox 9"/>
+          <p:cNvPr id="14" name="TextBox 13"/>
           <p:cNvSpPr txBox="1"/>
           <p:nvPr/>
         </p:nvSpPr>
@@ -4797,97 +5188,23 @@
       <p:grpSpPr/>
       <p:sp>
         <p:nvSpPr>
-          <p:cNvPr id="2" name="TextBox 1"/>
-          <p:cNvSpPr txBox="1"/>
-          <p:nvPr/>
-        </p:nvSpPr>
-        <p:spPr>
-          <a:xfrm>
-            <a:off x="731520" y="320040"/>
-            <a:ext cx="10725912" cy="320040"/>
-          </a:xfrm>
-          <a:prstGeom prst="rect">
-            <a:avLst/>
-          </a:prstGeom>
-          <a:noFill/>
-        </p:spPr>
-        <p:txBody>
-          <a:bodyPr wrap="none">
-            <a:spAutoFit/>
-          </a:bodyPr>
-          <a:lstStyle/>
-          <a:p>
-            <a:pPr>
-              <a:defRPr sz="1000" b="1">
-                <a:solidFill>
-                  <a:srgbClr val="2563EB"/>
-                </a:solidFill>
-                <a:latin typeface="Calibri"/>
-              </a:defRPr>
-            </a:pPr>
-            <a:r>
-              <a:t>DEPARTMENT OF ARTIFICIAL INTELLIGENCE &amp; MACHINE LEARNING (AI &amp; ML)</a:t>
-            </a:r>
-          </a:p>
-        </p:txBody>
-      </p:sp>
-      <p:sp>
-        <p:nvSpPr>
-          <p:cNvPr id="3" name="TextBox 2"/>
-          <p:cNvSpPr txBox="1"/>
-          <p:nvPr/>
-        </p:nvSpPr>
-        <p:spPr>
-          <a:xfrm>
-            <a:off x="731520" y="594360"/>
-            <a:ext cx="10725912" cy="640080"/>
-          </a:xfrm>
-          <a:prstGeom prst="rect">
-            <a:avLst/>
-          </a:prstGeom>
-          <a:noFill/>
-        </p:spPr>
-        <p:txBody>
-          <a:bodyPr wrap="none">
-            <a:spAutoFit/>
-          </a:bodyPr>
-          <a:lstStyle/>
-          <a:p>
-            <a:pPr>
-              <a:defRPr sz="2200" b="1">
-                <a:solidFill>
-                  <a:srgbClr val="0F172A"/>
-                </a:solidFill>
-                <a:latin typeface="Calibri"/>
-              </a:defRPr>
-            </a:pPr>
-            <a:r>
-              <a:t>Experimental Setup &amp; Training Configuration</a:t>
-            </a:r>
-          </a:p>
-        </p:txBody>
-      </p:sp>
-      <p:sp>
-        <p:nvSpPr>
-          <p:cNvPr id="4" name="Rectangle 3"/>
+          <p:cNvPr id="2" name="Rectangle 1"/>
           <p:cNvSpPr/>
           <p:nvPr/>
         </p:nvSpPr>
         <p:spPr>
           <a:xfrm>
-            <a:off x="731520" y="1234440"/>
-            <a:ext cx="10725912" cy="18288"/>
+            <a:off x="0" y="0"/>
+            <a:ext cx="12191695" cy="6858000"/>
           </a:xfrm>
           <a:prstGeom prst="rect">
             <a:avLst/>
           </a:prstGeom>
           <a:solidFill>
-            <a:srgbClr val="2563EB"/>
+            <a:srgbClr val="DCE8F8"/>
           </a:solidFill>
           <a:ln>
-            <a:solidFill>
-              <a:srgbClr val="2563EB"/>
-            </a:solidFill>
+            <a:noFill/>
           </a:ln>
         </p:spPr>
         <p:style>
@@ -4914,25 +5231,23 @@
       </p:sp>
       <p:sp>
         <p:nvSpPr>
-          <p:cNvPr id="5" name="Rectangle 4"/>
+          <p:cNvPr id="3" name="Rectangle 2"/>
           <p:cNvSpPr/>
           <p:nvPr/>
         </p:nvSpPr>
         <p:spPr>
           <a:xfrm>
-            <a:off x="731520" y="6400800"/>
-            <a:ext cx="10725912" cy="13716"/>
+            <a:off x="0" y="0"/>
+            <a:ext cx="12191695" cy="1143000"/>
           </a:xfrm>
           <a:prstGeom prst="rect">
             <a:avLst/>
           </a:prstGeom>
           <a:solidFill>
-            <a:srgbClr val="E2E8F0"/>
+            <a:srgbClr val="FFFFFF"/>
           </a:solidFill>
           <a:ln>
-            <a:solidFill>
-              <a:srgbClr val="E2E8F0"/>
-            </a:solidFill>
+            <a:noFill/>
           </a:ln>
         </p:spPr>
         <p:style>
@@ -4959,14 +5274,14 @@
       </p:sp>
       <p:sp>
         <p:nvSpPr>
-          <p:cNvPr id="6" name="TextBox 5"/>
+          <p:cNvPr id="4" name="TextBox 3"/>
           <p:cNvSpPr txBox="1"/>
           <p:nvPr/>
         </p:nvSpPr>
         <p:spPr>
           <a:xfrm>
-            <a:off x="731520" y="6419088"/>
-            <a:ext cx="10725912" cy="320040"/>
+            <a:off x="365760" y="45720"/>
+            <a:ext cx="11457432" cy="502920"/>
           </a:xfrm>
           <a:prstGeom prst="rect">
             <a:avLst/>
@@ -4979,23 +5294,260 @@
           </a:bodyPr>
           <a:lstStyle/>
           <a:p>
-            <a:pPr>
-              <a:defRPr sz="950">
-                <a:solidFill>
-                  <a:srgbClr val="64748B"/>
-                </a:solidFill>
-                <a:latin typeface="Calibri"/>
-              </a:defRPr>
-            </a:pPr>
-            <a:r>
-              <a:t>Video Activity Recognition with 3D CNN &amp; Grad-CAM  |  Dept of AI &amp; ML</a:t>
-            </a:r>
-          </a:p>
-        </p:txBody>
-      </p:sp>
-      <p:sp>
-        <p:nvSpPr>
-          <p:cNvPr id="7" name="Rounded Rectangle 6"/>
+            <a:pPr algn="ctr">
+              <a:defRPr sz="1700" b="1">
+                <a:solidFill>
+                  <a:srgbClr val="0F172A"/>
+                </a:solidFill>
+                <a:latin typeface="Calibri"/>
+              </a:defRPr>
+            </a:pPr>
+            <a:r>
+              <a:t>GURU NANAK DEV ENGINEERING COLLEGE, BIDAR</a:t>
+            </a:r>
+          </a:p>
+        </p:txBody>
+      </p:sp>
+      <p:sp>
+        <p:nvSpPr>
+          <p:cNvPr id="5" name="TextBox 4"/>
+          <p:cNvSpPr txBox="1"/>
+          <p:nvPr/>
+        </p:nvSpPr>
+        <p:spPr>
+          <a:xfrm>
+            <a:off x="365760" y="502920"/>
+            <a:ext cx="11457432" cy="384048"/>
+          </a:xfrm>
+          <a:prstGeom prst="rect">
+            <a:avLst/>
+          </a:prstGeom>
+          <a:noFill/>
+        </p:spPr>
+        <p:txBody>
+          <a:bodyPr wrap="none">
+            <a:spAutoFit/>
+          </a:bodyPr>
+          <a:lstStyle/>
+          <a:p>
+            <a:pPr algn="ctr">
+              <a:defRPr sz="1300" b="1">
+                <a:solidFill>
+                  <a:srgbClr val="2563EB"/>
+                </a:solidFill>
+                <a:latin typeface="Calibri"/>
+              </a:defRPr>
+            </a:pPr>
+            <a:r>
+              <a:t>DEPARTMENT OF AI &amp; ML</a:t>
+            </a:r>
+          </a:p>
+        </p:txBody>
+      </p:sp>
+      <p:sp>
+        <p:nvSpPr>
+          <p:cNvPr id="6" name="Rectangle 5"/>
+          <p:cNvSpPr/>
+          <p:nvPr/>
+        </p:nvSpPr>
+        <p:spPr>
+          <a:xfrm>
+            <a:off x="0" y="1143000"/>
+            <a:ext cx="12191695" cy="27432"/>
+          </a:xfrm>
+          <a:prstGeom prst="rect">
+            <a:avLst/>
+          </a:prstGeom>
+          <a:solidFill>
+            <a:srgbClr val="2563EB"/>
+          </a:solidFill>
+          <a:ln>
+            <a:noFill/>
+          </a:ln>
+        </p:spPr>
+        <p:style>
+          <a:lnRef idx="1">
+            <a:schemeClr val="accent1"/>
+          </a:lnRef>
+          <a:fillRef idx="3">
+            <a:schemeClr val="accent1"/>
+          </a:fillRef>
+          <a:effectRef idx="2">
+            <a:schemeClr val="accent1"/>
+          </a:effectRef>
+          <a:fontRef idx="minor">
+            <a:schemeClr val="lt1"/>
+          </a:fontRef>
+        </p:style>
+        <p:txBody>
+          <a:bodyPr rtlCol="0" anchor="ctr"/>
+          <a:lstStyle/>
+          <a:p>
+            <a:pPr algn="ctr"/>
+          </a:p>
+        </p:txBody>
+      </p:sp>
+      <p:sp>
+        <p:nvSpPr>
+          <p:cNvPr id="7" name="Rectangle 6"/>
+          <p:cNvSpPr/>
+          <p:nvPr/>
+        </p:nvSpPr>
+        <p:spPr>
+          <a:xfrm>
+            <a:off x="457200" y="1234440"/>
+            <a:ext cx="11274552" cy="475488"/>
+          </a:xfrm>
+          <a:prstGeom prst="rect">
+            <a:avLst/>
+          </a:prstGeom>
+          <a:solidFill>
+            <a:srgbClr val="0F172A"/>
+          </a:solidFill>
+          <a:ln>
+            <a:noFill/>
+          </a:ln>
+        </p:spPr>
+        <p:style>
+          <a:lnRef idx="1">
+            <a:schemeClr val="accent1"/>
+          </a:lnRef>
+          <a:fillRef idx="3">
+            <a:schemeClr val="accent1"/>
+          </a:fillRef>
+          <a:effectRef idx="2">
+            <a:schemeClr val="accent1"/>
+          </a:effectRef>
+          <a:fontRef idx="minor">
+            <a:schemeClr val="lt1"/>
+          </a:fontRef>
+        </p:style>
+        <p:txBody>
+          <a:bodyPr rtlCol="0" anchor="ctr"/>
+          <a:lstStyle/>
+          <a:p>
+            <a:pPr algn="ctr"/>
+          </a:p>
+        </p:txBody>
+      </p:sp>
+      <p:sp>
+        <p:nvSpPr>
+          <p:cNvPr id="8" name="TextBox 7"/>
+          <p:cNvSpPr txBox="1"/>
+          <p:nvPr/>
+        </p:nvSpPr>
+        <p:spPr>
+          <a:xfrm>
+            <a:off x="548640" y="1252728"/>
+            <a:ext cx="11091672" cy="420624"/>
+          </a:xfrm>
+          <a:prstGeom prst="rect">
+            <a:avLst/>
+          </a:prstGeom>
+          <a:noFill/>
+        </p:spPr>
+        <p:txBody>
+          <a:bodyPr wrap="none">
+            <a:spAutoFit/>
+          </a:bodyPr>
+          <a:lstStyle/>
+          <a:p>
+            <a:pPr algn="ctr">
+              <a:defRPr sz="1800" b="1">
+                <a:solidFill>
+                  <a:srgbClr val="FFFFFF"/>
+                </a:solidFill>
+                <a:latin typeface="Calibri"/>
+              </a:defRPr>
+            </a:pPr>
+            <a:r>
+              <a:t>Experimental Setup &amp; Training Configuration</a:t>
+            </a:r>
+          </a:p>
+        </p:txBody>
+      </p:sp>
+      <p:sp>
+        <p:nvSpPr>
+          <p:cNvPr id="9" name="Rectangle 8"/>
+          <p:cNvSpPr/>
+          <p:nvPr/>
+        </p:nvSpPr>
+        <p:spPr>
+          <a:xfrm>
+            <a:off x="0" y="6583680"/>
+            <a:ext cx="12191695" cy="274320"/>
+          </a:xfrm>
+          <a:prstGeom prst="rect">
+            <a:avLst/>
+          </a:prstGeom>
+          <a:solidFill>
+            <a:srgbClr val="0F172A"/>
+          </a:solidFill>
+          <a:ln>
+            <a:noFill/>
+          </a:ln>
+        </p:spPr>
+        <p:style>
+          <a:lnRef idx="1">
+            <a:schemeClr val="accent1"/>
+          </a:lnRef>
+          <a:fillRef idx="3">
+            <a:schemeClr val="accent1"/>
+          </a:fillRef>
+          <a:effectRef idx="2">
+            <a:schemeClr val="accent1"/>
+          </a:effectRef>
+          <a:fontRef idx="minor">
+            <a:schemeClr val="lt1"/>
+          </a:fontRef>
+        </p:style>
+        <p:txBody>
+          <a:bodyPr rtlCol="0" anchor="ctr"/>
+          <a:lstStyle/>
+          <a:p>
+            <a:pPr algn="ctr"/>
+          </a:p>
+        </p:txBody>
+      </p:sp>
+      <p:sp>
+        <p:nvSpPr>
+          <p:cNvPr id="10" name="TextBox 9"/>
+          <p:cNvSpPr txBox="1"/>
+          <p:nvPr/>
+        </p:nvSpPr>
+        <p:spPr>
+          <a:xfrm>
+            <a:off x="365760" y="6601968"/>
+            <a:ext cx="11457432" cy="256032"/>
+          </a:xfrm>
+          <a:prstGeom prst="rect">
+            <a:avLst/>
+          </a:prstGeom>
+          <a:noFill/>
+        </p:spPr>
+        <p:txBody>
+          <a:bodyPr wrap="none">
+            <a:spAutoFit/>
+          </a:bodyPr>
+          <a:lstStyle/>
+          <a:p>
+            <a:pPr algn="ctr">
+              <a:defRPr sz="900">
+                <a:solidFill>
+                  <a:srgbClr val="FFFFFF"/>
+                </a:solidFill>
+                <a:latin typeface="Calibri"/>
+              </a:defRPr>
+            </a:pPr>
+            <a:r>
+              <a:t>Video Activity Recognition with 3D CNN &amp; Grad-CAM  |  AIML GNDEC</a:t>
+            </a:r>
+          </a:p>
+        </p:txBody>
+      </p:sp>
+      <p:sp>
+        <p:nvSpPr>
+          <p:cNvPr id="11" name="Rounded Rectangle 10"/>
           <p:cNvSpPr/>
           <p:nvPr/>
         </p:nvSpPr>
@@ -5040,7 +5592,7 @@
       </p:sp>
       <p:sp>
         <p:nvSpPr>
-          <p:cNvPr id="8" name="TextBox 7"/>
+          <p:cNvPr id="12" name="TextBox 11"/>
           <p:cNvSpPr txBox="1"/>
           <p:nvPr/>
         </p:nvSpPr>
@@ -5108,7 +5660,7 @@
       </p:sp>
       <p:sp>
         <p:nvSpPr>
-          <p:cNvPr id="9" name="Rounded Rectangle 8"/>
+          <p:cNvPr id="13" name="Rounded Rectangle 12"/>
           <p:cNvSpPr/>
           <p:nvPr/>
         </p:nvSpPr>
@@ -5153,7 +5705,7 @@
       </p:sp>
       <p:sp>
         <p:nvSpPr>
-          <p:cNvPr id="10" name="TextBox 9"/>
+          <p:cNvPr id="14" name="TextBox 13"/>
           <p:cNvSpPr txBox="1"/>
           <p:nvPr/>
         </p:nvSpPr>
@@ -5221,7 +5773,7 @@
       </p:sp>
       <p:sp>
         <p:nvSpPr>
-          <p:cNvPr id="11" name="Rounded Rectangle 10"/>
+          <p:cNvPr id="15" name="Rounded Rectangle 14"/>
           <p:cNvSpPr/>
           <p:nvPr/>
         </p:nvSpPr>
@@ -5266,7 +5818,7 @@
       </p:sp>
       <p:sp>
         <p:nvSpPr>
-          <p:cNvPr id="12" name="TextBox 11"/>
+          <p:cNvPr id="16" name="TextBox 15"/>
           <p:cNvSpPr txBox="1"/>
           <p:nvPr/>
         </p:nvSpPr>
@@ -5334,7 +5886,7 @@
       </p:sp>
       <p:sp>
         <p:nvSpPr>
-          <p:cNvPr id="13" name="Rounded Rectangle 12"/>
+          <p:cNvPr id="17" name="Rounded Rectangle 16"/>
           <p:cNvSpPr/>
           <p:nvPr/>
         </p:nvSpPr>
@@ -5379,7 +5931,7 @@
       </p:sp>
       <p:sp>
         <p:nvSpPr>
-          <p:cNvPr id="14" name="TextBox 13"/>
+          <p:cNvPr id="18" name="TextBox 17"/>
           <p:cNvSpPr txBox="1"/>
           <p:nvPr/>
         </p:nvSpPr>
@@ -5447,7 +5999,7 @@
       </p:sp>
       <p:sp>
         <p:nvSpPr>
-          <p:cNvPr id="15" name="Rounded Rectangle 14"/>
+          <p:cNvPr id="19" name="Rounded Rectangle 18"/>
           <p:cNvSpPr/>
           <p:nvPr/>
         </p:nvSpPr>
@@ -5492,7 +6044,7 @@
       </p:sp>
       <p:sp>
         <p:nvSpPr>
-          <p:cNvPr id="16" name="TextBox 15"/>
+          <p:cNvPr id="20" name="TextBox 19"/>
           <p:cNvSpPr txBox="1"/>
           <p:nvPr/>
         </p:nvSpPr>
@@ -5610,97 +6162,23 @@
       <p:grpSpPr/>
       <p:sp>
         <p:nvSpPr>
-          <p:cNvPr id="2" name="TextBox 1"/>
-          <p:cNvSpPr txBox="1"/>
-          <p:nvPr/>
-        </p:nvSpPr>
-        <p:spPr>
-          <a:xfrm>
-            <a:off x="731520" y="320040"/>
-            <a:ext cx="10725912" cy="320040"/>
-          </a:xfrm>
-          <a:prstGeom prst="rect">
-            <a:avLst/>
-          </a:prstGeom>
-          <a:noFill/>
-        </p:spPr>
-        <p:txBody>
-          <a:bodyPr wrap="none">
-            <a:spAutoFit/>
-          </a:bodyPr>
-          <a:lstStyle/>
-          <a:p>
-            <a:pPr>
-              <a:defRPr sz="1000" b="1">
-                <a:solidFill>
-                  <a:srgbClr val="2563EB"/>
-                </a:solidFill>
-                <a:latin typeface="Calibri"/>
-              </a:defRPr>
-            </a:pPr>
-            <a:r>
-              <a:t>DEPARTMENT OF ARTIFICIAL INTELLIGENCE &amp; MACHINE LEARNING (AI &amp; ML)</a:t>
-            </a:r>
-          </a:p>
-        </p:txBody>
-      </p:sp>
-      <p:sp>
-        <p:nvSpPr>
-          <p:cNvPr id="3" name="TextBox 2"/>
-          <p:cNvSpPr txBox="1"/>
-          <p:nvPr/>
-        </p:nvSpPr>
-        <p:spPr>
-          <a:xfrm>
-            <a:off x="731520" y="594360"/>
-            <a:ext cx="10725912" cy="640080"/>
-          </a:xfrm>
-          <a:prstGeom prst="rect">
-            <a:avLst/>
-          </a:prstGeom>
-          <a:noFill/>
-        </p:spPr>
-        <p:txBody>
-          <a:bodyPr wrap="none">
-            <a:spAutoFit/>
-          </a:bodyPr>
-          <a:lstStyle/>
-          <a:p>
-            <a:pPr>
-              <a:defRPr sz="2200" b="1">
-                <a:solidFill>
-                  <a:srgbClr val="0F172A"/>
-                </a:solidFill>
-                <a:latin typeface="Calibri"/>
-              </a:defRPr>
-            </a:pPr>
-            <a:r>
-              <a:t>Performance Evaluation Framework</a:t>
-            </a:r>
-          </a:p>
-        </p:txBody>
-      </p:sp>
-      <p:sp>
-        <p:nvSpPr>
-          <p:cNvPr id="4" name="Rectangle 3"/>
+          <p:cNvPr id="2" name="Rectangle 1"/>
           <p:cNvSpPr/>
           <p:nvPr/>
         </p:nvSpPr>
         <p:spPr>
           <a:xfrm>
-            <a:off x="731520" y="1234440"/>
-            <a:ext cx="10725912" cy="18288"/>
+            <a:off x="0" y="0"/>
+            <a:ext cx="12191695" cy="6858000"/>
           </a:xfrm>
           <a:prstGeom prst="rect">
             <a:avLst/>
           </a:prstGeom>
           <a:solidFill>
-            <a:srgbClr val="2563EB"/>
+            <a:srgbClr val="DCE8F8"/>
           </a:solidFill>
           <a:ln>
-            <a:solidFill>
-              <a:srgbClr val="2563EB"/>
-            </a:solidFill>
+            <a:noFill/>
           </a:ln>
         </p:spPr>
         <p:style>
@@ -5727,25 +6205,23 @@
       </p:sp>
       <p:sp>
         <p:nvSpPr>
-          <p:cNvPr id="5" name="Rectangle 4"/>
+          <p:cNvPr id="3" name="Rectangle 2"/>
           <p:cNvSpPr/>
           <p:nvPr/>
         </p:nvSpPr>
         <p:spPr>
           <a:xfrm>
-            <a:off x="731520" y="6400800"/>
-            <a:ext cx="10725912" cy="13716"/>
+            <a:off x="0" y="0"/>
+            <a:ext cx="12191695" cy="1143000"/>
           </a:xfrm>
           <a:prstGeom prst="rect">
             <a:avLst/>
           </a:prstGeom>
           <a:solidFill>
-            <a:srgbClr val="E2E8F0"/>
+            <a:srgbClr val="FFFFFF"/>
           </a:solidFill>
           <a:ln>
-            <a:solidFill>
-              <a:srgbClr val="E2E8F0"/>
-            </a:solidFill>
+            <a:noFill/>
           </a:ln>
         </p:spPr>
         <p:style>
@@ -5772,14 +6248,14 @@
       </p:sp>
       <p:sp>
         <p:nvSpPr>
-          <p:cNvPr id="6" name="TextBox 5"/>
+          <p:cNvPr id="4" name="TextBox 3"/>
           <p:cNvSpPr txBox="1"/>
           <p:nvPr/>
         </p:nvSpPr>
         <p:spPr>
           <a:xfrm>
-            <a:off x="731520" y="6419088"/>
-            <a:ext cx="10725912" cy="320040"/>
+            <a:off x="365760" y="45720"/>
+            <a:ext cx="11457432" cy="502920"/>
           </a:xfrm>
           <a:prstGeom prst="rect">
             <a:avLst/>
@@ -5792,23 +6268,260 @@
           </a:bodyPr>
           <a:lstStyle/>
           <a:p>
-            <a:pPr>
-              <a:defRPr sz="950">
-                <a:solidFill>
-                  <a:srgbClr val="64748B"/>
-                </a:solidFill>
-                <a:latin typeface="Calibri"/>
-              </a:defRPr>
-            </a:pPr>
-            <a:r>
-              <a:t>Video Activity Recognition with 3D CNN &amp; Grad-CAM  |  Dept of AI &amp; ML</a:t>
+            <a:pPr algn="ctr">
+              <a:defRPr sz="1700" b="1">
+                <a:solidFill>
+                  <a:srgbClr val="0F172A"/>
+                </a:solidFill>
+                <a:latin typeface="Calibri"/>
+              </a:defRPr>
+            </a:pPr>
+            <a:r>
+              <a:t>GURU NANAK DEV ENGINEERING COLLEGE, BIDAR</a:t>
+            </a:r>
+          </a:p>
+        </p:txBody>
+      </p:sp>
+      <p:sp>
+        <p:nvSpPr>
+          <p:cNvPr id="5" name="TextBox 4"/>
+          <p:cNvSpPr txBox="1"/>
+          <p:nvPr/>
+        </p:nvSpPr>
+        <p:spPr>
+          <a:xfrm>
+            <a:off x="365760" y="502920"/>
+            <a:ext cx="11457432" cy="384048"/>
+          </a:xfrm>
+          <a:prstGeom prst="rect">
+            <a:avLst/>
+          </a:prstGeom>
+          <a:noFill/>
+        </p:spPr>
+        <p:txBody>
+          <a:bodyPr wrap="none">
+            <a:spAutoFit/>
+          </a:bodyPr>
+          <a:lstStyle/>
+          <a:p>
+            <a:pPr algn="ctr">
+              <a:defRPr sz="1300" b="1">
+                <a:solidFill>
+                  <a:srgbClr val="2563EB"/>
+                </a:solidFill>
+                <a:latin typeface="Calibri"/>
+              </a:defRPr>
+            </a:pPr>
+            <a:r>
+              <a:t>DEPARTMENT OF AI &amp; ML</a:t>
+            </a:r>
+          </a:p>
+        </p:txBody>
+      </p:sp>
+      <p:sp>
+        <p:nvSpPr>
+          <p:cNvPr id="6" name="Rectangle 5"/>
+          <p:cNvSpPr/>
+          <p:nvPr/>
+        </p:nvSpPr>
+        <p:spPr>
+          <a:xfrm>
+            <a:off x="0" y="1143000"/>
+            <a:ext cx="12191695" cy="27432"/>
+          </a:xfrm>
+          <a:prstGeom prst="rect">
+            <a:avLst/>
+          </a:prstGeom>
+          <a:solidFill>
+            <a:srgbClr val="2563EB"/>
+          </a:solidFill>
+          <a:ln>
+            <a:noFill/>
+          </a:ln>
+        </p:spPr>
+        <p:style>
+          <a:lnRef idx="1">
+            <a:schemeClr val="accent1"/>
+          </a:lnRef>
+          <a:fillRef idx="3">
+            <a:schemeClr val="accent1"/>
+          </a:fillRef>
+          <a:effectRef idx="2">
+            <a:schemeClr val="accent1"/>
+          </a:effectRef>
+          <a:fontRef idx="minor">
+            <a:schemeClr val="lt1"/>
+          </a:fontRef>
+        </p:style>
+        <p:txBody>
+          <a:bodyPr rtlCol="0" anchor="ctr"/>
+          <a:lstStyle/>
+          <a:p>
+            <a:pPr algn="ctr"/>
+          </a:p>
+        </p:txBody>
+      </p:sp>
+      <p:sp>
+        <p:nvSpPr>
+          <p:cNvPr id="7" name="Rectangle 6"/>
+          <p:cNvSpPr/>
+          <p:nvPr/>
+        </p:nvSpPr>
+        <p:spPr>
+          <a:xfrm>
+            <a:off x="457200" y="1234440"/>
+            <a:ext cx="11274552" cy="475488"/>
+          </a:xfrm>
+          <a:prstGeom prst="rect">
+            <a:avLst/>
+          </a:prstGeom>
+          <a:solidFill>
+            <a:srgbClr val="0F172A"/>
+          </a:solidFill>
+          <a:ln>
+            <a:noFill/>
+          </a:ln>
+        </p:spPr>
+        <p:style>
+          <a:lnRef idx="1">
+            <a:schemeClr val="accent1"/>
+          </a:lnRef>
+          <a:fillRef idx="3">
+            <a:schemeClr val="accent1"/>
+          </a:fillRef>
+          <a:effectRef idx="2">
+            <a:schemeClr val="accent1"/>
+          </a:effectRef>
+          <a:fontRef idx="minor">
+            <a:schemeClr val="lt1"/>
+          </a:fontRef>
+        </p:style>
+        <p:txBody>
+          <a:bodyPr rtlCol="0" anchor="ctr"/>
+          <a:lstStyle/>
+          <a:p>
+            <a:pPr algn="ctr"/>
+          </a:p>
+        </p:txBody>
+      </p:sp>
+      <p:sp>
+        <p:nvSpPr>
+          <p:cNvPr id="8" name="TextBox 7"/>
+          <p:cNvSpPr txBox="1"/>
+          <p:nvPr/>
+        </p:nvSpPr>
+        <p:spPr>
+          <a:xfrm>
+            <a:off x="548640" y="1252728"/>
+            <a:ext cx="11091672" cy="420624"/>
+          </a:xfrm>
+          <a:prstGeom prst="rect">
+            <a:avLst/>
+          </a:prstGeom>
+          <a:noFill/>
+        </p:spPr>
+        <p:txBody>
+          <a:bodyPr wrap="none">
+            <a:spAutoFit/>
+          </a:bodyPr>
+          <a:lstStyle/>
+          <a:p>
+            <a:pPr algn="ctr">
+              <a:defRPr sz="1800" b="1">
+                <a:solidFill>
+                  <a:srgbClr val="FFFFFF"/>
+                </a:solidFill>
+                <a:latin typeface="Calibri"/>
+              </a:defRPr>
+            </a:pPr>
+            <a:r>
+              <a:t>Performance Evaluation Framework</a:t>
+            </a:r>
+          </a:p>
+        </p:txBody>
+      </p:sp>
+      <p:sp>
+        <p:nvSpPr>
+          <p:cNvPr id="9" name="Rectangle 8"/>
+          <p:cNvSpPr/>
+          <p:nvPr/>
+        </p:nvSpPr>
+        <p:spPr>
+          <a:xfrm>
+            <a:off x="0" y="6583680"/>
+            <a:ext cx="12191695" cy="274320"/>
+          </a:xfrm>
+          <a:prstGeom prst="rect">
+            <a:avLst/>
+          </a:prstGeom>
+          <a:solidFill>
+            <a:srgbClr val="0F172A"/>
+          </a:solidFill>
+          <a:ln>
+            <a:noFill/>
+          </a:ln>
+        </p:spPr>
+        <p:style>
+          <a:lnRef idx="1">
+            <a:schemeClr val="accent1"/>
+          </a:lnRef>
+          <a:fillRef idx="3">
+            <a:schemeClr val="accent1"/>
+          </a:fillRef>
+          <a:effectRef idx="2">
+            <a:schemeClr val="accent1"/>
+          </a:effectRef>
+          <a:fontRef idx="minor">
+            <a:schemeClr val="lt1"/>
+          </a:fontRef>
+        </p:style>
+        <p:txBody>
+          <a:bodyPr rtlCol="0" anchor="ctr"/>
+          <a:lstStyle/>
+          <a:p>
+            <a:pPr algn="ctr"/>
+          </a:p>
+        </p:txBody>
+      </p:sp>
+      <p:sp>
+        <p:nvSpPr>
+          <p:cNvPr id="10" name="TextBox 9"/>
+          <p:cNvSpPr txBox="1"/>
+          <p:nvPr/>
+        </p:nvSpPr>
+        <p:spPr>
+          <a:xfrm>
+            <a:off x="365760" y="6601968"/>
+            <a:ext cx="11457432" cy="256032"/>
+          </a:xfrm>
+          <a:prstGeom prst="rect">
+            <a:avLst/>
+          </a:prstGeom>
+          <a:noFill/>
+        </p:spPr>
+        <p:txBody>
+          <a:bodyPr wrap="none">
+            <a:spAutoFit/>
+          </a:bodyPr>
+          <a:lstStyle/>
+          <a:p>
+            <a:pPr algn="ctr">
+              <a:defRPr sz="900">
+                <a:solidFill>
+                  <a:srgbClr val="FFFFFF"/>
+                </a:solidFill>
+                <a:latin typeface="Calibri"/>
+              </a:defRPr>
+            </a:pPr>
+            <a:r>
+              <a:t>Video Activity Recognition with 3D CNN &amp; Grad-CAM  |  AIML GNDEC</a:t>
             </a:r>
           </a:p>
         </p:txBody>
       </p:sp>
       <p:graphicFrame>
         <p:nvGraphicFramePr>
-          <p:cNvPr id="7" name="Table 6"/>
+          <p:cNvPr id="11" name="Table 10"/>
           <p:cNvGraphicFramePr>
             <a:graphicFrameLocks noGrp="1"/>
           </p:cNvGraphicFramePr>
@@ -6326,7 +7039,7 @@
       </p:graphicFrame>
       <p:sp>
         <p:nvSpPr>
-          <p:cNvPr id="8" name="Rounded Rectangle 7"/>
+          <p:cNvPr id="12" name="Rounded Rectangle 11"/>
           <p:cNvSpPr/>
           <p:nvPr/>
         </p:nvSpPr>
@@ -6371,7 +7084,7 @@
       </p:sp>
       <p:sp>
         <p:nvSpPr>
-          <p:cNvPr id="9" name="TextBox 8"/>
+          <p:cNvPr id="13" name="TextBox 12"/>
           <p:cNvSpPr txBox="1"/>
           <p:nvPr/>
         </p:nvSpPr>
@@ -6438,97 +7151,23 @@
       <p:grpSpPr/>
       <p:sp>
         <p:nvSpPr>
-          <p:cNvPr id="2" name="TextBox 1"/>
-          <p:cNvSpPr txBox="1"/>
-          <p:nvPr/>
-        </p:nvSpPr>
-        <p:spPr>
-          <a:xfrm>
-            <a:off x="731520" y="320040"/>
-            <a:ext cx="10725912" cy="320040"/>
-          </a:xfrm>
-          <a:prstGeom prst="rect">
-            <a:avLst/>
-          </a:prstGeom>
-          <a:noFill/>
-        </p:spPr>
-        <p:txBody>
-          <a:bodyPr wrap="none">
-            <a:spAutoFit/>
-          </a:bodyPr>
-          <a:lstStyle/>
-          <a:p>
-            <a:pPr>
-              <a:defRPr sz="1000" b="1">
-                <a:solidFill>
-                  <a:srgbClr val="2563EB"/>
-                </a:solidFill>
-                <a:latin typeface="Calibri"/>
-              </a:defRPr>
-            </a:pPr>
-            <a:r>
-              <a:t>DEPARTMENT OF ARTIFICIAL INTELLIGENCE &amp; MACHINE LEARNING (AI &amp; ML)</a:t>
-            </a:r>
-          </a:p>
-        </p:txBody>
-      </p:sp>
-      <p:sp>
-        <p:nvSpPr>
-          <p:cNvPr id="3" name="TextBox 2"/>
-          <p:cNvSpPr txBox="1"/>
-          <p:nvPr/>
-        </p:nvSpPr>
-        <p:spPr>
-          <a:xfrm>
-            <a:off x="731520" y="594360"/>
-            <a:ext cx="10725912" cy="640080"/>
-          </a:xfrm>
-          <a:prstGeom prst="rect">
-            <a:avLst/>
-          </a:prstGeom>
-          <a:noFill/>
-        </p:spPr>
-        <p:txBody>
-          <a:bodyPr wrap="none">
-            <a:spAutoFit/>
-          </a:bodyPr>
-          <a:lstStyle/>
-          <a:p>
-            <a:pPr>
-              <a:defRPr sz="2200" b="1">
-                <a:solidFill>
-                  <a:srgbClr val="0F172A"/>
-                </a:solidFill>
-                <a:latin typeface="Calibri"/>
-              </a:defRPr>
-            </a:pPr>
-            <a:r>
-              <a:t>Real-Time Live Camera Predictor &amp; Motion Calibration</a:t>
-            </a:r>
-          </a:p>
-        </p:txBody>
-      </p:sp>
-      <p:sp>
-        <p:nvSpPr>
-          <p:cNvPr id="4" name="Rectangle 3"/>
+          <p:cNvPr id="2" name="Rectangle 1"/>
           <p:cNvSpPr/>
           <p:nvPr/>
         </p:nvSpPr>
         <p:spPr>
           <a:xfrm>
-            <a:off x="731520" y="1234440"/>
-            <a:ext cx="10725912" cy="18288"/>
+            <a:off x="0" y="0"/>
+            <a:ext cx="12191695" cy="6858000"/>
           </a:xfrm>
           <a:prstGeom prst="rect">
             <a:avLst/>
           </a:prstGeom>
           <a:solidFill>
-            <a:srgbClr val="2563EB"/>
+            <a:srgbClr val="DCE8F8"/>
           </a:solidFill>
           <a:ln>
-            <a:solidFill>
-              <a:srgbClr val="2563EB"/>
-            </a:solidFill>
+            <a:noFill/>
           </a:ln>
         </p:spPr>
         <p:style>
@@ -6555,25 +7194,23 @@
       </p:sp>
       <p:sp>
         <p:nvSpPr>
-          <p:cNvPr id="5" name="Rectangle 4"/>
+          <p:cNvPr id="3" name="Rectangle 2"/>
           <p:cNvSpPr/>
           <p:nvPr/>
         </p:nvSpPr>
         <p:spPr>
           <a:xfrm>
-            <a:off x="731520" y="6400800"/>
-            <a:ext cx="10725912" cy="13716"/>
+            <a:off x="0" y="0"/>
+            <a:ext cx="12191695" cy="1143000"/>
           </a:xfrm>
           <a:prstGeom prst="rect">
             <a:avLst/>
           </a:prstGeom>
           <a:solidFill>
-            <a:srgbClr val="E2E8F0"/>
+            <a:srgbClr val="FFFFFF"/>
           </a:solidFill>
           <a:ln>
-            <a:solidFill>
-              <a:srgbClr val="E2E8F0"/>
-            </a:solidFill>
+            <a:noFill/>
           </a:ln>
         </p:spPr>
         <p:style>
@@ -6600,14 +7237,14 @@
       </p:sp>
       <p:sp>
         <p:nvSpPr>
-          <p:cNvPr id="6" name="TextBox 5"/>
+          <p:cNvPr id="4" name="TextBox 3"/>
           <p:cNvSpPr txBox="1"/>
           <p:nvPr/>
         </p:nvSpPr>
         <p:spPr>
           <a:xfrm>
-            <a:off x="731520" y="6419088"/>
-            <a:ext cx="10725912" cy="320040"/>
+            <a:off x="365760" y="45720"/>
+            <a:ext cx="11457432" cy="502920"/>
           </a:xfrm>
           <a:prstGeom prst="rect">
             <a:avLst/>
@@ -6620,23 +7257,260 @@
           </a:bodyPr>
           <a:lstStyle/>
           <a:p>
-            <a:pPr>
-              <a:defRPr sz="950">
-                <a:solidFill>
-                  <a:srgbClr val="64748B"/>
-                </a:solidFill>
-                <a:latin typeface="Calibri"/>
-              </a:defRPr>
-            </a:pPr>
-            <a:r>
-              <a:t>Video Activity Recognition with 3D CNN &amp; Grad-CAM  |  Dept of AI &amp; ML</a:t>
-            </a:r>
-          </a:p>
-        </p:txBody>
-      </p:sp>
-      <p:sp>
-        <p:nvSpPr>
-          <p:cNvPr id="7" name="Rounded Rectangle 6"/>
+            <a:pPr algn="ctr">
+              <a:defRPr sz="1700" b="1">
+                <a:solidFill>
+                  <a:srgbClr val="0F172A"/>
+                </a:solidFill>
+                <a:latin typeface="Calibri"/>
+              </a:defRPr>
+            </a:pPr>
+            <a:r>
+              <a:t>GURU NANAK DEV ENGINEERING COLLEGE, BIDAR</a:t>
+            </a:r>
+          </a:p>
+        </p:txBody>
+      </p:sp>
+      <p:sp>
+        <p:nvSpPr>
+          <p:cNvPr id="5" name="TextBox 4"/>
+          <p:cNvSpPr txBox="1"/>
+          <p:nvPr/>
+        </p:nvSpPr>
+        <p:spPr>
+          <a:xfrm>
+            <a:off x="365760" y="502920"/>
+            <a:ext cx="11457432" cy="384048"/>
+          </a:xfrm>
+          <a:prstGeom prst="rect">
+            <a:avLst/>
+          </a:prstGeom>
+          <a:noFill/>
+        </p:spPr>
+        <p:txBody>
+          <a:bodyPr wrap="none">
+            <a:spAutoFit/>
+          </a:bodyPr>
+          <a:lstStyle/>
+          <a:p>
+            <a:pPr algn="ctr">
+              <a:defRPr sz="1300" b="1">
+                <a:solidFill>
+                  <a:srgbClr val="2563EB"/>
+                </a:solidFill>
+                <a:latin typeface="Calibri"/>
+              </a:defRPr>
+            </a:pPr>
+            <a:r>
+              <a:t>DEPARTMENT OF AI &amp; ML</a:t>
+            </a:r>
+          </a:p>
+        </p:txBody>
+      </p:sp>
+      <p:sp>
+        <p:nvSpPr>
+          <p:cNvPr id="6" name="Rectangle 5"/>
+          <p:cNvSpPr/>
+          <p:nvPr/>
+        </p:nvSpPr>
+        <p:spPr>
+          <a:xfrm>
+            <a:off x="0" y="1143000"/>
+            <a:ext cx="12191695" cy="27432"/>
+          </a:xfrm>
+          <a:prstGeom prst="rect">
+            <a:avLst/>
+          </a:prstGeom>
+          <a:solidFill>
+            <a:srgbClr val="2563EB"/>
+          </a:solidFill>
+          <a:ln>
+            <a:noFill/>
+          </a:ln>
+        </p:spPr>
+        <p:style>
+          <a:lnRef idx="1">
+            <a:schemeClr val="accent1"/>
+          </a:lnRef>
+          <a:fillRef idx="3">
+            <a:schemeClr val="accent1"/>
+          </a:fillRef>
+          <a:effectRef idx="2">
+            <a:schemeClr val="accent1"/>
+          </a:effectRef>
+          <a:fontRef idx="minor">
+            <a:schemeClr val="lt1"/>
+          </a:fontRef>
+        </p:style>
+        <p:txBody>
+          <a:bodyPr rtlCol="0" anchor="ctr"/>
+          <a:lstStyle/>
+          <a:p>
+            <a:pPr algn="ctr"/>
+          </a:p>
+        </p:txBody>
+      </p:sp>
+      <p:sp>
+        <p:nvSpPr>
+          <p:cNvPr id="7" name="Rectangle 6"/>
+          <p:cNvSpPr/>
+          <p:nvPr/>
+        </p:nvSpPr>
+        <p:spPr>
+          <a:xfrm>
+            <a:off x="457200" y="1234440"/>
+            <a:ext cx="11274552" cy="475488"/>
+          </a:xfrm>
+          <a:prstGeom prst="rect">
+            <a:avLst/>
+          </a:prstGeom>
+          <a:solidFill>
+            <a:srgbClr val="0F172A"/>
+          </a:solidFill>
+          <a:ln>
+            <a:noFill/>
+          </a:ln>
+        </p:spPr>
+        <p:style>
+          <a:lnRef idx="1">
+            <a:schemeClr val="accent1"/>
+          </a:lnRef>
+          <a:fillRef idx="3">
+            <a:schemeClr val="accent1"/>
+          </a:fillRef>
+          <a:effectRef idx="2">
+            <a:schemeClr val="accent1"/>
+          </a:effectRef>
+          <a:fontRef idx="minor">
+            <a:schemeClr val="lt1"/>
+          </a:fontRef>
+        </p:style>
+        <p:txBody>
+          <a:bodyPr rtlCol="0" anchor="ctr"/>
+          <a:lstStyle/>
+          <a:p>
+            <a:pPr algn="ctr"/>
+          </a:p>
+        </p:txBody>
+      </p:sp>
+      <p:sp>
+        <p:nvSpPr>
+          <p:cNvPr id="8" name="TextBox 7"/>
+          <p:cNvSpPr txBox="1"/>
+          <p:nvPr/>
+        </p:nvSpPr>
+        <p:spPr>
+          <a:xfrm>
+            <a:off x="548640" y="1252728"/>
+            <a:ext cx="11091672" cy="420624"/>
+          </a:xfrm>
+          <a:prstGeom prst="rect">
+            <a:avLst/>
+          </a:prstGeom>
+          <a:noFill/>
+        </p:spPr>
+        <p:txBody>
+          <a:bodyPr wrap="none">
+            <a:spAutoFit/>
+          </a:bodyPr>
+          <a:lstStyle/>
+          <a:p>
+            <a:pPr algn="ctr">
+              <a:defRPr sz="1800" b="1">
+                <a:solidFill>
+                  <a:srgbClr val="FFFFFF"/>
+                </a:solidFill>
+                <a:latin typeface="Calibri"/>
+              </a:defRPr>
+            </a:pPr>
+            <a:r>
+              <a:t>Real-Time Live Camera Predictor &amp; Motion Calibration</a:t>
+            </a:r>
+          </a:p>
+        </p:txBody>
+      </p:sp>
+      <p:sp>
+        <p:nvSpPr>
+          <p:cNvPr id="9" name="Rectangle 8"/>
+          <p:cNvSpPr/>
+          <p:nvPr/>
+        </p:nvSpPr>
+        <p:spPr>
+          <a:xfrm>
+            <a:off x="0" y="6583680"/>
+            <a:ext cx="12191695" cy="274320"/>
+          </a:xfrm>
+          <a:prstGeom prst="rect">
+            <a:avLst/>
+          </a:prstGeom>
+          <a:solidFill>
+            <a:srgbClr val="0F172A"/>
+          </a:solidFill>
+          <a:ln>
+            <a:noFill/>
+          </a:ln>
+        </p:spPr>
+        <p:style>
+          <a:lnRef idx="1">
+            <a:schemeClr val="accent1"/>
+          </a:lnRef>
+          <a:fillRef idx="3">
+            <a:schemeClr val="accent1"/>
+          </a:fillRef>
+          <a:effectRef idx="2">
+            <a:schemeClr val="accent1"/>
+          </a:effectRef>
+          <a:fontRef idx="minor">
+            <a:schemeClr val="lt1"/>
+          </a:fontRef>
+        </p:style>
+        <p:txBody>
+          <a:bodyPr rtlCol="0" anchor="ctr"/>
+          <a:lstStyle/>
+          <a:p>
+            <a:pPr algn="ctr"/>
+          </a:p>
+        </p:txBody>
+      </p:sp>
+      <p:sp>
+        <p:nvSpPr>
+          <p:cNvPr id="10" name="TextBox 9"/>
+          <p:cNvSpPr txBox="1"/>
+          <p:nvPr/>
+        </p:nvSpPr>
+        <p:spPr>
+          <a:xfrm>
+            <a:off x="365760" y="6601968"/>
+            <a:ext cx="11457432" cy="256032"/>
+          </a:xfrm>
+          <a:prstGeom prst="rect">
+            <a:avLst/>
+          </a:prstGeom>
+          <a:noFill/>
+        </p:spPr>
+        <p:txBody>
+          <a:bodyPr wrap="none">
+            <a:spAutoFit/>
+          </a:bodyPr>
+          <a:lstStyle/>
+          <a:p>
+            <a:pPr algn="ctr">
+              <a:defRPr sz="900">
+                <a:solidFill>
+                  <a:srgbClr val="FFFFFF"/>
+                </a:solidFill>
+                <a:latin typeface="Calibri"/>
+              </a:defRPr>
+            </a:pPr>
+            <a:r>
+              <a:t>Video Activity Recognition with 3D CNN &amp; Grad-CAM  |  AIML GNDEC</a:t>
+            </a:r>
+          </a:p>
+        </p:txBody>
+      </p:sp>
+      <p:sp>
+        <p:nvSpPr>
+          <p:cNvPr id="11" name="Rounded Rectangle 10"/>
           <p:cNvSpPr/>
           <p:nvPr/>
         </p:nvSpPr>
@@ -6681,7 +7555,7 @@
       </p:sp>
       <p:sp>
         <p:nvSpPr>
-          <p:cNvPr id="8" name="TextBox 7"/>
+          <p:cNvPr id="12" name="TextBox 11"/>
           <p:cNvSpPr txBox="1"/>
           <p:nvPr/>
         </p:nvSpPr>
@@ -6741,7 +7615,7 @@
       </p:sp>
       <p:sp>
         <p:nvSpPr>
-          <p:cNvPr id="9" name="Rounded Rectangle 8"/>
+          <p:cNvPr id="13" name="Rounded Rectangle 12"/>
           <p:cNvSpPr/>
           <p:nvPr/>
         </p:nvSpPr>
@@ -6786,7 +7660,7 @@
       </p:sp>
       <p:sp>
         <p:nvSpPr>
-          <p:cNvPr id="10" name="TextBox 9"/>
+          <p:cNvPr id="14" name="TextBox 13"/>
           <p:cNvSpPr txBox="1"/>
           <p:nvPr/>
         </p:nvSpPr>
@@ -6846,7 +7720,7 @@
       </p:sp>
       <p:sp>
         <p:nvSpPr>
-          <p:cNvPr id="11" name="Rounded Rectangle 10"/>
+          <p:cNvPr id="15" name="Rounded Rectangle 14"/>
           <p:cNvSpPr/>
           <p:nvPr/>
         </p:nvSpPr>
@@ -6891,7 +7765,7 @@
       </p:sp>
       <p:sp>
         <p:nvSpPr>
-          <p:cNvPr id="12" name="TextBox 11"/>
+          <p:cNvPr id="16" name="TextBox 15"/>
           <p:cNvSpPr txBox="1"/>
           <p:nvPr/>
         </p:nvSpPr>
@@ -6951,7 +7825,7 @@
       </p:sp>
       <p:sp>
         <p:nvSpPr>
-          <p:cNvPr id="13" name="Rounded Rectangle 12"/>
+          <p:cNvPr id="17" name="Rounded Rectangle 16"/>
           <p:cNvSpPr/>
           <p:nvPr/>
         </p:nvSpPr>
@@ -6996,7 +7870,7 @@
       </p:sp>
       <p:sp>
         <p:nvSpPr>
-          <p:cNvPr id="14" name="TextBox 13"/>
+          <p:cNvPr id="18" name="TextBox 17"/>
           <p:cNvSpPr txBox="1"/>
           <p:nvPr/>
         </p:nvSpPr>
@@ -7063,97 +7937,23 @@
       <p:grpSpPr/>
       <p:sp>
         <p:nvSpPr>
-          <p:cNvPr id="2" name="TextBox 1"/>
-          <p:cNvSpPr txBox="1"/>
-          <p:nvPr/>
-        </p:nvSpPr>
-        <p:spPr>
-          <a:xfrm>
-            <a:off x="731520" y="320040"/>
-            <a:ext cx="10725912" cy="320040"/>
-          </a:xfrm>
-          <a:prstGeom prst="rect">
-            <a:avLst/>
-          </a:prstGeom>
-          <a:noFill/>
-        </p:spPr>
-        <p:txBody>
-          <a:bodyPr wrap="none">
-            <a:spAutoFit/>
-          </a:bodyPr>
-          <a:lstStyle/>
-          <a:p>
-            <a:pPr>
-              <a:defRPr sz="1000" b="1">
-                <a:solidFill>
-                  <a:srgbClr val="2563EB"/>
-                </a:solidFill>
-                <a:latin typeface="Calibri"/>
-              </a:defRPr>
-            </a:pPr>
-            <a:r>
-              <a:t>DEPARTMENT OF ARTIFICIAL INTELLIGENCE &amp; MACHINE LEARNING (AI &amp; ML)</a:t>
-            </a:r>
-          </a:p>
-        </p:txBody>
-      </p:sp>
-      <p:sp>
-        <p:nvSpPr>
-          <p:cNvPr id="3" name="TextBox 2"/>
-          <p:cNvSpPr txBox="1"/>
-          <p:nvPr/>
-        </p:nvSpPr>
-        <p:spPr>
-          <a:xfrm>
-            <a:off x="731520" y="594360"/>
-            <a:ext cx="10725912" cy="640080"/>
-          </a:xfrm>
-          <a:prstGeom prst="rect">
-            <a:avLst/>
-          </a:prstGeom>
-          <a:noFill/>
-        </p:spPr>
-        <p:txBody>
-          <a:bodyPr wrap="none">
-            <a:spAutoFit/>
-          </a:bodyPr>
-          <a:lstStyle/>
-          <a:p>
-            <a:pPr>
-              <a:defRPr sz="2200" b="1">
-                <a:solidFill>
-                  <a:srgbClr val="0F172A"/>
-                </a:solidFill>
-                <a:latin typeface="Calibri"/>
-              </a:defRPr>
-            </a:pPr>
-            <a:r>
-              <a:t>Conclusion &amp; Future Research Scope</a:t>
-            </a:r>
-          </a:p>
-        </p:txBody>
-      </p:sp>
-      <p:sp>
-        <p:nvSpPr>
-          <p:cNvPr id="4" name="Rectangle 3"/>
+          <p:cNvPr id="2" name="Rectangle 1"/>
           <p:cNvSpPr/>
           <p:nvPr/>
         </p:nvSpPr>
         <p:spPr>
           <a:xfrm>
-            <a:off x="731520" y="1234440"/>
-            <a:ext cx="10725912" cy="18288"/>
+            <a:off x="0" y="0"/>
+            <a:ext cx="12191695" cy="6858000"/>
           </a:xfrm>
           <a:prstGeom prst="rect">
             <a:avLst/>
           </a:prstGeom>
           <a:solidFill>
-            <a:srgbClr val="2563EB"/>
+            <a:srgbClr val="DCE8F8"/>
           </a:solidFill>
           <a:ln>
-            <a:solidFill>
-              <a:srgbClr val="2563EB"/>
-            </a:solidFill>
+            <a:noFill/>
           </a:ln>
         </p:spPr>
         <p:style>
@@ -7180,25 +7980,23 @@
       </p:sp>
       <p:sp>
         <p:nvSpPr>
-          <p:cNvPr id="5" name="Rectangle 4"/>
+          <p:cNvPr id="3" name="Rectangle 2"/>
           <p:cNvSpPr/>
           <p:nvPr/>
         </p:nvSpPr>
         <p:spPr>
           <a:xfrm>
-            <a:off x="731520" y="6400800"/>
-            <a:ext cx="10725912" cy="13716"/>
+            <a:off x="0" y="0"/>
+            <a:ext cx="12191695" cy="1143000"/>
           </a:xfrm>
           <a:prstGeom prst="rect">
             <a:avLst/>
           </a:prstGeom>
           <a:solidFill>
-            <a:srgbClr val="E2E8F0"/>
+            <a:srgbClr val="FFFFFF"/>
           </a:solidFill>
           <a:ln>
-            <a:solidFill>
-              <a:srgbClr val="E2E8F0"/>
-            </a:solidFill>
+            <a:noFill/>
           </a:ln>
         </p:spPr>
         <p:style>
@@ -7225,14 +8023,14 @@
       </p:sp>
       <p:sp>
         <p:nvSpPr>
-          <p:cNvPr id="6" name="TextBox 5"/>
+          <p:cNvPr id="4" name="TextBox 3"/>
           <p:cNvSpPr txBox="1"/>
           <p:nvPr/>
         </p:nvSpPr>
         <p:spPr>
           <a:xfrm>
-            <a:off x="731520" y="6419088"/>
-            <a:ext cx="10725912" cy="320040"/>
+            <a:off x="365760" y="45720"/>
+            <a:ext cx="11457432" cy="502920"/>
           </a:xfrm>
           <a:prstGeom prst="rect">
             <a:avLst/>
@@ -7245,23 +8043,260 @@
           </a:bodyPr>
           <a:lstStyle/>
           <a:p>
-            <a:pPr>
-              <a:defRPr sz="950">
-                <a:solidFill>
-                  <a:srgbClr val="64748B"/>
-                </a:solidFill>
-                <a:latin typeface="Calibri"/>
-              </a:defRPr>
-            </a:pPr>
-            <a:r>
-              <a:t>Video Activity Recognition with 3D CNN &amp; Grad-CAM  |  Dept of AI &amp; ML</a:t>
-            </a:r>
-          </a:p>
-        </p:txBody>
-      </p:sp>
-      <p:sp>
-        <p:nvSpPr>
-          <p:cNvPr id="7" name="Rounded Rectangle 6"/>
+            <a:pPr algn="ctr">
+              <a:defRPr sz="1700" b="1">
+                <a:solidFill>
+                  <a:srgbClr val="0F172A"/>
+                </a:solidFill>
+                <a:latin typeface="Calibri"/>
+              </a:defRPr>
+            </a:pPr>
+            <a:r>
+              <a:t>GURU NANAK DEV ENGINEERING COLLEGE, BIDAR</a:t>
+            </a:r>
+          </a:p>
+        </p:txBody>
+      </p:sp>
+      <p:sp>
+        <p:nvSpPr>
+          <p:cNvPr id="5" name="TextBox 4"/>
+          <p:cNvSpPr txBox="1"/>
+          <p:nvPr/>
+        </p:nvSpPr>
+        <p:spPr>
+          <a:xfrm>
+            <a:off x="365760" y="502920"/>
+            <a:ext cx="11457432" cy="384048"/>
+          </a:xfrm>
+          <a:prstGeom prst="rect">
+            <a:avLst/>
+          </a:prstGeom>
+          <a:noFill/>
+        </p:spPr>
+        <p:txBody>
+          <a:bodyPr wrap="none">
+            <a:spAutoFit/>
+          </a:bodyPr>
+          <a:lstStyle/>
+          <a:p>
+            <a:pPr algn="ctr">
+              <a:defRPr sz="1300" b="1">
+                <a:solidFill>
+                  <a:srgbClr val="2563EB"/>
+                </a:solidFill>
+                <a:latin typeface="Calibri"/>
+              </a:defRPr>
+            </a:pPr>
+            <a:r>
+              <a:t>DEPARTMENT OF AI &amp; ML</a:t>
+            </a:r>
+          </a:p>
+        </p:txBody>
+      </p:sp>
+      <p:sp>
+        <p:nvSpPr>
+          <p:cNvPr id="6" name="Rectangle 5"/>
+          <p:cNvSpPr/>
+          <p:nvPr/>
+        </p:nvSpPr>
+        <p:spPr>
+          <a:xfrm>
+            <a:off x="0" y="1143000"/>
+            <a:ext cx="12191695" cy="27432"/>
+          </a:xfrm>
+          <a:prstGeom prst="rect">
+            <a:avLst/>
+          </a:prstGeom>
+          <a:solidFill>
+            <a:srgbClr val="2563EB"/>
+          </a:solidFill>
+          <a:ln>
+            <a:noFill/>
+          </a:ln>
+        </p:spPr>
+        <p:style>
+          <a:lnRef idx="1">
+            <a:schemeClr val="accent1"/>
+          </a:lnRef>
+          <a:fillRef idx="3">
+            <a:schemeClr val="accent1"/>
+          </a:fillRef>
+          <a:effectRef idx="2">
+            <a:schemeClr val="accent1"/>
+          </a:effectRef>
+          <a:fontRef idx="minor">
+            <a:schemeClr val="lt1"/>
+          </a:fontRef>
+        </p:style>
+        <p:txBody>
+          <a:bodyPr rtlCol="0" anchor="ctr"/>
+          <a:lstStyle/>
+          <a:p>
+            <a:pPr algn="ctr"/>
+          </a:p>
+        </p:txBody>
+      </p:sp>
+      <p:sp>
+        <p:nvSpPr>
+          <p:cNvPr id="7" name="Rectangle 6"/>
+          <p:cNvSpPr/>
+          <p:nvPr/>
+        </p:nvSpPr>
+        <p:spPr>
+          <a:xfrm>
+            <a:off x="457200" y="1234440"/>
+            <a:ext cx="11274552" cy="475488"/>
+          </a:xfrm>
+          <a:prstGeom prst="rect">
+            <a:avLst/>
+          </a:prstGeom>
+          <a:solidFill>
+            <a:srgbClr val="0F172A"/>
+          </a:solidFill>
+          <a:ln>
+            <a:noFill/>
+          </a:ln>
+        </p:spPr>
+        <p:style>
+          <a:lnRef idx="1">
+            <a:schemeClr val="accent1"/>
+          </a:lnRef>
+          <a:fillRef idx="3">
+            <a:schemeClr val="accent1"/>
+          </a:fillRef>
+          <a:effectRef idx="2">
+            <a:schemeClr val="accent1"/>
+          </a:effectRef>
+          <a:fontRef idx="minor">
+            <a:schemeClr val="lt1"/>
+          </a:fontRef>
+        </p:style>
+        <p:txBody>
+          <a:bodyPr rtlCol="0" anchor="ctr"/>
+          <a:lstStyle/>
+          <a:p>
+            <a:pPr algn="ctr"/>
+          </a:p>
+        </p:txBody>
+      </p:sp>
+      <p:sp>
+        <p:nvSpPr>
+          <p:cNvPr id="8" name="TextBox 7"/>
+          <p:cNvSpPr txBox="1"/>
+          <p:nvPr/>
+        </p:nvSpPr>
+        <p:spPr>
+          <a:xfrm>
+            <a:off x="548640" y="1252728"/>
+            <a:ext cx="11091672" cy="420624"/>
+          </a:xfrm>
+          <a:prstGeom prst="rect">
+            <a:avLst/>
+          </a:prstGeom>
+          <a:noFill/>
+        </p:spPr>
+        <p:txBody>
+          <a:bodyPr wrap="none">
+            <a:spAutoFit/>
+          </a:bodyPr>
+          <a:lstStyle/>
+          <a:p>
+            <a:pPr algn="ctr">
+              <a:defRPr sz="1800" b="1">
+                <a:solidFill>
+                  <a:srgbClr val="FFFFFF"/>
+                </a:solidFill>
+                <a:latin typeface="Calibri"/>
+              </a:defRPr>
+            </a:pPr>
+            <a:r>
+              <a:t>Conclusion &amp; Future Research Scope</a:t>
+            </a:r>
+          </a:p>
+        </p:txBody>
+      </p:sp>
+      <p:sp>
+        <p:nvSpPr>
+          <p:cNvPr id="9" name="Rectangle 8"/>
+          <p:cNvSpPr/>
+          <p:nvPr/>
+        </p:nvSpPr>
+        <p:spPr>
+          <a:xfrm>
+            <a:off x="0" y="6583680"/>
+            <a:ext cx="12191695" cy="274320"/>
+          </a:xfrm>
+          <a:prstGeom prst="rect">
+            <a:avLst/>
+          </a:prstGeom>
+          <a:solidFill>
+            <a:srgbClr val="0F172A"/>
+          </a:solidFill>
+          <a:ln>
+            <a:noFill/>
+          </a:ln>
+        </p:spPr>
+        <p:style>
+          <a:lnRef idx="1">
+            <a:schemeClr val="accent1"/>
+          </a:lnRef>
+          <a:fillRef idx="3">
+            <a:schemeClr val="accent1"/>
+          </a:fillRef>
+          <a:effectRef idx="2">
+            <a:schemeClr val="accent1"/>
+          </a:effectRef>
+          <a:fontRef idx="minor">
+            <a:schemeClr val="lt1"/>
+          </a:fontRef>
+        </p:style>
+        <p:txBody>
+          <a:bodyPr rtlCol="0" anchor="ctr"/>
+          <a:lstStyle/>
+          <a:p>
+            <a:pPr algn="ctr"/>
+          </a:p>
+        </p:txBody>
+      </p:sp>
+      <p:sp>
+        <p:nvSpPr>
+          <p:cNvPr id="10" name="TextBox 9"/>
+          <p:cNvSpPr txBox="1"/>
+          <p:nvPr/>
+        </p:nvSpPr>
+        <p:spPr>
+          <a:xfrm>
+            <a:off x="365760" y="6601968"/>
+            <a:ext cx="11457432" cy="256032"/>
+          </a:xfrm>
+          <a:prstGeom prst="rect">
+            <a:avLst/>
+          </a:prstGeom>
+          <a:noFill/>
+        </p:spPr>
+        <p:txBody>
+          <a:bodyPr wrap="none">
+            <a:spAutoFit/>
+          </a:bodyPr>
+          <a:lstStyle/>
+          <a:p>
+            <a:pPr algn="ctr">
+              <a:defRPr sz="900">
+                <a:solidFill>
+                  <a:srgbClr val="FFFFFF"/>
+                </a:solidFill>
+                <a:latin typeface="Calibri"/>
+              </a:defRPr>
+            </a:pPr>
+            <a:r>
+              <a:t>Video Activity Recognition with 3D CNN &amp; Grad-CAM  |  AIML GNDEC</a:t>
+            </a:r>
+          </a:p>
+        </p:txBody>
+      </p:sp>
+      <p:sp>
+        <p:nvSpPr>
+          <p:cNvPr id="11" name="Rounded Rectangle 10"/>
           <p:cNvSpPr/>
           <p:nvPr/>
         </p:nvSpPr>
@@ -7306,7 +8341,7 @@
       </p:sp>
       <p:sp>
         <p:nvSpPr>
-          <p:cNvPr id="8" name="TextBox 7"/>
+          <p:cNvPr id="12" name="TextBox 11"/>
           <p:cNvSpPr txBox="1"/>
           <p:nvPr/>
         </p:nvSpPr>
@@ -7422,7 +8457,7 @@
       </p:sp>
       <p:sp>
         <p:nvSpPr>
-          <p:cNvPr id="9" name="Rounded Rectangle 8"/>
+          <p:cNvPr id="13" name="Rounded Rectangle 12"/>
           <p:cNvSpPr/>
           <p:nvPr/>
         </p:nvSpPr>
@@ -7467,7 +8502,7 @@
       </p:sp>
       <p:sp>
         <p:nvSpPr>
-          <p:cNvPr id="10" name="TextBox 9"/>
+          <p:cNvPr id="14" name="TextBox 13"/>
           <p:cNvSpPr txBox="1"/>
           <p:nvPr/>
         </p:nvSpPr>
@@ -7567,7 +8602,7 @@
       </p:sp>
       <p:sp>
         <p:nvSpPr>
-          <p:cNvPr id="11" name="Rounded Rectangle 10"/>
+          <p:cNvPr id="15" name="Rounded Rectangle 14"/>
           <p:cNvSpPr/>
           <p:nvPr/>
         </p:nvSpPr>
@@ -7612,7 +8647,7 @@
       </p:sp>
       <p:sp>
         <p:nvSpPr>
-          <p:cNvPr id="12" name="TextBox 11"/>
+          <p:cNvPr id="16" name="TextBox 15"/>
           <p:cNvSpPr txBox="1"/>
           <p:nvPr/>
         </p:nvSpPr>
@@ -7666,97 +8701,23 @@
       <p:grpSpPr/>
       <p:sp>
         <p:nvSpPr>
-          <p:cNvPr id="2" name="TextBox 1"/>
-          <p:cNvSpPr txBox="1"/>
-          <p:nvPr/>
-        </p:nvSpPr>
-        <p:spPr>
-          <a:xfrm>
-            <a:off x="731520" y="320040"/>
-            <a:ext cx="10725912" cy="320040"/>
-          </a:xfrm>
-          <a:prstGeom prst="rect">
-            <a:avLst/>
-          </a:prstGeom>
-          <a:noFill/>
-        </p:spPr>
-        <p:txBody>
-          <a:bodyPr wrap="none">
-            <a:spAutoFit/>
-          </a:bodyPr>
-          <a:lstStyle/>
-          <a:p>
-            <a:pPr>
-              <a:defRPr sz="1000" b="1">
-                <a:solidFill>
-                  <a:srgbClr val="2563EB"/>
-                </a:solidFill>
-                <a:latin typeface="Calibri"/>
-              </a:defRPr>
-            </a:pPr>
-            <a:r>
-              <a:t>DEPARTMENT OF ARTIFICIAL INTELLIGENCE &amp; MACHINE LEARNING (AI &amp; ML)</a:t>
-            </a:r>
-          </a:p>
-        </p:txBody>
-      </p:sp>
-      <p:sp>
-        <p:nvSpPr>
-          <p:cNvPr id="3" name="TextBox 2"/>
-          <p:cNvSpPr txBox="1"/>
-          <p:nvPr/>
-        </p:nvSpPr>
-        <p:spPr>
-          <a:xfrm>
-            <a:off x="731520" y="594360"/>
-            <a:ext cx="10725912" cy="640080"/>
-          </a:xfrm>
-          <a:prstGeom prst="rect">
-            <a:avLst/>
-          </a:prstGeom>
-          <a:noFill/>
-        </p:spPr>
-        <p:txBody>
-          <a:bodyPr wrap="none">
-            <a:spAutoFit/>
-          </a:bodyPr>
-          <a:lstStyle/>
-          <a:p>
-            <a:pPr>
-              <a:defRPr sz="2200" b="1">
-                <a:solidFill>
-                  <a:srgbClr val="0F172A"/>
-                </a:solidFill>
-                <a:latin typeface="Calibri"/>
-              </a:defRPr>
-            </a:pPr>
-            <a:r>
-              <a:t>References &amp; Bibliography (Part 1)</a:t>
-            </a:r>
-          </a:p>
-        </p:txBody>
-      </p:sp>
-      <p:sp>
-        <p:nvSpPr>
-          <p:cNvPr id="4" name="Rectangle 3"/>
+          <p:cNvPr id="2" name="Rectangle 1"/>
           <p:cNvSpPr/>
           <p:nvPr/>
         </p:nvSpPr>
         <p:spPr>
           <a:xfrm>
-            <a:off x="731520" y="1234440"/>
-            <a:ext cx="10725912" cy="18288"/>
+            <a:off x="0" y="0"/>
+            <a:ext cx="12191695" cy="6858000"/>
           </a:xfrm>
           <a:prstGeom prst="rect">
             <a:avLst/>
           </a:prstGeom>
           <a:solidFill>
-            <a:srgbClr val="2563EB"/>
+            <a:srgbClr val="DCE8F8"/>
           </a:solidFill>
           <a:ln>
-            <a:solidFill>
-              <a:srgbClr val="2563EB"/>
-            </a:solidFill>
+            <a:noFill/>
           </a:ln>
         </p:spPr>
         <p:style>
@@ -7783,25 +8744,23 @@
       </p:sp>
       <p:sp>
         <p:nvSpPr>
-          <p:cNvPr id="5" name="Rectangle 4"/>
+          <p:cNvPr id="3" name="Rectangle 2"/>
           <p:cNvSpPr/>
           <p:nvPr/>
         </p:nvSpPr>
         <p:spPr>
           <a:xfrm>
-            <a:off x="731520" y="6400800"/>
-            <a:ext cx="10725912" cy="13716"/>
+            <a:off x="0" y="0"/>
+            <a:ext cx="12191695" cy="1143000"/>
           </a:xfrm>
           <a:prstGeom prst="rect">
             <a:avLst/>
           </a:prstGeom>
           <a:solidFill>
-            <a:srgbClr val="E2E8F0"/>
+            <a:srgbClr val="FFFFFF"/>
           </a:solidFill>
           <a:ln>
-            <a:solidFill>
-              <a:srgbClr val="E2E8F0"/>
-            </a:solidFill>
+            <a:noFill/>
           </a:ln>
         </p:spPr>
         <p:style>
@@ -7828,14 +8787,14 @@
       </p:sp>
       <p:sp>
         <p:nvSpPr>
-          <p:cNvPr id="6" name="TextBox 5"/>
+          <p:cNvPr id="4" name="TextBox 3"/>
           <p:cNvSpPr txBox="1"/>
           <p:nvPr/>
         </p:nvSpPr>
         <p:spPr>
           <a:xfrm>
-            <a:off x="731520" y="6419088"/>
-            <a:ext cx="10725912" cy="320040"/>
+            <a:off x="365760" y="45720"/>
+            <a:ext cx="11457432" cy="502920"/>
           </a:xfrm>
           <a:prstGeom prst="rect">
             <a:avLst/>
@@ -7848,23 +8807,260 @@
           </a:bodyPr>
           <a:lstStyle/>
           <a:p>
-            <a:pPr>
-              <a:defRPr sz="950">
-                <a:solidFill>
-                  <a:srgbClr val="64748B"/>
-                </a:solidFill>
-                <a:latin typeface="Calibri"/>
-              </a:defRPr>
-            </a:pPr>
-            <a:r>
-              <a:t>Video Activity Recognition with 3D CNN &amp; Grad-CAM  |  Dept of AI &amp; ML</a:t>
-            </a:r>
-          </a:p>
-        </p:txBody>
-      </p:sp>
-      <p:sp>
-        <p:nvSpPr>
-          <p:cNvPr id="7" name="Rounded Rectangle 6"/>
+            <a:pPr algn="ctr">
+              <a:defRPr sz="1700" b="1">
+                <a:solidFill>
+                  <a:srgbClr val="0F172A"/>
+                </a:solidFill>
+                <a:latin typeface="Calibri"/>
+              </a:defRPr>
+            </a:pPr>
+            <a:r>
+              <a:t>GURU NANAK DEV ENGINEERING COLLEGE, BIDAR</a:t>
+            </a:r>
+          </a:p>
+        </p:txBody>
+      </p:sp>
+      <p:sp>
+        <p:nvSpPr>
+          <p:cNvPr id="5" name="TextBox 4"/>
+          <p:cNvSpPr txBox="1"/>
+          <p:nvPr/>
+        </p:nvSpPr>
+        <p:spPr>
+          <a:xfrm>
+            <a:off x="365760" y="502920"/>
+            <a:ext cx="11457432" cy="384048"/>
+          </a:xfrm>
+          <a:prstGeom prst="rect">
+            <a:avLst/>
+          </a:prstGeom>
+          <a:noFill/>
+        </p:spPr>
+        <p:txBody>
+          <a:bodyPr wrap="none">
+            <a:spAutoFit/>
+          </a:bodyPr>
+          <a:lstStyle/>
+          <a:p>
+            <a:pPr algn="ctr">
+              <a:defRPr sz="1300" b="1">
+                <a:solidFill>
+                  <a:srgbClr val="2563EB"/>
+                </a:solidFill>
+                <a:latin typeface="Calibri"/>
+              </a:defRPr>
+            </a:pPr>
+            <a:r>
+              <a:t>DEPARTMENT OF AI &amp; ML</a:t>
+            </a:r>
+          </a:p>
+        </p:txBody>
+      </p:sp>
+      <p:sp>
+        <p:nvSpPr>
+          <p:cNvPr id="6" name="Rectangle 5"/>
+          <p:cNvSpPr/>
+          <p:nvPr/>
+        </p:nvSpPr>
+        <p:spPr>
+          <a:xfrm>
+            <a:off x="0" y="1143000"/>
+            <a:ext cx="12191695" cy="27432"/>
+          </a:xfrm>
+          <a:prstGeom prst="rect">
+            <a:avLst/>
+          </a:prstGeom>
+          <a:solidFill>
+            <a:srgbClr val="2563EB"/>
+          </a:solidFill>
+          <a:ln>
+            <a:noFill/>
+          </a:ln>
+        </p:spPr>
+        <p:style>
+          <a:lnRef idx="1">
+            <a:schemeClr val="accent1"/>
+          </a:lnRef>
+          <a:fillRef idx="3">
+            <a:schemeClr val="accent1"/>
+          </a:fillRef>
+          <a:effectRef idx="2">
+            <a:schemeClr val="accent1"/>
+          </a:effectRef>
+          <a:fontRef idx="minor">
+            <a:schemeClr val="lt1"/>
+          </a:fontRef>
+        </p:style>
+        <p:txBody>
+          <a:bodyPr rtlCol="0" anchor="ctr"/>
+          <a:lstStyle/>
+          <a:p>
+            <a:pPr algn="ctr"/>
+          </a:p>
+        </p:txBody>
+      </p:sp>
+      <p:sp>
+        <p:nvSpPr>
+          <p:cNvPr id="7" name="Rectangle 6"/>
+          <p:cNvSpPr/>
+          <p:nvPr/>
+        </p:nvSpPr>
+        <p:spPr>
+          <a:xfrm>
+            <a:off x="457200" y="1234440"/>
+            <a:ext cx="11274552" cy="475488"/>
+          </a:xfrm>
+          <a:prstGeom prst="rect">
+            <a:avLst/>
+          </a:prstGeom>
+          <a:solidFill>
+            <a:srgbClr val="0F172A"/>
+          </a:solidFill>
+          <a:ln>
+            <a:noFill/>
+          </a:ln>
+        </p:spPr>
+        <p:style>
+          <a:lnRef idx="1">
+            <a:schemeClr val="accent1"/>
+          </a:lnRef>
+          <a:fillRef idx="3">
+            <a:schemeClr val="accent1"/>
+          </a:fillRef>
+          <a:effectRef idx="2">
+            <a:schemeClr val="accent1"/>
+          </a:effectRef>
+          <a:fontRef idx="minor">
+            <a:schemeClr val="lt1"/>
+          </a:fontRef>
+        </p:style>
+        <p:txBody>
+          <a:bodyPr rtlCol="0" anchor="ctr"/>
+          <a:lstStyle/>
+          <a:p>
+            <a:pPr algn="ctr"/>
+          </a:p>
+        </p:txBody>
+      </p:sp>
+      <p:sp>
+        <p:nvSpPr>
+          <p:cNvPr id="8" name="TextBox 7"/>
+          <p:cNvSpPr txBox="1"/>
+          <p:nvPr/>
+        </p:nvSpPr>
+        <p:spPr>
+          <a:xfrm>
+            <a:off x="548640" y="1252728"/>
+            <a:ext cx="11091672" cy="420624"/>
+          </a:xfrm>
+          <a:prstGeom prst="rect">
+            <a:avLst/>
+          </a:prstGeom>
+          <a:noFill/>
+        </p:spPr>
+        <p:txBody>
+          <a:bodyPr wrap="none">
+            <a:spAutoFit/>
+          </a:bodyPr>
+          <a:lstStyle/>
+          <a:p>
+            <a:pPr algn="ctr">
+              <a:defRPr sz="1800" b="1">
+                <a:solidFill>
+                  <a:srgbClr val="FFFFFF"/>
+                </a:solidFill>
+                <a:latin typeface="Calibri"/>
+              </a:defRPr>
+            </a:pPr>
+            <a:r>
+              <a:t>References &amp; Bibliography (Part 1)</a:t>
+            </a:r>
+          </a:p>
+        </p:txBody>
+      </p:sp>
+      <p:sp>
+        <p:nvSpPr>
+          <p:cNvPr id="9" name="Rectangle 8"/>
+          <p:cNvSpPr/>
+          <p:nvPr/>
+        </p:nvSpPr>
+        <p:spPr>
+          <a:xfrm>
+            <a:off x="0" y="6583680"/>
+            <a:ext cx="12191695" cy="274320"/>
+          </a:xfrm>
+          <a:prstGeom prst="rect">
+            <a:avLst/>
+          </a:prstGeom>
+          <a:solidFill>
+            <a:srgbClr val="0F172A"/>
+          </a:solidFill>
+          <a:ln>
+            <a:noFill/>
+          </a:ln>
+        </p:spPr>
+        <p:style>
+          <a:lnRef idx="1">
+            <a:schemeClr val="accent1"/>
+          </a:lnRef>
+          <a:fillRef idx="3">
+            <a:schemeClr val="accent1"/>
+          </a:fillRef>
+          <a:effectRef idx="2">
+            <a:schemeClr val="accent1"/>
+          </a:effectRef>
+          <a:fontRef idx="minor">
+            <a:schemeClr val="lt1"/>
+          </a:fontRef>
+        </p:style>
+        <p:txBody>
+          <a:bodyPr rtlCol="0" anchor="ctr"/>
+          <a:lstStyle/>
+          <a:p>
+            <a:pPr algn="ctr"/>
+          </a:p>
+        </p:txBody>
+      </p:sp>
+      <p:sp>
+        <p:nvSpPr>
+          <p:cNvPr id="10" name="TextBox 9"/>
+          <p:cNvSpPr txBox="1"/>
+          <p:nvPr/>
+        </p:nvSpPr>
+        <p:spPr>
+          <a:xfrm>
+            <a:off x="365760" y="6601968"/>
+            <a:ext cx="11457432" cy="256032"/>
+          </a:xfrm>
+          <a:prstGeom prst="rect">
+            <a:avLst/>
+          </a:prstGeom>
+          <a:noFill/>
+        </p:spPr>
+        <p:txBody>
+          <a:bodyPr wrap="none">
+            <a:spAutoFit/>
+          </a:bodyPr>
+          <a:lstStyle/>
+          <a:p>
+            <a:pPr algn="ctr">
+              <a:defRPr sz="900">
+                <a:solidFill>
+                  <a:srgbClr val="FFFFFF"/>
+                </a:solidFill>
+                <a:latin typeface="Calibri"/>
+              </a:defRPr>
+            </a:pPr>
+            <a:r>
+              <a:t>Video Activity Recognition with 3D CNN &amp; Grad-CAM  |  AIML GNDEC</a:t>
+            </a:r>
+          </a:p>
+        </p:txBody>
+      </p:sp>
+      <p:sp>
+        <p:nvSpPr>
+          <p:cNvPr id="11" name="Rounded Rectangle 10"/>
           <p:cNvSpPr/>
           <p:nvPr/>
         </p:nvSpPr>
@@ -7909,7 +9105,7 @@
       </p:sp>
       <p:sp>
         <p:nvSpPr>
-          <p:cNvPr id="8" name="TextBox 7"/>
+          <p:cNvPr id="12" name="TextBox 11"/>
           <p:cNvSpPr txBox="1"/>
           <p:nvPr/>
         </p:nvSpPr>
@@ -8091,97 +9287,23 @@
       <p:grpSpPr/>
       <p:sp>
         <p:nvSpPr>
-          <p:cNvPr id="2" name="TextBox 1"/>
-          <p:cNvSpPr txBox="1"/>
-          <p:nvPr/>
-        </p:nvSpPr>
-        <p:spPr>
-          <a:xfrm>
-            <a:off x="731520" y="320040"/>
-            <a:ext cx="10725912" cy="320040"/>
-          </a:xfrm>
-          <a:prstGeom prst="rect">
-            <a:avLst/>
-          </a:prstGeom>
-          <a:noFill/>
-        </p:spPr>
-        <p:txBody>
-          <a:bodyPr wrap="none">
-            <a:spAutoFit/>
-          </a:bodyPr>
-          <a:lstStyle/>
-          <a:p>
-            <a:pPr>
-              <a:defRPr sz="1000" b="1">
-                <a:solidFill>
-                  <a:srgbClr val="2563EB"/>
-                </a:solidFill>
-                <a:latin typeface="Calibri"/>
-              </a:defRPr>
-            </a:pPr>
-            <a:r>
-              <a:t>DEPARTMENT OF ARTIFICIAL INTELLIGENCE &amp; MACHINE LEARNING (AI &amp; ML)</a:t>
-            </a:r>
-          </a:p>
-        </p:txBody>
-      </p:sp>
-      <p:sp>
-        <p:nvSpPr>
-          <p:cNvPr id="3" name="TextBox 2"/>
-          <p:cNvSpPr txBox="1"/>
-          <p:nvPr/>
-        </p:nvSpPr>
-        <p:spPr>
-          <a:xfrm>
-            <a:off x="731520" y="594360"/>
-            <a:ext cx="10725912" cy="640080"/>
-          </a:xfrm>
-          <a:prstGeom prst="rect">
-            <a:avLst/>
-          </a:prstGeom>
-          <a:noFill/>
-        </p:spPr>
-        <p:txBody>
-          <a:bodyPr wrap="none">
-            <a:spAutoFit/>
-          </a:bodyPr>
-          <a:lstStyle/>
-          <a:p>
-            <a:pPr>
-              <a:defRPr sz="2200" b="1">
-                <a:solidFill>
-                  <a:srgbClr val="0F172A"/>
-                </a:solidFill>
-                <a:latin typeface="Calibri"/>
-              </a:defRPr>
-            </a:pPr>
-            <a:r>
-              <a:t>References &amp; Bibliography (Part 2)</a:t>
-            </a:r>
-          </a:p>
-        </p:txBody>
-      </p:sp>
-      <p:sp>
-        <p:nvSpPr>
-          <p:cNvPr id="4" name="Rectangle 3"/>
+          <p:cNvPr id="2" name="Rectangle 1"/>
           <p:cNvSpPr/>
           <p:nvPr/>
         </p:nvSpPr>
         <p:spPr>
           <a:xfrm>
-            <a:off x="731520" y="1234440"/>
-            <a:ext cx="10725912" cy="18288"/>
+            <a:off x="0" y="0"/>
+            <a:ext cx="12191695" cy="6858000"/>
           </a:xfrm>
           <a:prstGeom prst="rect">
             <a:avLst/>
           </a:prstGeom>
           <a:solidFill>
-            <a:srgbClr val="2563EB"/>
+            <a:srgbClr val="DCE8F8"/>
           </a:solidFill>
           <a:ln>
-            <a:solidFill>
-              <a:srgbClr val="2563EB"/>
-            </a:solidFill>
+            <a:noFill/>
           </a:ln>
         </p:spPr>
         <p:style>
@@ -8208,25 +9330,23 @@
       </p:sp>
       <p:sp>
         <p:nvSpPr>
-          <p:cNvPr id="5" name="Rectangle 4"/>
+          <p:cNvPr id="3" name="Rectangle 2"/>
           <p:cNvSpPr/>
           <p:nvPr/>
         </p:nvSpPr>
         <p:spPr>
           <a:xfrm>
-            <a:off x="731520" y="6400800"/>
-            <a:ext cx="10725912" cy="13716"/>
+            <a:off x="0" y="0"/>
+            <a:ext cx="12191695" cy="1143000"/>
           </a:xfrm>
           <a:prstGeom prst="rect">
             <a:avLst/>
           </a:prstGeom>
           <a:solidFill>
-            <a:srgbClr val="E2E8F0"/>
+            <a:srgbClr val="FFFFFF"/>
           </a:solidFill>
           <a:ln>
-            <a:solidFill>
-              <a:srgbClr val="E2E8F0"/>
-            </a:solidFill>
+            <a:noFill/>
           </a:ln>
         </p:spPr>
         <p:style>
@@ -8253,14 +9373,14 @@
       </p:sp>
       <p:sp>
         <p:nvSpPr>
-          <p:cNvPr id="6" name="TextBox 5"/>
+          <p:cNvPr id="4" name="TextBox 3"/>
           <p:cNvSpPr txBox="1"/>
           <p:nvPr/>
         </p:nvSpPr>
         <p:spPr>
           <a:xfrm>
-            <a:off x="731520" y="6419088"/>
-            <a:ext cx="10725912" cy="320040"/>
+            <a:off x="365760" y="45720"/>
+            <a:ext cx="11457432" cy="502920"/>
           </a:xfrm>
           <a:prstGeom prst="rect">
             <a:avLst/>
@@ -8273,23 +9393,260 @@
           </a:bodyPr>
           <a:lstStyle/>
           <a:p>
-            <a:pPr>
-              <a:defRPr sz="950">
-                <a:solidFill>
-                  <a:srgbClr val="64748B"/>
-                </a:solidFill>
-                <a:latin typeface="Calibri"/>
-              </a:defRPr>
-            </a:pPr>
-            <a:r>
-              <a:t>Video Activity Recognition with 3D CNN &amp; Grad-CAM  |  Dept of AI &amp; ML</a:t>
-            </a:r>
-          </a:p>
-        </p:txBody>
-      </p:sp>
-      <p:sp>
-        <p:nvSpPr>
-          <p:cNvPr id="7" name="Rounded Rectangle 6"/>
+            <a:pPr algn="ctr">
+              <a:defRPr sz="1700" b="1">
+                <a:solidFill>
+                  <a:srgbClr val="0F172A"/>
+                </a:solidFill>
+                <a:latin typeface="Calibri"/>
+              </a:defRPr>
+            </a:pPr>
+            <a:r>
+              <a:t>GURU NANAK DEV ENGINEERING COLLEGE, BIDAR</a:t>
+            </a:r>
+          </a:p>
+        </p:txBody>
+      </p:sp>
+      <p:sp>
+        <p:nvSpPr>
+          <p:cNvPr id="5" name="TextBox 4"/>
+          <p:cNvSpPr txBox="1"/>
+          <p:nvPr/>
+        </p:nvSpPr>
+        <p:spPr>
+          <a:xfrm>
+            <a:off x="365760" y="502920"/>
+            <a:ext cx="11457432" cy="384048"/>
+          </a:xfrm>
+          <a:prstGeom prst="rect">
+            <a:avLst/>
+          </a:prstGeom>
+          <a:noFill/>
+        </p:spPr>
+        <p:txBody>
+          <a:bodyPr wrap="none">
+            <a:spAutoFit/>
+          </a:bodyPr>
+          <a:lstStyle/>
+          <a:p>
+            <a:pPr algn="ctr">
+              <a:defRPr sz="1300" b="1">
+                <a:solidFill>
+                  <a:srgbClr val="2563EB"/>
+                </a:solidFill>
+                <a:latin typeface="Calibri"/>
+              </a:defRPr>
+            </a:pPr>
+            <a:r>
+              <a:t>DEPARTMENT OF AI &amp; ML</a:t>
+            </a:r>
+          </a:p>
+        </p:txBody>
+      </p:sp>
+      <p:sp>
+        <p:nvSpPr>
+          <p:cNvPr id="6" name="Rectangle 5"/>
+          <p:cNvSpPr/>
+          <p:nvPr/>
+        </p:nvSpPr>
+        <p:spPr>
+          <a:xfrm>
+            <a:off x="0" y="1143000"/>
+            <a:ext cx="12191695" cy="27432"/>
+          </a:xfrm>
+          <a:prstGeom prst="rect">
+            <a:avLst/>
+          </a:prstGeom>
+          <a:solidFill>
+            <a:srgbClr val="2563EB"/>
+          </a:solidFill>
+          <a:ln>
+            <a:noFill/>
+          </a:ln>
+        </p:spPr>
+        <p:style>
+          <a:lnRef idx="1">
+            <a:schemeClr val="accent1"/>
+          </a:lnRef>
+          <a:fillRef idx="3">
+            <a:schemeClr val="accent1"/>
+          </a:fillRef>
+          <a:effectRef idx="2">
+            <a:schemeClr val="accent1"/>
+          </a:effectRef>
+          <a:fontRef idx="minor">
+            <a:schemeClr val="lt1"/>
+          </a:fontRef>
+        </p:style>
+        <p:txBody>
+          <a:bodyPr rtlCol="0" anchor="ctr"/>
+          <a:lstStyle/>
+          <a:p>
+            <a:pPr algn="ctr"/>
+          </a:p>
+        </p:txBody>
+      </p:sp>
+      <p:sp>
+        <p:nvSpPr>
+          <p:cNvPr id="7" name="Rectangle 6"/>
+          <p:cNvSpPr/>
+          <p:nvPr/>
+        </p:nvSpPr>
+        <p:spPr>
+          <a:xfrm>
+            <a:off x="457200" y="1234440"/>
+            <a:ext cx="11274552" cy="475488"/>
+          </a:xfrm>
+          <a:prstGeom prst="rect">
+            <a:avLst/>
+          </a:prstGeom>
+          <a:solidFill>
+            <a:srgbClr val="0F172A"/>
+          </a:solidFill>
+          <a:ln>
+            <a:noFill/>
+          </a:ln>
+        </p:spPr>
+        <p:style>
+          <a:lnRef idx="1">
+            <a:schemeClr val="accent1"/>
+          </a:lnRef>
+          <a:fillRef idx="3">
+            <a:schemeClr val="accent1"/>
+          </a:fillRef>
+          <a:effectRef idx="2">
+            <a:schemeClr val="accent1"/>
+          </a:effectRef>
+          <a:fontRef idx="minor">
+            <a:schemeClr val="lt1"/>
+          </a:fontRef>
+        </p:style>
+        <p:txBody>
+          <a:bodyPr rtlCol="0" anchor="ctr"/>
+          <a:lstStyle/>
+          <a:p>
+            <a:pPr algn="ctr"/>
+          </a:p>
+        </p:txBody>
+      </p:sp>
+      <p:sp>
+        <p:nvSpPr>
+          <p:cNvPr id="8" name="TextBox 7"/>
+          <p:cNvSpPr txBox="1"/>
+          <p:nvPr/>
+        </p:nvSpPr>
+        <p:spPr>
+          <a:xfrm>
+            <a:off x="548640" y="1252728"/>
+            <a:ext cx="11091672" cy="420624"/>
+          </a:xfrm>
+          <a:prstGeom prst="rect">
+            <a:avLst/>
+          </a:prstGeom>
+          <a:noFill/>
+        </p:spPr>
+        <p:txBody>
+          <a:bodyPr wrap="none">
+            <a:spAutoFit/>
+          </a:bodyPr>
+          <a:lstStyle/>
+          <a:p>
+            <a:pPr algn="ctr">
+              <a:defRPr sz="1800" b="1">
+                <a:solidFill>
+                  <a:srgbClr val="FFFFFF"/>
+                </a:solidFill>
+                <a:latin typeface="Calibri"/>
+              </a:defRPr>
+            </a:pPr>
+            <a:r>
+              <a:t>References &amp; Bibliography (Part 2)</a:t>
+            </a:r>
+          </a:p>
+        </p:txBody>
+      </p:sp>
+      <p:sp>
+        <p:nvSpPr>
+          <p:cNvPr id="9" name="Rectangle 8"/>
+          <p:cNvSpPr/>
+          <p:nvPr/>
+        </p:nvSpPr>
+        <p:spPr>
+          <a:xfrm>
+            <a:off x="0" y="6583680"/>
+            <a:ext cx="12191695" cy="274320"/>
+          </a:xfrm>
+          <a:prstGeom prst="rect">
+            <a:avLst/>
+          </a:prstGeom>
+          <a:solidFill>
+            <a:srgbClr val="0F172A"/>
+          </a:solidFill>
+          <a:ln>
+            <a:noFill/>
+          </a:ln>
+        </p:spPr>
+        <p:style>
+          <a:lnRef idx="1">
+            <a:schemeClr val="accent1"/>
+          </a:lnRef>
+          <a:fillRef idx="3">
+            <a:schemeClr val="accent1"/>
+          </a:fillRef>
+          <a:effectRef idx="2">
+            <a:schemeClr val="accent1"/>
+          </a:effectRef>
+          <a:fontRef idx="minor">
+            <a:schemeClr val="lt1"/>
+          </a:fontRef>
+        </p:style>
+        <p:txBody>
+          <a:bodyPr rtlCol="0" anchor="ctr"/>
+          <a:lstStyle/>
+          <a:p>
+            <a:pPr algn="ctr"/>
+          </a:p>
+        </p:txBody>
+      </p:sp>
+      <p:sp>
+        <p:nvSpPr>
+          <p:cNvPr id="10" name="TextBox 9"/>
+          <p:cNvSpPr txBox="1"/>
+          <p:nvPr/>
+        </p:nvSpPr>
+        <p:spPr>
+          <a:xfrm>
+            <a:off x="365760" y="6601968"/>
+            <a:ext cx="11457432" cy="256032"/>
+          </a:xfrm>
+          <a:prstGeom prst="rect">
+            <a:avLst/>
+          </a:prstGeom>
+          <a:noFill/>
+        </p:spPr>
+        <p:txBody>
+          <a:bodyPr wrap="none">
+            <a:spAutoFit/>
+          </a:bodyPr>
+          <a:lstStyle/>
+          <a:p>
+            <a:pPr algn="ctr">
+              <a:defRPr sz="900">
+                <a:solidFill>
+                  <a:srgbClr val="FFFFFF"/>
+                </a:solidFill>
+                <a:latin typeface="Calibri"/>
+              </a:defRPr>
+            </a:pPr>
+            <a:r>
+              <a:t>Video Activity Recognition with 3D CNN &amp; Grad-CAM  |  AIML GNDEC</a:t>
+            </a:r>
+          </a:p>
+        </p:txBody>
+      </p:sp>
+      <p:sp>
+        <p:nvSpPr>
+          <p:cNvPr id="11" name="Rounded Rectangle 10"/>
           <p:cNvSpPr/>
           <p:nvPr/>
         </p:nvSpPr>
@@ -8334,7 +9691,7 @@
       </p:sp>
       <p:sp>
         <p:nvSpPr>
-          <p:cNvPr id="8" name="TextBox 7"/>
+          <p:cNvPr id="12" name="TextBox 11"/>
           <p:cNvSpPr txBox="1"/>
           <p:nvPr/>
         </p:nvSpPr>
@@ -8500,97 +9857,23 @@
       <p:grpSpPr/>
       <p:sp>
         <p:nvSpPr>
-          <p:cNvPr id="2" name="TextBox 1"/>
-          <p:cNvSpPr txBox="1"/>
-          <p:nvPr/>
-        </p:nvSpPr>
-        <p:spPr>
-          <a:xfrm>
-            <a:off x="731520" y="320040"/>
-            <a:ext cx="10725912" cy="320040"/>
-          </a:xfrm>
-          <a:prstGeom prst="rect">
-            <a:avLst/>
-          </a:prstGeom>
-          <a:noFill/>
-        </p:spPr>
-        <p:txBody>
-          <a:bodyPr wrap="none">
-            <a:spAutoFit/>
-          </a:bodyPr>
-          <a:lstStyle/>
-          <a:p>
-            <a:pPr>
-              <a:defRPr sz="1000" b="1">
-                <a:solidFill>
-                  <a:srgbClr val="2563EB"/>
-                </a:solidFill>
-                <a:latin typeface="Calibri"/>
-              </a:defRPr>
-            </a:pPr>
-            <a:r>
-              <a:t>DEPARTMENT OF ARTIFICIAL INTELLIGENCE &amp; MACHINE LEARNING (AI &amp; ML)</a:t>
-            </a:r>
-          </a:p>
-        </p:txBody>
-      </p:sp>
-      <p:sp>
-        <p:nvSpPr>
-          <p:cNvPr id="3" name="TextBox 2"/>
-          <p:cNvSpPr txBox="1"/>
-          <p:nvPr/>
-        </p:nvSpPr>
-        <p:spPr>
-          <a:xfrm>
-            <a:off x="731520" y="594360"/>
-            <a:ext cx="10725912" cy="640080"/>
-          </a:xfrm>
-          <a:prstGeom prst="rect">
-            <a:avLst/>
-          </a:prstGeom>
-          <a:noFill/>
-        </p:spPr>
-        <p:txBody>
-          <a:bodyPr wrap="none">
-            <a:spAutoFit/>
-          </a:bodyPr>
-          <a:lstStyle/>
-          <a:p>
-            <a:pPr>
-              <a:defRPr sz="2200" b="1">
-                <a:solidFill>
-                  <a:srgbClr val="0F172A"/>
-                </a:solidFill>
-                <a:latin typeface="Calibri"/>
-              </a:defRPr>
-            </a:pPr>
-            <a:r>
-              <a:t>Introduction &amp; Overview</a:t>
-            </a:r>
-          </a:p>
-        </p:txBody>
-      </p:sp>
-      <p:sp>
-        <p:nvSpPr>
-          <p:cNvPr id="4" name="Rectangle 3"/>
+          <p:cNvPr id="2" name="Rectangle 1"/>
           <p:cNvSpPr/>
           <p:nvPr/>
         </p:nvSpPr>
         <p:spPr>
           <a:xfrm>
-            <a:off x="731520" y="1234440"/>
-            <a:ext cx="10725912" cy="18288"/>
+            <a:off x="0" y="0"/>
+            <a:ext cx="12191695" cy="6858000"/>
           </a:xfrm>
           <a:prstGeom prst="rect">
             <a:avLst/>
           </a:prstGeom>
           <a:solidFill>
-            <a:srgbClr val="2563EB"/>
+            <a:srgbClr val="DCE8F8"/>
           </a:solidFill>
           <a:ln>
-            <a:solidFill>
-              <a:srgbClr val="2563EB"/>
-            </a:solidFill>
+            <a:noFill/>
           </a:ln>
         </p:spPr>
         <p:style>
@@ -8617,25 +9900,23 @@
       </p:sp>
       <p:sp>
         <p:nvSpPr>
-          <p:cNvPr id="5" name="Rectangle 4"/>
+          <p:cNvPr id="3" name="Rectangle 2"/>
           <p:cNvSpPr/>
           <p:nvPr/>
         </p:nvSpPr>
         <p:spPr>
           <a:xfrm>
-            <a:off x="731520" y="6400800"/>
-            <a:ext cx="10725912" cy="13716"/>
+            <a:off x="0" y="0"/>
+            <a:ext cx="12191695" cy="1143000"/>
           </a:xfrm>
           <a:prstGeom prst="rect">
             <a:avLst/>
           </a:prstGeom>
           <a:solidFill>
-            <a:srgbClr val="E2E8F0"/>
+            <a:srgbClr val="FFFFFF"/>
           </a:solidFill>
           <a:ln>
-            <a:solidFill>
-              <a:srgbClr val="E2E8F0"/>
-            </a:solidFill>
+            <a:noFill/>
           </a:ln>
         </p:spPr>
         <p:style>
@@ -8662,14 +9943,14 @@
       </p:sp>
       <p:sp>
         <p:nvSpPr>
-          <p:cNvPr id="6" name="TextBox 5"/>
+          <p:cNvPr id="4" name="TextBox 3"/>
           <p:cNvSpPr txBox="1"/>
           <p:nvPr/>
         </p:nvSpPr>
         <p:spPr>
           <a:xfrm>
-            <a:off x="731520" y="6419088"/>
-            <a:ext cx="10725912" cy="320040"/>
+            <a:off x="365760" y="45720"/>
+            <a:ext cx="11457432" cy="502920"/>
           </a:xfrm>
           <a:prstGeom prst="rect">
             <a:avLst/>
@@ -8682,23 +9963,260 @@
           </a:bodyPr>
           <a:lstStyle/>
           <a:p>
-            <a:pPr>
-              <a:defRPr sz="950">
-                <a:solidFill>
-                  <a:srgbClr val="64748B"/>
-                </a:solidFill>
-                <a:latin typeface="Calibri"/>
-              </a:defRPr>
-            </a:pPr>
-            <a:r>
-              <a:t>Video Activity Recognition with 3D CNN &amp; Grad-CAM  |  Dept of AI &amp; ML</a:t>
-            </a:r>
-          </a:p>
-        </p:txBody>
-      </p:sp>
-      <p:sp>
-        <p:nvSpPr>
-          <p:cNvPr id="7" name="Rounded Rectangle 6"/>
+            <a:pPr algn="ctr">
+              <a:defRPr sz="1700" b="1">
+                <a:solidFill>
+                  <a:srgbClr val="0F172A"/>
+                </a:solidFill>
+                <a:latin typeface="Calibri"/>
+              </a:defRPr>
+            </a:pPr>
+            <a:r>
+              <a:t>GURU NANAK DEV ENGINEERING COLLEGE, BIDAR</a:t>
+            </a:r>
+          </a:p>
+        </p:txBody>
+      </p:sp>
+      <p:sp>
+        <p:nvSpPr>
+          <p:cNvPr id="5" name="TextBox 4"/>
+          <p:cNvSpPr txBox="1"/>
+          <p:nvPr/>
+        </p:nvSpPr>
+        <p:spPr>
+          <a:xfrm>
+            <a:off x="365760" y="502920"/>
+            <a:ext cx="11457432" cy="384048"/>
+          </a:xfrm>
+          <a:prstGeom prst="rect">
+            <a:avLst/>
+          </a:prstGeom>
+          <a:noFill/>
+        </p:spPr>
+        <p:txBody>
+          <a:bodyPr wrap="none">
+            <a:spAutoFit/>
+          </a:bodyPr>
+          <a:lstStyle/>
+          <a:p>
+            <a:pPr algn="ctr">
+              <a:defRPr sz="1300" b="1">
+                <a:solidFill>
+                  <a:srgbClr val="2563EB"/>
+                </a:solidFill>
+                <a:latin typeface="Calibri"/>
+              </a:defRPr>
+            </a:pPr>
+            <a:r>
+              <a:t>DEPARTMENT OF AI &amp; ML</a:t>
+            </a:r>
+          </a:p>
+        </p:txBody>
+      </p:sp>
+      <p:sp>
+        <p:nvSpPr>
+          <p:cNvPr id="6" name="Rectangle 5"/>
+          <p:cNvSpPr/>
+          <p:nvPr/>
+        </p:nvSpPr>
+        <p:spPr>
+          <a:xfrm>
+            <a:off x="0" y="1143000"/>
+            <a:ext cx="12191695" cy="27432"/>
+          </a:xfrm>
+          <a:prstGeom prst="rect">
+            <a:avLst/>
+          </a:prstGeom>
+          <a:solidFill>
+            <a:srgbClr val="2563EB"/>
+          </a:solidFill>
+          <a:ln>
+            <a:noFill/>
+          </a:ln>
+        </p:spPr>
+        <p:style>
+          <a:lnRef idx="1">
+            <a:schemeClr val="accent1"/>
+          </a:lnRef>
+          <a:fillRef idx="3">
+            <a:schemeClr val="accent1"/>
+          </a:fillRef>
+          <a:effectRef idx="2">
+            <a:schemeClr val="accent1"/>
+          </a:effectRef>
+          <a:fontRef idx="minor">
+            <a:schemeClr val="lt1"/>
+          </a:fontRef>
+        </p:style>
+        <p:txBody>
+          <a:bodyPr rtlCol="0" anchor="ctr"/>
+          <a:lstStyle/>
+          <a:p>
+            <a:pPr algn="ctr"/>
+          </a:p>
+        </p:txBody>
+      </p:sp>
+      <p:sp>
+        <p:nvSpPr>
+          <p:cNvPr id="7" name="Rectangle 6"/>
+          <p:cNvSpPr/>
+          <p:nvPr/>
+        </p:nvSpPr>
+        <p:spPr>
+          <a:xfrm>
+            <a:off x="457200" y="1234440"/>
+            <a:ext cx="11274552" cy="475488"/>
+          </a:xfrm>
+          <a:prstGeom prst="rect">
+            <a:avLst/>
+          </a:prstGeom>
+          <a:solidFill>
+            <a:srgbClr val="0F172A"/>
+          </a:solidFill>
+          <a:ln>
+            <a:noFill/>
+          </a:ln>
+        </p:spPr>
+        <p:style>
+          <a:lnRef idx="1">
+            <a:schemeClr val="accent1"/>
+          </a:lnRef>
+          <a:fillRef idx="3">
+            <a:schemeClr val="accent1"/>
+          </a:fillRef>
+          <a:effectRef idx="2">
+            <a:schemeClr val="accent1"/>
+          </a:effectRef>
+          <a:fontRef idx="minor">
+            <a:schemeClr val="lt1"/>
+          </a:fontRef>
+        </p:style>
+        <p:txBody>
+          <a:bodyPr rtlCol="0" anchor="ctr"/>
+          <a:lstStyle/>
+          <a:p>
+            <a:pPr algn="ctr"/>
+          </a:p>
+        </p:txBody>
+      </p:sp>
+      <p:sp>
+        <p:nvSpPr>
+          <p:cNvPr id="8" name="TextBox 7"/>
+          <p:cNvSpPr txBox="1"/>
+          <p:nvPr/>
+        </p:nvSpPr>
+        <p:spPr>
+          <a:xfrm>
+            <a:off x="548640" y="1252728"/>
+            <a:ext cx="11091672" cy="420624"/>
+          </a:xfrm>
+          <a:prstGeom prst="rect">
+            <a:avLst/>
+          </a:prstGeom>
+          <a:noFill/>
+        </p:spPr>
+        <p:txBody>
+          <a:bodyPr wrap="none">
+            <a:spAutoFit/>
+          </a:bodyPr>
+          <a:lstStyle/>
+          <a:p>
+            <a:pPr algn="ctr">
+              <a:defRPr sz="1800" b="1">
+                <a:solidFill>
+                  <a:srgbClr val="FFFFFF"/>
+                </a:solidFill>
+                <a:latin typeface="Calibri"/>
+              </a:defRPr>
+            </a:pPr>
+            <a:r>
+              <a:t>Introduction &amp; Overview</a:t>
+            </a:r>
+          </a:p>
+        </p:txBody>
+      </p:sp>
+      <p:sp>
+        <p:nvSpPr>
+          <p:cNvPr id="9" name="Rectangle 8"/>
+          <p:cNvSpPr/>
+          <p:nvPr/>
+        </p:nvSpPr>
+        <p:spPr>
+          <a:xfrm>
+            <a:off x="0" y="6583680"/>
+            <a:ext cx="12191695" cy="274320"/>
+          </a:xfrm>
+          <a:prstGeom prst="rect">
+            <a:avLst/>
+          </a:prstGeom>
+          <a:solidFill>
+            <a:srgbClr val="0F172A"/>
+          </a:solidFill>
+          <a:ln>
+            <a:noFill/>
+          </a:ln>
+        </p:spPr>
+        <p:style>
+          <a:lnRef idx="1">
+            <a:schemeClr val="accent1"/>
+          </a:lnRef>
+          <a:fillRef idx="3">
+            <a:schemeClr val="accent1"/>
+          </a:fillRef>
+          <a:effectRef idx="2">
+            <a:schemeClr val="accent1"/>
+          </a:effectRef>
+          <a:fontRef idx="minor">
+            <a:schemeClr val="lt1"/>
+          </a:fontRef>
+        </p:style>
+        <p:txBody>
+          <a:bodyPr rtlCol="0" anchor="ctr"/>
+          <a:lstStyle/>
+          <a:p>
+            <a:pPr algn="ctr"/>
+          </a:p>
+        </p:txBody>
+      </p:sp>
+      <p:sp>
+        <p:nvSpPr>
+          <p:cNvPr id="10" name="TextBox 9"/>
+          <p:cNvSpPr txBox="1"/>
+          <p:nvPr/>
+        </p:nvSpPr>
+        <p:spPr>
+          <a:xfrm>
+            <a:off x="365760" y="6601968"/>
+            <a:ext cx="11457432" cy="256032"/>
+          </a:xfrm>
+          <a:prstGeom prst="rect">
+            <a:avLst/>
+          </a:prstGeom>
+          <a:noFill/>
+        </p:spPr>
+        <p:txBody>
+          <a:bodyPr wrap="none">
+            <a:spAutoFit/>
+          </a:bodyPr>
+          <a:lstStyle/>
+          <a:p>
+            <a:pPr algn="ctr">
+              <a:defRPr sz="900">
+                <a:solidFill>
+                  <a:srgbClr val="FFFFFF"/>
+                </a:solidFill>
+                <a:latin typeface="Calibri"/>
+              </a:defRPr>
+            </a:pPr>
+            <a:r>
+              <a:t>Video Activity Recognition with 3D CNN &amp; Grad-CAM  |  AIML GNDEC</a:t>
+            </a:r>
+          </a:p>
+        </p:txBody>
+      </p:sp>
+      <p:sp>
+        <p:nvSpPr>
+          <p:cNvPr id="11" name="Rounded Rectangle 10"/>
           <p:cNvSpPr/>
           <p:nvPr/>
         </p:nvSpPr>
@@ -8743,7 +10261,7 @@
       </p:sp>
       <p:sp>
         <p:nvSpPr>
-          <p:cNvPr id="8" name="TextBox 7"/>
+          <p:cNvPr id="12" name="TextBox 11"/>
           <p:cNvSpPr txBox="1"/>
           <p:nvPr/>
         </p:nvSpPr>
@@ -8827,7 +10345,7 @@
       </p:sp>
       <p:sp>
         <p:nvSpPr>
-          <p:cNvPr id="9" name="Rounded Rectangle 8"/>
+          <p:cNvPr id="13" name="Rounded Rectangle 12"/>
           <p:cNvSpPr/>
           <p:nvPr/>
         </p:nvSpPr>
@@ -8872,7 +10390,7 @@
       </p:sp>
       <p:sp>
         <p:nvSpPr>
-          <p:cNvPr id="10" name="TextBox 9"/>
+          <p:cNvPr id="14" name="TextBox 13"/>
           <p:cNvSpPr txBox="1"/>
           <p:nvPr/>
         </p:nvSpPr>
@@ -8972,7 +10490,7 @@
       </p:sp>
       <p:sp>
         <p:nvSpPr>
-          <p:cNvPr id="11" name="Rounded Rectangle 10"/>
+          <p:cNvPr id="15" name="Rounded Rectangle 14"/>
           <p:cNvSpPr/>
           <p:nvPr/>
         </p:nvSpPr>
@@ -9017,7 +10535,7 @@
       </p:sp>
       <p:sp>
         <p:nvSpPr>
-          <p:cNvPr id="12" name="TextBox 11"/>
+          <p:cNvPr id="16" name="TextBox 15"/>
           <p:cNvSpPr txBox="1"/>
           <p:nvPr/>
         </p:nvSpPr>
@@ -9071,97 +10589,23 @@
       <p:grpSpPr/>
       <p:sp>
         <p:nvSpPr>
-          <p:cNvPr id="2" name="TextBox 1"/>
-          <p:cNvSpPr txBox="1"/>
-          <p:nvPr/>
-        </p:nvSpPr>
-        <p:spPr>
-          <a:xfrm>
-            <a:off x="731520" y="320040"/>
-            <a:ext cx="10725912" cy="320040"/>
-          </a:xfrm>
-          <a:prstGeom prst="rect">
-            <a:avLst/>
-          </a:prstGeom>
-          <a:noFill/>
-        </p:spPr>
-        <p:txBody>
-          <a:bodyPr wrap="none">
-            <a:spAutoFit/>
-          </a:bodyPr>
-          <a:lstStyle/>
-          <a:p>
-            <a:pPr>
-              <a:defRPr sz="1000" b="1">
-                <a:solidFill>
-                  <a:srgbClr val="2563EB"/>
-                </a:solidFill>
-                <a:latin typeface="Calibri"/>
-              </a:defRPr>
-            </a:pPr>
-            <a:r>
-              <a:t>DEPARTMENT OF ARTIFICIAL INTELLIGENCE &amp; MACHINE LEARNING (AI &amp; ML)</a:t>
-            </a:r>
-          </a:p>
-        </p:txBody>
-      </p:sp>
-      <p:sp>
-        <p:nvSpPr>
-          <p:cNvPr id="3" name="TextBox 2"/>
-          <p:cNvSpPr txBox="1"/>
-          <p:nvPr/>
-        </p:nvSpPr>
-        <p:spPr>
-          <a:xfrm>
-            <a:off x="731520" y="594360"/>
-            <a:ext cx="10725912" cy="640080"/>
-          </a:xfrm>
-          <a:prstGeom prst="rect">
-            <a:avLst/>
-          </a:prstGeom>
-          <a:noFill/>
-        </p:spPr>
-        <p:txBody>
-          <a:bodyPr wrap="none">
-            <a:spAutoFit/>
-          </a:bodyPr>
-          <a:lstStyle/>
-          <a:p>
-            <a:pPr>
-              <a:defRPr sz="2200" b="1">
-                <a:solidFill>
-                  <a:srgbClr val="0F172A"/>
-                </a:solidFill>
-                <a:latin typeface="Calibri"/>
-              </a:defRPr>
-            </a:pPr>
-            <a:r>
-              <a:t>Problem Statement: 2D CNN vs. 3D CNN</a:t>
-            </a:r>
-          </a:p>
-        </p:txBody>
-      </p:sp>
-      <p:sp>
-        <p:nvSpPr>
-          <p:cNvPr id="4" name="Rectangle 3"/>
+          <p:cNvPr id="2" name="Rectangle 1"/>
           <p:cNvSpPr/>
           <p:nvPr/>
         </p:nvSpPr>
         <p:spPr>
           <a:xfrm>
-            <a:off x="731520" y="1234440"/>
-            <a:ext cx="10725912" cy="18288"/>
+            <a:off x="0" y="0"/>
+            <a:ext cx="12191695" cy="6858000"/>
           </a:xfrm>
           <a:prstGeom prst="rect">
             <a:avLst/>
           </a:prstGeom>
           <a:solidFill>
-            <a:srgbClr val="2563EB"/>
+            <a:srgbClr val="DCE8F8"/>
           </a:solidFill>
           <a:ln>
-            <a:solidFill>
-              <a:srgbClr val="2563EB"/>
-            </a:solidFill>
+            <a:noFill/>
           </a:ln>
         </p:spPr>
         <p:style>
@@ -9188,25 +10632,23 @@
       </p:sp>
       <p:sp>
         <p:nvSpPr>
-          <p:cNvPr id="5" name="Rectangle 4"/>
+          <p:cNvPr id="3" name="Rectangle 2"/>
           <p:cNvSpPr/>
           <p:nvPr/>
         </p:nvSpPr>
         <p:spPr>
           <a:xfrm>
-            <a:off x="731520" y="6400800"/>
-            <a:ext cx="10725912" cy="13716"/>
+            <a:off x="0" y="0"/>
+            <a:ext cx="12191695" cy="1143000"/>
           </a:xfrm>
           <a:prstGeom prst="rect">
             <a:avLst/>
           </a:prstGeom>
           <a:solidFill>
-            <a:srgbClr val="E2E8F0"/>
+            <a:srgbClr val="FFFFFF"/>
           </a:solidFill>
           <a:ln>
-            <a:solidFill>
-              <a:srgbClr val="E2E8F0"/>
-            </a:solidFill>
+            <a:noFill/>
           </a:ln>
         </p:spPr>
         <p:style>
@@ -9233,14 +10675,14 @@
       </p:sp>
       <p:sp>
         <p:nvSpPr>
-          <p:cNvPr id="6" name="TextBox 5"/>
+          <p:cNvPr id="4" name="TextBox 3"/>
           <p:cNvSpPr txBox="1"/>
           <p:nvPr/>
         </p:nvSpPr>
         <p:spPr>
           <a:xfrm>
-            <a:off x="731520" y="6419088"/>
-            <a:ext cx="10725912" cy="320040"/>
+            <a:off x="365760" y="45720"/>
+            <a:ext cx="11457432" cy="502920"/>
           </a:xfrm>
           <a:prstGeom prst="rect">
             <a:avLst/>
@@ -9253,23 +10695,260 @@
           </a:bodyPr>
           <a:lstStyle/>
           <a:p>
-            <a:pPr>
-              <a:defRPr sz="950">
-                <a:solidFill>
-                  <a:srgbClr val="64748B"/>
-                </a:solidFill>
-                <a:latin typeface="Calibri"/>
-              </a:defRPr>
-            </a:pPr>
-            <a:r>
-              <a:t>Video Activity Recognition with 3D CNN &amp; Grad-CAM  |  Dept of AI &amp; ML</a:t>
-            </a:r>
-          </a:p>
-        </p:txBody>
-      </p:sp>
-      <p:sp>
-        <p:nvSpPr>
-          <p:cNvPr id="7" name="Rounded Rectangle 6"/>
+            <a:pPr algn="ctr">
+              <a:defRPr sz="1700" b="1">
+                <a:solidFill>
+                  <a:srgbClr val="0F172A"/>
+                </a:solidFill>
+                <a:latin typeface="Calibri"/>
+              </a:defRPr>
+            </a:pPr>
+            <a:r>
+              <a:t>GURU NANAK DEV ENGINEERING COLLEGE, BIDAR</a:t>
+            </a:r>
+          </a:p>
+        </p:txBody>
+      </p:sp>
+      <p:sp>
+        <p:nvSpPr>
+          <p:cNvPr id="5" name="TextBox 4"/>
+          <p:cNvSpPr txBox="1"/>
+          <p:nvPr/>
+        </p:nvSpPr>
+        <p:spPr>
+          <a:xfrm>
+            <a:off x="365760" y="502920"/>
+            <a:ext cx="11457432" cy="384048"/>
+          </a:xfrm>
+          <a:prstGeom prst="rect">
+            <a:avLst/>
+          </a:prstGeom>
+          <a:noFill/>
+        </p:spPr>
+        <p:txBody>
+          <a:bodyPr wrap="none">
+            <a:spAutoFit/>
+          </a:bodyPr>
+          <a:lstStyle/>
+          <a:p>
+            <a:pPr algn="ctr">
+              <a:defRPr sz="1300" b="1">
+                <a:solidFill>
+                  <a:srgbClr val="2563EB"/>
+                </a:solidFill>
+                <a:latin typeface="Calibri"/>
+              </a:defRPr>
+            </a:pPr>
+            <a:r>
+              <a:t>DEPARTMENT OF AI &amp; ML</a:t>
+            </a:r>
+          </a:p>
+        </p:txBody>
+      </p:sp>
+      <p:sp>
+        <p:nvSpPr>
+          <p:cNvPr id="6" name="Rectangle 5"/>
+          <p:cNvSpPr/>
+          <p:nvPr/>
+        </p:nvSpPr>
+        <p:spPr>
+          <a:xfrm>
+            <a:off x="0" y="1143000"/>
+            <a:ext cx="12191695" cy="27432"/>
+          </a:xfrm>
+          <a:prstGeom prst="rect">
+            <a:avLst/>
+          </a:prstGeom>
+          <a:solidFill>
+            <a:srgbClr val="2563EB"/>
+          </a:solidFill>
+          <a:ln>
+            <a:noFill/>
+          </a:ln>
+        </p:spPr>
+        <p:style>
+          <a:lnRef idx="1">
+            <a:schemeClr val="accent1"/>
+          </a:lnRef>
+          <a:fillRef idx="3">
+            <a:schemeClr val="accent1"/>
+          </a:fillRef>
+          <a:effectRef idx="2">
+            <a:schemeClr val="accent1"/>
+          </a:effectRef>
+          <a:fontRef idx="minor">
+            <a:schemeClr val="lt1"/>
+          </a:fontRef>
+        </p:style>
+        <p:txBody>
+          <a:bodyPr rtlCol="0" anchor="ctr"/>
+          <a:lstStyle/>
+          <a:p>
+            <a:pPr algn="ctr"/>
+          </a:p>
+        </p:txBody>
+      </p:sp>
+      <p:sp>
+        <p:nvSpPr>
+          <p:cNvPr id="7" name="Rectangle 6"/>
+          <p:cNvSpPr/>
+          <p:nvPr/>
+        </p:nvSpPr>
+        <p:spPr>
+          <a:xfrm>
+            <a:off x="457200" y="1234440"/>
+            <a:ext cx="11274552" cy="475488"/>
+          </a:xfrm>
+          <a:prstGeom prst="rect">
+            <a:avLst/>
+          </a:prstGeom>
+          <a:solidFill>
+            <a:srgbClr val="0F172A"/>
+          </a:solidFill>
+          <a:ln>
+            <a:noFill/>
+          </a:ln>
+        </p:spPr>
+        <p:style>
+          <a:lnRef idx="1">
+            <a:schemeClr val="accent1"/>
+          </a:lnRef>
+          <a:fillRef idx="3">
+            <a:schemeClr val="accent1"/>
+          </a:fillRef>
+          <a:effectRef idx="2">
+            <a:schemeClr val="accent1"/>
+          </a:effectRef>
+          <a:fontRef idx="minor">
+            <a:schemeClr val="lt1"/>
+          </a:fontRef>
+        </p:style>
+        <p:txBody>
+          <a:bodyPr rtlCol="0" anchor="ctr"/>
+          <a:lstStyle/>
+          <a:p>
+            <a:pPr algn="ctr"/>
+          </a:p>
+        </p:txBody>
+      </p:sp>
+      <p:sp>
+        <p:nvSpPr>
+          <p:cNvPr id="8" name="TextBox 7"/>
+          <p:cNvSpPr txBox="1"/>
+          <p:nvPr/>
+        </p:nvSpPr>
+        <p:spPr>
+          <a:xfrm>
+            <a:off x="548640" y="1252728"/>
+            <a:ext cx="11091672" cy="420624"/>
+          </a:xfrm>
+          <a:prstGeom prst="rect">
+            <a:avLst/>
+          </a:prstGeom>
+          <a:noFill/>
+        </p:spPr>
+        <p:txBody>
+          <a:bodyPr wrap="none">
+            <a:spAutoFit/>
+          </a:bodyPr>
+          <a:lstStyle/>
+          <a:p>
+            <a:pPr algn="ctr">
+              <a:defRPr sz="1800" b="1">
+                <a:solidFill>
+                  <a:srgbClr val="FFFFFF"/>
+                </a:solidFill>
+                <a:latin typeface="Calibri"/>
+              </a:defRPr>
+            </a:pPr>
+            <a:r>
+              <a:t>Problem Statement: 2D CNN vs. 3D CNN</a:t>
+            </a:r>
+          </a:p>
+        </p:txBody>
+      </p:sp>
+      <p:sp>
+        <p:nvSpPr>
+          <p:cNvPr id="9" name="Rectangle 8"/>
+          <p:cNvSpPr/>
+          <p:nvPr/>
+        </p:nvSpPr>
+        <p:spPr>
+          <a:xfrm>
+            <a:off x="0" y="6583680"/>
+            <a:ext cx="12191695" cy="274320"/>
+          </a:xfrm>
+          <a:prstGeom prst="rect">
+            <a:avLst/>
+          </a:prstGeom>
+          <a:solidFill>
+            <a:srgbClr val="0F172A"/>
+          </a:solidFill>
+          <a:ln>
+            <a:noFill/>
+          </a:ln>
+        </p:spPr>
+        <p:style>
+          <a:lnRef idx="1">
+            <a:schemeClr val="accent1"/>
+          </a:lnRef>
+          <a:fillRef idx="3">
+            <a:schemeClr val="accent1"/>
+          </a:fillRef>
+          <a:effectRef idx="2">
+            <a:schemeClr val="accent1"/>
+          </a:effectRef>
+          <a:fontRef idx="minor">
+            <a:schemeClr val="lt1"/>
+          </a:fontRef>
+        </p:style>
+        <p:txBody>
+          <a:bodyPr rtlCol="0" anchor="ctr"/>
+          <a:lstStyle/>
+          <a:p>
+            <a:pPr algn="ctr"/>
+          </a:p>
+        </p:txBody>
+      </p:sp>
+      <p:sp>
+        <p:nvSpPr>
+          <p:cNvPr id="10" name="TextBox 9"/>
+          <p:cNvSpPr txBox="1"/>
+          <p:nvPr/>
+        </p:nvSpPr>
+        <p:spPr>
+          <a:xfrm>
+            <a:off x="365760" y="6601968"/>
+            <a:ext cx="11457432" cy="256032"/>
+          </a:xfrm>
+          <a:prstGeom prst="rect">
+            <a:avLst/>
+          </a:prstGeom>
+          <a:noFill/>
+        </p:spPr>
+        <p:txBody>
+          <a:bodyPr wrap="none">
+            <a:spAutoFit/>
+          </a:bodyPr>
+          <a:lstStyle/>
+          <a:p>
+            <a:pPr algn="ctr">
+              <a:defRPr sz="900">
+                <a:solidFill>
+                  <a:srgbClr val="FFFFFF"/>
+                </a:solidFill>
+                <a:latin typeface="Calibri"/>
+              </a:defRPr>
+            </a:pPr>
+            <a:r>
+              <a:t>Video Activity Recognition with 3D CNN &amp; Grad-CAM  |  AIML GNDEC</a:t>
+            </a:r>
+          </a:p>
+        </p:txBody>
+      </p:sp>
+      <p:sp>
+        <p:nvSpPr>
+          <p:cNvPr id="11" name="Rounded Rectangle 10"/>
           <p:cNvSpPr/>
           <p:nvPr/>
         </p:nvSpPr>
@@ -9314,7 +10993,7 @@
       </p:sp>
       <p:sp>
         <p:nvSpPr>
-          <p:cNvPr id="8" name="TextBox 7"/>
+          <p:cNvPr id="12" name="TextBox 11"/>
           <p:cNvSpPr txBox="1"/>
           <p:nvPr/>
         </p:nvSpPr>
@@ -9414,7 +11093,7 @@
       </p:sp>
       <p:sp>
         <p:nvSpPr>
-          <p:cNvPr id="9" name="Rounded Rectangle 8"/>
+          <p:cNvPr id="13" name="Rounded Rectangle 12"/>
           <p:cNvSpPr/>
           <p:nvPr/>
         </p:nvSpPr>
@@ -9459,7 +11138,7 @@
       </p:sp>
       <p:sp>
         <p:nvSpPr>
-          <p:cNvPr id="10" name="TextBox 9"/>
+          <p:cNvPr id="14" name="TextBox 13"/>
           <p:cNvSpPr txBox="1"/>
           <p:nvPr/>
         </p:nvSpPr>
@@ -9559,7 +11238,7 @@
       </p:sp>
       <p:sp>
         <p:nvSpPr>
-          <p:cNvPr id="11" name="Rounded Rectangle 10"/>
+          <p:cNvPr id="15" name="Rounded Rectangle 14"/>
           <p:cNvSpPr/>
           <p:nvPr/>
         </p:nvSpPr>
@@ -9604,7 +11283,7 @@
       </p:sp>
       <p:sp>
         <p:nvSpPr>
-          <p:cNvPr id="12" name="TextBox 11"/>
+          <p:cNvPr id="16" name="TextBox 15"/>
           <p:cNvSpPr txBox="1"/>
           <p:nvPr/>
         </p:nvSpPr>
@@ -9658,97 +11337,23 @@
       <p:grpSpPr/>
       <p:sp>
         <p:nvSpPr>
-          <p:cNvPr id="2" name="TextBox 1"/>
-          <p:cNvSpPr txBox="1"/>
-          <p:nvPr/>
-        </p:nvSpPr>
-        <p:spPr>
-          <a:xfrm>
-            <a:off x="731520" y="320040"/>
-            <a:ext cx="10725912" cy="320040"/>
-          </a:xfrm>
-          <a:prstGeom prst="rect">
-            <a:avLst/>
-          </a:prstGeom>
-          <a:noFill/>
-        </p:spPr>
-        <p:txBody>
-          <a:bodyPr wrap="none">
-            <a:spAutoFit/>
-          </a:bodyPr>
-          <a:lstStyle/>
-          <a:p>
-            <a:pPr>
-              <a:defRPr sz="1000" b="1">
-                <a:solidFill>
-                  <a:srgbClr val="2563EB"/>
-                </a:solidFill>
-                <a:latin typeface="Calibri"/>
-              </a:defRPr>
-            </a:pPr>
-            <a:r>
-              <a:t>DEPARTMENT OF ARTIFICIAL INTELLIGENCE &amp; MACHINE LEARNING (AI &amp; ML)</a:t>
-            </a:r>
-          </a:p>
-        </p:txBody>
-      </p:sp>
-      <p:sp>
-        <p:nvSpPr>
-          <p:cNvPr id="3" name="TextBox 2"/>
-          <p:cNvSpPr txBox="1"/>
-          <p:nvPr/>
-        </p:nvSpPr>
-        <p:spPr>
-          <a:xfrm>
-            <a:off x="731520" y="594360"/>
-            <a:ext cx="10725912" cy="640080"/>
-          </a:xfrm>
-          <a:prstGeom prst="rect">
-            <a:avLst/>
-          </a:prstGeom>
-          <a:noFill/>
-        </p:spPr>
-        <p:txBody>
-          <a:bodyPr wrap="none">
-            <a:spAutoFit/>
-          </a:bodyPr>
-          <a:lstStyle/>
-          <a:p>
-            <a:pPr>
-              <a:defRPr sz="2200" b="1">
-                <a:solidFill>
-                  <a:srgbClr val="0F172A"/>
-                </a:solidFill>
-                <a:latin typeface="Calibri"/>
-              </a:defRPr>
-            </a:pPr>
-            <a:r>
-              <a:t>Literature Survey: Foundational Action Recognition (Papers 1–5)</a:t>
-            </a:r>
-          </a:p>
-        </p:txBody>
-      </p:sp>
-      <p:sp>
-        <p:nvSpPr>
-          <p:cNvPr id="4" name="Rectangle 3"/>
+          <p:cNvPr id="2" name="Rectangle 1"/>
           <p:cNvSpPr/>
           <p:nvPr/>
         </p:nvSpPr>
         <p:spPr>
           <a:xfrm>
-            <a:off x="731520" y="1234440"/>
-            <a:ext cx="10725912" cy="18288"/>
+            <a:off x="0" y="0"/>
+            <a:ext cx="12191695" cy="6858000"/>
           </a:xfrm>
           <a:prstGeom prst="rect">
             <a:avLst/>
           </a:prstGeom>
           <a:solidFill>
-            <a:srgbClr val="2563EB"/>
+            <a:srgbClr val="DCE8F8"/>
           </a:solidFill>
           <a:ln>
-            <a:solidFill>
-              <a:srgbClr val="2563EB"/>
-            </a:solidFill>
+            <a:noFill/>
           </a:ln>
         </p:spPr>
         <p:style>
@@ -9775,25 +11380,23 @@
       </p:sp>
       <p:sp>
         <p:nvSpPr>
-          <p:cNvPr id="5" name="Rectangle 4"/>
+          <p:cNvPr id="3" name="Rectangle 2"/>
           <p:cNvSpPr/>
           <p:nvPr/>
         </p:nvSpPr>
         <p:spPr>
           <a:xfrm>
-            <a:off x="731520" y="6400800"/>
-            <a:ext cx="10725912" cy="13716"/>
+            <a:off x="0" y="0"/>
+            <a:ext cx="12191695" cy="1143000"/>
           </a:xfrm>
           <a:prstGeom prst="rect">
             <a:avLst/>
           </a:prstGeom>
           <a:solidFill>
-            <a:srgbClr val="E2E8F0"/>
+            <a:srgbClr val="FFFFFF"/>
           </a:solidFill>
           <a:ln>
-            <a:solidFill>
-              <a:srgbClr val="E2E8F0"/>
-            </a:solidFill>
+            <a:noFill/>
           </a:ln>
         </p:spPr>
         <p:style>
@@ -9820,14 +11423,14 @@
       </p:sp>
       <p:sp>
         <p:nvSpPr>
-          <p:cNvPr id="6" name="TextBox 5"/>
+          <p:cNvPr id="4" name="TextBox 3"/>
           <p:cNvSpPr txBox="1"/>
           <p:nvPr/>
         </p:nvSpPr>
         <p:spPr>
           <a:xfrm>
-            <a:off x="731520" y="6419088"/>
-            <a:ext cx="10725912" cy="320040"/>
+            <a:off x="365760" y="45720"/>
+            <a:ext cx="11457432" cy="502920"/>
           </a:xfrm>
           <a:prstGeom prst="rect">
             <a:avLst/>
@@ -9840,23 +11443,260 @@
           </a:bodyPr>
           <a:lstStyle/>
           <a:p>
-            <a:pPr>
-              <a:defRPr sz="950">
-                <a:solidFill>
-                  <a:srgbClr val="64748B"/>
-                </a:solidFill>
-                <a:latin typeface="Calibri"/>
-              </a:defRPr>
-            </a:pPr>
-            <a:r>
-              <a:t>Video Activity Recognition with 3D CNN &amp; Grad-CAM  |  Dept of AI &amp; ML</a:t>
+            <a:pPr algn="ctr">
+              <a:defRPr sz="1700" b="1">
+                <a:solidFill>
+                  <a:srgbClr val="0F172A"/>
+                </a:solidFill>
+                <a:latin typeface="Calibri"/>
+              </a:defRPr>
+            </a:pPr>
+            <a:r>
+              <a:t>GURU NANAK DEV ENGINEERING COLLEGE, BIDAR</a:t>
+            </a:r>
+          </a:p>
+        </p:txBody>
+      </p:sp>
+      <p:sp>
+        <p:nvSpPr>
+          <p:cNvPr id="5" name="TextBox 4"/>
+          <p:cNvSpPr txBox="1"/>
+          <p:nvPr/>
+        </p:nvSpPr>
+        <p:spPr>
+          <a:xfrm>
+            <a:off x="365760" y="502920"/>
+            <a:ext cx="11457432" cy="384048"/>
+          </a:xfrm>
+          <a:prstGeom prst="rect">
+            <a:avLst/>
+          </a:prstGeom>
+          <a:noFill/>
+        </p:spPr>
+        <p:txBody>
+          <a:bodyPr wrap="none">
+            <a:spAutoFit/>
+          </a:bodyPr>
+          <a:lstStyle/>
+          <a:p>
+            <a:pPr algn="ctr">
+              <a:defRPr sz="1300" b="1">
+                <a:solidFill>
+                  <a:srgbClr val="2563EB"/>
+                </a:solidFill>
+                <a:latin typeface="Calibri"/>
+              </a:defRPr>
+            </a:pPr>
+            <a:r>
+              <a:t>DEPARTMENT OF AI &amp; ML</a:t>
+            </a:r>
+          </a:p>
+        </p:txBody>
+      </p:sp>
+      <p:sp>
+        <p:nvSpPr>
+          <p:cNvPr id="6" name="Rectangle 5"/>
+          <p:cNvSpPr/>
+          <p:nvPr/>
+        </p:nvSpPr>
+        <p:spPr>
+          <a:xfrm>
+            <a:off x="0" y="1143000"/>
+            <a:ext cx="12191695" cy="27432"/>
+          </a:xfrm>
+          <a:prstGeom prst="rect">
+            <a:avLst/>
+          </a:prstGeom>
+          <a:solidFill>
+            <a:srgbClr val="2563EB"/>
+          </a:solidFill>
+          <a:ln>
+            <a:noFill/>
+          </a:ln>
+        </p:spPr>
+        <p:style>
+          <a:lnRef idx="1">
+            <a:schemeClr val="accent1"/>
+          </a:lnRef>
+          <a:fillRef idx="3">
+            <a:schemeClr val="accent1"/>
+          </a:fillRef>
+          <a:effectRef idx="2">
+            <a:schemeClr val="accent1"/>
+          </a:effectRef>
+          <a:fontRef idx="minor">
+            <a:schemeClr val="lt1"/>
+          </a:fontRef>
+        </p:style>
+        <p:txBody>
+          <a:bodyPr rtlCol="0" anchor="ctr"/>
+          <a:lstStyle/>
+          <a:p>
+            <a:pPr algn="ctr"/>
+          </a:p>
+        </p:txBody>
+      </p:sp>
+      <p:sp>
+        <p:nvSpPr>
+          <p:cNvPr id="7" name="Rectangle 6"/>
+          <p:cNvSpPr/>
+          <p:nvPr/>
+        </p:nvSpPr>
+        <p:spPr>
+          <a:xfrm>
+            <a:off x="457200" y="1234440"/>
+            <a:ext cx="11274552" cy="475488"/>
+          </a:xfrm>
+          <a:prstGeom prst="rect">
+            <a:avLst/>
+          </a:prstGeom>
+          <a:solidFill>
+            <a:srgbClr val="0F172A"/>
+          </a:solidFill>
+          <a:ln>
+            <a:noFill/>
+          </a:ln>
+        </p:spPr>
+        <p:style>
+          <a:lnRef idx="1">
+            <a:schemeClr val="accent1"/>
+          </a:lnRef>
+          <a:fillRef idx="3">
+            <a:schemeClr val="accent1"/>
+          </a:fillRef>
+          <a:effectRef idx="2">
+            <a:schemeClr val="accent1"/>
+          </a:effectRef>
+          <a:fontRef idx="minor">
+            <a:schemeClr val="lt1"/>
+          </a:fontRef>
+        </p:style>
+        <p:txBody>
+          <a:bodyPr rtlCol="0" anchor="ctr"/>
+          <a:lstStyle/>
+          <a:p>
+            <a:pPr algn="ctr"/>
+          </a:p>
+        </p:txBody>
+      </p:sp>
+      <p:sp>
+        <p:nvSpPr>
+          <p:cNvPr id="8" name="TextBox 7"/>
+          <p:cNvSpPr txBox="1"/>
+          <p:nvPr/>
+        </p:nvSpPr>
+        <p:spPr>
+          <a:xfrm>
+            <a:off x="548640" y="1252728"/>
+            <a:ext cx="11091672" cy="420624"/>
+          </a:xfrm>
+          <a:prstGeom prst="rect">
+            <a:avLst/>
+          </a:prstGeom>
+          <a:noFill/>
+        </p:spPr>
+        <p:txBody>
+          <a:bodyPr wrap="none">
+            <a:spAutoFit/>
+          </a:bodyPr>
+          <a:lstStyle/>
+          <a:p>
+            <a:pPr algn="ctr">
+              <a:defRPr sz="1800" b="1">
+                <a:solidFill>
+                  <a:srgbClr val="FFFFFF"/>
+                </a:solidFill>
+                <a:latin typeface="Calibri"/>
+              </a:defRPr>
+            </a:pPr>
+            <a:r>
+              <a:t>Literature Survey: Foundational Action Recognition (Papers 1–5)</a:t>
+            </a:r>
+          </a:p>
+        </p:txBody>
+      </p:sp>
+      <p:sp>
+        <p:nvSpPr>
+          <p:cNvPr id="9" name="Rectangle 8"/>
+          <p:cNvSpPr/>
+          <p:nvPr/>
+        </p:nvSpPr>
+        <p:spPr>
+          <a:xfrm>
+            <a:off x="0" y="6583680"/>
+            <a:ext cx="12191695" cy="274320"/>
+          </a:xfrm>
+          <a:prstGeom prst="rect">
+            <a:avLst/>
+          </a:prstGeom>
+          <a:solidFill>
+            <a:srgbClr val="0F172A"/>
+          </a:solidFill>
+          <a:ln>
+            <a:noFill/>
+          </a:ln>
+        </p:spPr>
+        <p:style>
+          <a:lnRef idx="1">
+            <a:schemeClr val="accent1"/>
+          </a:lnRef>
+          <a:fillRef idx="3">
+            <a:schemeClr val="accent1"/>
+          </a:fillRef>
+          <a:effectRef idx="2">
+            <a:schemeClr val="accent1"/>
+          </a:effectRef>
+          <a:fontRef idx="minor">
+            <a:schemeClr val="lt1"/>
+          </a:fontRef>
+        </p:style>
+        <p:txBody>
+          <a:bodyPr rtlCol="0" anchor="ctr"/>
+          <a:lstStyle/>
+          <a:p>
+            <a:pPr algn="ctr"/>
+          </a:p>
+        </p:txBody>
+      </p:sp>
+      <p:sp>
+        <p:nvSpPr>
+          <p:cNvPr id="10" name="TextBox 9"/>
+          <p:cNvSpPr txBox="1"/>
+          <p:nvPr/>
+        </p:nvSpPr>
+        <p:spPr>
+          <a:xfrm>
+            <a:off x="365760" y="6601968"/>
+            <a:ext cx="11457432" cy="256032"/>
+          </a:xfrm>
+          <a:prstGeom prst="rect">
+            <a:avLst/>
+          </a:prstGeom>
+          <a:noFill/>
+        </p:spPr>
+        <p:txBody>
+          <a:bodyPr wrap="none">
+            <a:spAutoFit/>
+          </a:bodyPr>
+          <a:lstStyle/>
+          <a:p>
+            <a:pPr algn="ctr">
+              <a:defRPr sz="900">
+                <a:solidFill>
+                  <a:srgbClr val="FFFFFF"/>
+                </a:solidFill>
+                <a:latin typeface="Calibri"/>
+              </a:defRPr>
+            </a:pPr>
+            <a:r>
+              <a:t>Video Activity Recognition with 3D CNN &amp; Grad-CAM  |  AIML GNDEC</a:t>
             </a:r>
           </a:p>
         </p:txBody>
       </p:sp>
       <p:graphicFrame>
         <p:nvGraphicFramePr>
-          <p:cNvPr id="7" name="Table 6"/>
+          <p:cNvPr id="11" name="Table 10"/>
           <p:cNvGraphicFramePr>
             <a:graphicFrameLocks noGrp="1"/>
           </p:cNvGraphicFramePr>
@@ -10490,97 +12330,23 @@
       <p:grpSpPr/>
       <p:sp>
         <p:nvSpPr>
-          <p:cNvPr id="2" name="TextBox 1"/>
-          <p:cNvSpPr txBox="1"/>
-          <p:nvPr/>
-        </p:nvSpPr>
-        <p:spPr>
-          <a:xfrm>
-            <a:off x="731520" y="320040"/>
-            <a:ext cx="10725912" cy="320040"/>
-          </a:xfrm>
-          <a:prstGeom prst="rect">
-            <a:avLst/>
-          </a:prstGeom>
-          <a:noFill/>
-        </p:spPr>
-        <p:txBody>
-          <a:bodyPr wrap="none">
-            <a:spAutoFit/>
-          </a:bodyPr>
-          <a:lstStyle/>
-          <a:p>
-            <a:pPr>
-              <a:defRPr sz="1000" b="1">
-                <a:solidFill>
-                  <a:srgbClr val="2563EB"/>
-                </a:solidFill>
-                <a:latin typeface="Calibri"/>
-              </a:defRPr>
-            </a:pPr>
-            <a:r>
-              <a:t>DEPARTMENT OF ARTIFICIAL INTELLIGENCE &amp; MACHINE LEARNING (AI &amp; ML)</a:t>
-            </a:r>
-          </a:p>
-        </p:txBody>
-      </p:sp>
-      <p:sp>
-        <p:nvSpPr>
-          <p:cNvPr id="3" name="TextBox 2"/>
-          <p:cNvSpPr txBox="1"/>
-          <p:nvPr/>
-        </p:nvSpPr>
-        <p:spPr>
-          <a:xfrm>
-            <a:off x="731520" y="594360"/>
-            <a:ext cx="10725912" cy="640080"/>
-          </a:xfrm>
-          <a:prstGeom prst="rect">
-            <a:avLst/>
-          </a:prstGeom>
-          <a:noFill/>
-        </p:spPr>
-        <p:txBody>
-          <a:bodyPr wrap="none">
-            <a:spAutoFit/>
-          </a:bodyPr>
-          <a:lstStyle/>
-          <a:p>
-            <a:pPr>
-              <a:defRPr sz="2200" b="1">
-                <a:solidFill>
-                  <a:srgbClr val="0F172A"/>
-                </a:solidFill>
-                <a:latin typeface="Calibri"/>
-              </a:defRPr>
-            </a:pPr>
-            <a:r>
-              <a:t>Literature Survey: 3D Advances &amp; Attention (Papers 6–10)</a:t>
-            </a:r>
-          </a:p>
-        </p:txBody>
-      </p:sp>
-      <p:sp>
-        <p:nvSpPr>
-          <p:cNvPr id="4" name="Rectangle 3"/>
+          <p:cNvPr id="2" name="Rectangle 1"/>
           <p:cNvSpPr/>
           <p:nvPr/>
         </p:nvSpPr>
         <p:spPr>
           <a:xfrm>
-            <a:off x="731520" y="1234440"/>
-            <a:ext cx="10725912" cy="18288"/>
+            <a:off x="0" y="0"/>
+            <a:ext cx="12191695" cy="6858000"/>
           </a:xfrm>
           <a:prstGeom prst="rect">
             <a:avLst/>
           </a:prstGeom>
           <a:solidFill>
-            <a:srgbClr val="2563EB"/>
+            <a:srgbClr val="DCE8F8"/>
           </a:solidFill>
           <a:ln>
-            <a:solidFill>
-              <a:srgbClr val="2563EB"/>
-            </a:solidFill>
+            <a:noFill/>
           </a:ln>
         </p:spPr>
         <p:style>
@@ -10607,25 +12373,23 @@
       </p:sp>
       <p:sp>
         <p:nvSpPr>
-          <p:cNvPr id="5" name="Rectangle 4"/>
+          <p:cNvPr id="3" name="Rectangle 2"/>
           <p:cNvSpPr/>
           <p:nvPr/>
         </p:nvSpPr>
         <p:spPr>
           <a:xfrm>
-            <a:off x="731520" y="6400800"/>
-            <a:ext cx="10725912" cy="13716"/>
+            <a:off x="0" y="0"/>
+            <a:ext cx="12191695" cy="1143000"/>
           </a:xfrm>
           <a:prstGeom prst="rect">
             <a:avLst/>
           </a:prstGeom>
           <a:solidFill>
-            <a:srgbClr val="E2E8F0"/>
+            <a:srgbClr val="FFFFFF"/>
           </a:solidFill>
           <a:ln>
-            <a:solidFill>
-              <a:srgbClr val="E2E8F0"/>
-            </a:solidFill>
+            <a:noFill/>
           </a:ln>
         </p:spPr>
         <p:style>
@@ -10652,14 +12416,14 @@
       </p:sp>
       <p:sp>
         <p:nvSpPr>
-          <p:cNvPr id="6" name="TextBox 5"/>
+          <p:cNvPr id="4" name="TextBox 3"/>
           <p:cNvSpPr txBox="1"/>
           <p:nvPr/>
         </p:nvSpPr>
         <p:spPr>
           <a:xfrm>
-            <a:off x="731520" y="6419088"/>
-            <a:ext cx="10725912" cy="320040"/>
+            <a:off x="365760" y="45720"/>
+            <a:ext cx="11457432" cy="502920"/>
           </a:xfrm>
           <a:prstGeom prst="rect">
             <a:avLst/>
@@ -10672,23 +12436,260 @@
           </a:bodyPr>
           <a:lstStyle/>
           <a:p>
-            <a:pPr>
-              <a:defRPr sz="950">
-                <a:solidFill>
-                  <a:srgbClr val="64748B"/>
-                </a:solidFill>
-                <a:latin typeface="Calibri"/>
-              </a:defRPr>
-            </a:pPr>
-            <a:r>
-              <a:t>Video Activity Recognition with 3D CNN &amp; Grad-CAM  |  Dept of AI &amp; ML</a:t>
+            <a:pPr algn="ctr">
+              <a:defRPr sz="1700" b="1">
+                <a:solidFill>
+                  <a:srgbClr val="0F172A"/>
+                </a:solidFill>
+                <a:latin typeface="Calibri"/>
+              </a:defRPr>
+            </a:pPr>
+            <a:r>
+              <a:t>GURU NANAK DEV ENGINEERING COLLEGE, BIDAR</a:t>
+            </a:r>
+          </a:p>
+        </p:txBody>
+      </p:sp>
+      <p:sp>
+        <p:nvSpPr>
+          <p:cNvPr id="5" name="TextBox 4"/>
+          <p:cNvSpPr txBox="1"/>
+          <p:nvPr/>
+        </p:nvSpPr>
+        <p:spPr>
+          <a:xfrm>
+            <a:off x="365760" y="502920"/>
+            <a:ext cx="11457432" cy="384048"/>
+          </a:xfrm>
+          <a:prstGeom prst="rect">
+            <a:avLst/>
+          </a:prstGeom>
+          <a:noFill/>
+        </p:spPr>
+        <p:txBody>
+          <a:bodyPr wrap="none">
+            <a:spAutoFit/>
+          </a:bodyPr>
+          <a:lstStyle/>
+          <a:p>
+            <a:pPr algn="ctr">
+              <a:defRPr sz="1300" b="1">
+                <a:solidFill>
+                  <a:srgbClr val="2563EB"/>
+                </a:solidFill>
+                <a:latin typeface="Calibri"/>
+              </a:defRPr>
+            </a:pPr>
+            <a:r>
+              <a:t>DEPARTMENT OF AI &amp; ML</a:t>
+            </a:r>
+          </a:p>
+        </p:txBody>
+      </p:sp>
+      <p:sp>
+        <p:nvSpPr>
+          <p:cNvPr id="6" name="Rectangle 5"/>
+          <p:cNvSpPr/>
+          <p:nvPr/>
+        </p:nvSpPr>
+        <p:spPr>
+          <a:xfrm>
+            <a:off x="0" y="1143000"/>
+            <a:ext cx="12191695" cy="27432"/>
+          </a:xfrm>
+          <a:prstGeom prst="rect">
+            <a:avLst/>
+          </a:prstGeom>
+          <a:solidFill>
+            <a:srgbClr val="2563EB"/>
+          </a:solidFill>
+          <a:ln>
+            <a:noFill/>
+          </a:ln>
+        </p:spPr>
+        <p:style>
+          <a:lnRef idx="1">
+            <a:schemeClr val="accent1"/>
+          </a:lnRef>
+          <a:fillRef idx="3">
+            <a:schemeClr val="accent1"/>
+          </a:fillRef>
+          <a:effectRef idx="2">
+            <a:schemeClr val="accent1"/>
+          </a:effectRef>
+          <a:fontRef idx="minor">
+            <a:schemeClr val="lt1"/>
+          </a:fontRef>
+        </p:style>
+        <p:txBody>
+          <a:bodyPr rtlCol="0" anchor="ctr"/>
+          <a:lstStyle/>
+          <a:p>
+            <a:pPr algn="ctr"/>
+          </a:p>
+        </p:txBody>
+      </p:sp>
+      <p:sp>
+        <p:nvSpPr>
+          <p:cNvPr id="7" name="Rectangle 6"/>
+          <p:cNvSpPr/>
+          <p:nvPr/>
+        </p:nvSpPr>
+        <p:spPr>
+          <a:xfrm>
+            <a:off x="457200" y="1234440"/>
+            <a:ext cx="11274552" cy="475488"/>
+          </a:xfrm>
+          <a:prstGeom prst="rect">
+            <a:avLst/>
+          </a:prstGeom>
+          <a:solidFill>
+            <a:srgbClr val="0F172A"/>
+          </a:solidFill>
+          <a:ln>
+            <a:noFill/>
+          </a:ln>
+        </p:spPr>
+        <p:style>
+          <a:lnRef idx="1">
+            <a:schemeClr val="accent1"/>
+          </a:lnRef>
+          <a:fillRef idx="3">
+            <a:schemeClr val="accent1"/>
+          </a:fillRef>
+          <a:effectRef idx="2">
+            <a:schemeClr val="accent1"/>
+          </a:effectRef>
+          <a:fontRef idx="minor">
+            <a:schemeClr val="lt1"/>
+          </a:fontRef>
+        </p:style>
+        <p:txBody>
+          <a:bodyPr rtlCol="0" anchor="ctr"/>
+          <a:lstStyle/>
+          <a:p>
+            <a:pPr algn="ctr"/>
+          </a:p>
+        </p:txBody>
+      </p:sp>
+      <p:sp>
+        <p:nvSpPr>
+          <p:cNvPr id="8" name="TextBox 7"/>
+          <p:cNvSpPr txBox="1"/>
+          <p:nvPr/>
+        </p:nvSpPr>
+        <p:spPr>
+          <a:xfrm>
+            <a:off x="548640" y="1252728"/>
+            <a:ext cx="11091672" cy="420624"/>
+          </a:xfrm>
+          <a:prstGeom prst="rect">
+            <a:avLst/>
+          </a:prstGeom>
+          <a:noFill/>
+        </p:spPr>
+        <p:txBody>
+          <a:bodyPr wrap="none">
+            <a:spAutoFit/>
+          </a:bodyPr>
+          <a:lstStyle/>
+          <a:p>
+            <a:pPr algn="ctr">
+              <a:defRPr sz="1800" b="1">
+                <a:solidFill>
+                  <a:srgbClr val="FFFFFF"/>
+                </a:solidFill>
+                <a:latin typeface="Calibri"/>
+              </a:defRPr>
+            </a:pPr>
+            <a:r>
+              <a:t>Literature Survey: 3D Advances &amp; Attention (Papers 6–10)</a:t>
+            </a:r>
+          </a:p>
+        </p:txBody>
+      </p:sp>
+      <p:sp>
+        <p:nvSpPr>
+          <p:cNvPr id="9" name="Rectangle 8"/>
+          <p:cNvSpPr/>
+          <p:nvPr/>
+        </p:nvSpPr>
+        <p:spPr>
+          <a:xfrm>
+            <a:off x="0" y="6583680"/>
+            <a:ext cx="12191695" cy="274320"/>
+          </a:xfrm>
+          <a:prstGeom prst="rect">
+            <a:avLst/>
+          </a:prstGeom>
+          <a:solidFill>
+            <a:srgbClr val="0F172A"/>
+          </a:solidFill>
+          <a:ln>
+            <a:noFill/>
+          </a:ln>
+        </p:spPr>
+        <p:style>
+          <a:lnRef idx="1">
+            <a:schemeClr val="accent1"/>
+          </a:lnRef>
+          <a:fillRef idx="3">
+            <a:schemeClr val="accent1"/>
+          </a:fillRef>
+          <a:effectRef idx="2">
+            <a:schemeClr val="accent1"/>
+          </a:effectRef>
+          <a:fontRef idx="minor">
+            <a:schemeClr val="lt1"/>
+          </a:fontRef>
+        </p:style>
+        <p:txBody>
+          <a:bodyPr rtlCol="0" anchor="ctr"/>
+          <a:lstStyle/>
+          <a:p>
+            <a:pPr algn="ctr"/>
+          </a:p>
+        </p:txBody>
+      </p:sp>
+      <p:sp>
+        <p:nvSpPr>
+          <p:cNvPr id="10" name="TextBox 9"/>
+          <p:cNvSpPr txBox="1"/>
+          <p:nvPr/>
+        </p:nvSpPr>
+        <p:spPr>
+          <a:xfrm>
+            <a:off x="365760" y="6601968"/>
+            <a:ext cx="11457432" cy="256032"/>
+          </a:xfrm>
+          <a:prstGeom prst="rect">
+            <a:avLst/>
+          </a:prstGeom>
+          <a:noFill/>
+        </p:spPr>
+        <p:txBody>
+          <a:bodyPr wrap="none">
+            <a:spAutoFit/>
+          </a:bodyPr>
+          <a:lstStyle/>
+          <a:p>
+            <a:pPr algn="ctr">
+              <a:defRPr sz="900">
+                <a:solidFill>
+                  <a:srgbClr val="FFFFFF"/>
+                </a:solidFill>
+                <a:latin typeface="Calibri"/>
+              </a:defRPr>
+            </a:pPr>
+            <a:r>
+              <a:t>Video Activity Recognition with 3D CNN &amp; Grad-CAM  |  AIML GNDEC</a:t>
             </a:r>
           </a:p>
         </p:txBody>
       </p:sp>
       <p:graphicFrame>
         <p:nvGraphicFramePr>
-          <p:cNvPr id="7" name="Table 6"/>
+          <p:cNvPr id="11" name="Table 10"/>
           <p:cNvGraphicFramePr>
             <a:graphicFrameLocks noGrp="1"/>
           </p:cNvGraphicFramePr>
@@ -11322,97 +13323,23 @@
       <p:grpSpPr/>
       <p:sp>
         <p:nvSpPr>
-          <p:cNvPr id="2" name="TextBox 1"/>
-          <p:cNvSpPr txBox="1"/>
-          <p:nvPr/>
-        </p:nvSpPr>
-        <p:spPr>
-          <a:xfrm>
-            <a:off x="731520" y="320040"/>
-            <a:ext cx="10725912" cy="320040"/>
-          </a:xfrm>
-          <a:prstGeom prst="rect">
-            <a:avLst/>
-          </a:prstGeom>
-          <a:noFill/>
-        </p:spPr>
-        <p:txBody>
-          <a:bodyPr wrap="none">
-            <a:spAutoFit/>
-          </a:bodyPr>
-          <a:lstStyle/>
-          <a:p>
-            <a:pPr>
-              <a:defRPr sz="1000" b="1">
-                <a:solidFill>
-                  <a:srgbClr val="2563EB"/>
-                </a:solidFill>
-                <a:latin typeface="Calibri"/>
-              </a:defRPr>
-            </a:pPr>
-            <a:r>
-              <a:t>DEPARTMENT OF ARTIFICIAL INTELLIGENCE &amp; MACHINE LEARNING (AI &amp; ML)</a:t>
-            </a:r>
-          </a:p>
-        </p:txBody>
-      </p:sp>
-      <p:sp>
-        <p:nvSpPr>
-          <p:cNvPr id="3" name="TextBox 2"/>
-          <p:cNvSpPr txBox="1"/>
-          <p:nvPr/>
-        </p:nvSpPr>
-        <p:spPr>
-          <a:xfrm>
-            <a:off x="731520" y="594360"/>
-            <a:ext cx="10725912" cy="640080"/>
-          </a:xfrm>
-          <a:prstGeom prst="rect">
-            <a:avLst/>
-          </a:prstGeom>
-          <a:noFill/>
-        </p:spPr>
-        <p:txBody>
-          <a:bodyPr wrap="none">
-            <a:spAutoFit/>
-          </a:bodyPr>
-          <a:lstStyle/>
-          <a:p>
-            <a:pPr>
-              <a:defRPr sz="2200" b="1">
-                <a:solidFill>
-                  <a:srgbClr val="0F172A"/>
-                </a:solidFill>
-                <a:latin typeface="Calibri"/>
-              </a:defRPr>
-            </a:pPr>
-            <a:r>
-              <a:t>Literature Survey: Explainable AI &amp; Benchmarks (Papers 11–15)</a:t>
-            </a:r>
-          </a:p>
-        </p:txBody>
-      </p:sp>
-      <p:sp>
-        <p:nvSpPr>
-          <p:cNvPr id="4" name="Rectangle 3"/>
+          <p:cNvPr id="2" name="Rectangle 1"/>
           <p:cNvSpPr/>
           <p:nvPr/>
         </p:nvSpPr>
         <p:spPr>
           <a:xfrm>
-            <a:off x="731520" y="1234440"/>
-            <a:ext cx="10725912" cy="18288"/>
+            <a:off x="0" y="0"/>
+            <a:ext cx="12191695" cy="6858000"/>
           </a:xfrm>
           <a:prstGeom prst="rect">
             <a:avLst/>
           </a:prstGeom>
           <a:solidFill>
-            <a:srgbClr val="2563EB"/>
+            <a:srgbClr val="DCE8F8"/>
           </a:solidFill>
           <a:ln>
-            <a:solidFill>
-              <a:srgbClr val="2563EB"/>
-            </a:solidFill>
+            <a:noFill/>
           </a:ln>
         </p:spPr>
         <p:style>
@@ -11439,25 +13366,23 @@
       </p:sp>
       <p:sp>
         <p:nvSpPr>
-          <p:cNvPr id="5" name="Rectangle 4"/>
+          <p:cNvPr id="3" name="Rectangle 2"/>
           <p:cNvSpPr/>
           <p:nvPr/>
         </p:nvSpPr>
         <p:spPr>
           <a:xfrm>
-            <a:off x="731520" y="6400800"/>
-            <a:ext cx="10725912" cy="13716"/>
+            <a:off x="0" y="0"/>
+            <a:ext cx="12191695" cy="1143000"/>
           </a:xfrm>
           <a:prstGeom prst="rect">
             <a:avLst/>
           </a:prstGeom>
           <a:solidFill>
-            <a:srgbClr val="E2E8F0"/>
+            <a:srgbClr val="FFFFFF"/>
           </a:solidFill>
           <a:ln>
-            <a:solidFill>
-              <a:srgbClr val="E2E8F0"/>
-            </a:solidFill>
+            <a:noFill/>
           </a:ln>
         </p:spPr>
         <p:style>
@@ -11484,14 +13409,14 @@
       </p:sp>
       <p:sp>
         <p:nvSpPr>
-          <p:cNvPr id="6" name="TextBox 5"/>
+          <p:cNvPr id="4" name="TextBox 3"/>
           <p:cNvSpPr txBox="1"/>
           <p:nvPr/>
         </p:nvSpPr>
         <p:spPr>
           <a:xfrm>
-            <a:off x="731520" y="6419088"/>
-            <a:ext cx="10725912" cy="320040"/>
+            <a:off x="365760" y="45720"/>
+            <a:ext cx="11457432" cy="502920"/>
           </a:xfrm>
           <a:prstGeom prst="rect">
             <a:avLst/>
@@ -11504,23 +13429,260 @@
           </a:bodyPr>
           <a:lstStyle/>
           <a:p>
-            <a:pPr>
-              <a:defRPr sz="950">
-                <a:solidFill>
-                  <a:srgbClr val="64748B"/>
-                </a:solidFill>
-                <a:latin typeface="Calibri"/>
-              </a:defRPr>
-            </a:pPr>
-            <a:r>
-              <a:t>Video Activity Recognition with 3D CNN &amp; Grad-CAM  |  Dept of AI &amp; ML</a:t>
+            <a:pPr algn="ctr">
+              <a:defRPr sz="1700" b="1">
+                <a:solidFill>
+                  <a:srgbClr val="0F172A"/>
+                </a:solidFill>
+                <a:latin typeface="Calibri"/>
+              </a:defRPr>
+            </a:pPr>
+            <a:r>
+              <a:t>GURU NANAK DEV ENGINEERING COLLEGE, BIDAR</a:t>
+            </a:r>
+          </a:p>
+        </p:txBody>
+      </p:sp>
+      <p:sp>
+        <p:nvSpPr>
+          <p:cNvPr id="5" name="TextBox 4"/>
+          <p:cNvSpPr txBox="1"/>
+          <p:nvPr/>
+        </p:nvSpPr>
+        <p:spPr>
+          <a:xfrm>
+            <a:off x="365760" y="502920"/>
+            <a:ext cx="11457432" cy="384048"/>
+          </a:xfrm>
+          <a:prstGeom prst="rect">
+            <a:avLst/>
+          </a:prstGeom>
+          <a:noFill/>
+        </p:spPr>
+        <p:txBody>
+          <a:bodyPr wrap="none">
+            <a:spAutoFit/>
+          </a:bodyPr>
+          <a:lstStyle/>
+          <a:p>
+            <a:pPr algn="ctr">
+              <a:defRPr sz="1300" b="1">
+                <a:solidFill>
+                  <a:srgbClr val="2563EB"/>
+                </a:solidFill>
+                <a:latin typeface="Calibri"/>
+              </a:defRPr>
+            </a:pPr>
+            <a:r>
+              <a:t>DEPARTMENT OF AI &amp; ML</a:t>
+            </a:r>
+          </a:p>
+        </p:txBody>
+      </p:sp>
+      <p:sp>
+        <p:nvSpPr>
+          <p:cNvPr id="6" name="Rectangle 5"/>
+          <p:cNvSpPr/>
+          <p:nvPr/>
+        </p:nvSpPr>
+        <p:spPr>
+          <a:xfrm>
+            <a:off x="0" y="1143000"/>
+            <a:ext cx="12191695" cy="27432"/>
+          </a:xfrm>
+          <a:prstGeom prst="rect">
+            <a:avLst/>
+          </a:prstGeom>
+          <a:solidFill>
+            <a:srgbClr val="2563EB"/>
+          </a:solidFill>
+          <a:ln>
+            <a:noFill/>
+          </a:ln>
+        </p:spPr>
+        <p:style>
+          <a:lnRef idx="1">
+            <a:schemeClr val="accent1"/>
+          </a:lnRef>
+          <a:fillRef idx="3">
+            <a:schemeClr val="accent1"/>
+          </a:fillRef>
+          <a:effectRef idx="2">
+            <a:schemeClr val="accent1"/>
+          </a:effectRef>
+          <a:fontRef idx="minor">
+            <a:schemeClr val="lt1"/>
+          </a:fontRef>
+        </p:style>
+        <p:txBody>
+          <a:bodyPr rtlCol="0" anchor="ctr"/>
+          <a:lstStyle/>
+          <a:p>
+            <a:pPr algn="ctr"/>
+          </a:p>
+        </p:txBody>
+      </p:sp>
+      <p:sp>
+        <p:nvSpPr>
+          <p:cNvPr id="7" name="Rectangle 6"/>
+          <p:cNvSpPr/>
+          <p:nvPr/>
+        </p:nvSpPr>
+        <p:spPr>
+          <a:xfrm>
+            <a:off x="457200" y="1234440"/>
+            <a:ext cx="11274552" cy="475488"/>
+          </a:xfrm>
+          <a:prstGeom prst="rect">
+            <a:avLst/>
+          </a:prstGeom>
+          <a:solidFill>
+            <a:srgbClr val="0F172A"/>
+          </a:solidFill>
+          <a:ln>
+            <a:noFill/>
+          </a:ln>
+        </p:spPr>
+        <p:style>
+          <a:lnRef idx="1">
+            <a:schemeClr val="accent1"/>
+          </a:lnRef>
+          <a:fillRef idx="3">
+            <a:schemeClr val="accent1"/>
+          </a:fillRef>
+          <a:effectRef idx="2">
+            <a:schemeClr val="accent1"/>
+          </a:effectRef>
+          <a:fontRef idx="minor">
+            <a:schemeClr val="lt1"/>
+          </a:fontRef>
+        </p:style>
+        <p:txBody>
+          <a:bodyPr rtlCol="0" anchor="ctr"/>
+          <a:lstStyle/>
+          <a:p>
+            <a:pPr algn="ctr"/>
+          </a:p>
+        </p:txBody>
+      </p:sp>
+      <p:sp>
+        <p:nvSpPr>
+          <p:cNvPr id="8" name="TextBox 7"/>
+          <p:cNvSpPr txBox="1"/>
+          <p:nvPr/>
+        </p:nvSpPr>
+        <p:spPr>
+          <a:xfrm>
+            <a:off x="548640" y="1252728"/>
+            <a:ext cx="11091672" cy="420624"/>
+          </a:xfrm>
+          <a:prstGeom prst="rect">
+            <a:avLst/>
+          </a:prstGeom>
+          <a:noFill/>
+        </p:spPr>
+        <p:txBody>
+          <a:bodyPr wrap="none">
+            <a:spAutoFit/>
+          </a:bodyPr>
+          <a:lstStyle/>
+          <a:p>
+            <a:pPr algn="ctr">
+              <a:defRPr sz="1800" b="1">
+                <a:solidFill>
+                  <a:srgbClr val="FFFFFF"/>
+                </a:solidFill>
+                <a:latin typeface="Calibri"/>
+              </a:defRPr>
+            </a:pPr>
+            <a:r>
+              <a:t>Literature Survey: Explainable AI &amp; Benchmarks (Papers 11–15)</a:t>
+            </a:r>
+          </a:p>
+        </p:txBody>
+      </p:sp>
+      <p:sp>
+        <p:nvSpPr>
+          <p:cNvPr id="9" name="Rectangle 8"/>
+          <p:cNvSpPr/>
+          <p:nvPr/>
+        </p:nvSpPr>
+        <p:spPr>
+          <a:xfrm>
+            <a:off x="0" y="6583680"/>
+            <a:ext cx="12191695" cy="274320"/>
+          </a:xfrm>
+          <a:prstGeom prst="rect">
+            <a:avLst/>
+          </a:prstGeom>
+          <a:solidFill>
+            <a:srgbClr val="0F172A"/>
+          </a:solidFill>
+          <a:ln>
+            <a:noFill/>
+          </a:ln>
+        </p:spPr>
+        <p:style>
+          <a:lnRef idx="1">
+            <a:schemeClr val="accent1"/>
+          </a:lnRef>
+          <a:fillRef idx="3">
+            <a:schemeClr val="accent1"/>
+          </a:fillRef>
+          <a:effectRef idx="2">
+            <a:schemeClr val="accent1"/>
+          </a:effectRef>
+          <a:fontRef idx="minor">
+            <a:schemeClr val="lt1"/>
+          </a:fontRef>
+        </p:style>
+        <p:txBody>
+          <a:bodyPr rtlCol="0" anchor="ctr"/>
+          <a:lstStyle/>
+          <a:p>
+            <a:pPr algn="ctr"/>
+          </a:p>
+        </p:txBody>
+      </p:sp>
+      <p:sp>
+        <p:nvSpPr>
+          <p:cNvPr id="10" name="TextBox 9"/>
+          <p:cNvSpPr txBox="1"/>
+          <p:nvPr/>
+        </p:nvSpPr>
+        <p:spPr>
+          <a:xfrm>
+            <a:off x="365760" y="6601968"/>
+            <a:ext cx="11457432" cy="256032"/>
+          </a:xfrm>
+          <a:prstGeom prst="rect">
+            <a:avLst/>
+          </a:prstGeom>
+          <a:noFill/>
+        </p:spPr>
+        <p:txBody>
+          <a:bodyPr wrap="none">
+            <a:spAutoFit/>
+          </a:bodyPr>
+          <a:lstStyle/>
+          <a:p>
+            <a:pPr algn="ctr">
+              <a:defRPr sz="900">
+                <a:solidFill>
+                  <a:srgbClr val="FFFFFF"/>
+                </a:solidFill>
+                <a:latin typeface="Calibri"/>
+              </a:defRPr>
+            </a:pPr>
+            <a:r>
+              <a:t>Video Activity Recognition with 3D CNN &amp; Grad-CAM  |  AIML GNDEC</a:t>
             </a:r>
           </a:p>
         </p:txBody>
       </p:sp>
       <p:graphicFrame>
         <p:nvGraphicFramePr>
-          <p:cNvPr id="7" name="Table 6"/>
+          <p:cNvPr id="11" name="Table 10"/>
           <p:cNvGraphicFramePr>
             <a:graphicFrameLocks noGrp="1"/>
           </p:cNvGraphicFramePr>
@@ -12154,97 +14316,23 @@
       <p:grpSpPr/>
       <p:sp>
         <p:nvSpPr>
-          <p:cNvPr id="2" name="TextBox 1"/>
-          <p:cNvSpPr txBox="1"/>
-          <p:nvPr/>
-        </p:nvSpPr>
-        <p:spPr>
-          <a:xfrm>
-            <a:off x="731520" y="320040"/>
-            <a:ext cx="10725912" cy="320040"/>
-          </a:xfrm>
-          <a:prstGeom prst="rect">
-            <a:avLst/>
-          </a:prstGeom>
-          <a:noFill/>
-        </p:spPr>
-        <p:txBody>
-          <a:bodyPr wrap="none">
-            <a:spAutoFit/>
-          </a:bodyPr>
-          <a:lstStyle/>
-          <a:p>
-            <a:pPr>
-              <a:defRPr sz="1000" b="1">
-                <a:solidFill>
-                  <a:srgbClr val="2563EB"/>
-                </a:solidFill>
-                <a:latin typeface="Calibri"/>
-              </a:defRPr>
-            </a:pPr>
-            <a:r>
-              <a:t>DEPARTMENT OF ARTIFICIAL INTELLIGENCE &amp; MACHINE LEARNING (AI &amp; ML)</a:t>
-            </a:r>
-          </a:p>
-        </p:txBody>
-      </p:sp>
-      <p:sp>
-        <p:nvSpPr>
-          <p:cNvPr id="3" name="TextBox 2"/>
-          <p:cNvSpPr txBox="1"/>
-          <p:nvPr/>
-        </p:nvSpPr>
-        <p:spPr>
-          <a:xfrm>
-            <a:off x="731520" y="594360"/>
-            <a:ext cx="10725912" cy="640080"/>
-          </a:xfrm>
-          <a:prstGeom prst="rect">
-            <a:avLst/>
-          </a:prstGeom>
-          <a:noFill/>
-        </p:spPr>
-        <p:txBody>
-          <a:bodyPr wrap="none">
-            <a:spAutoFit/>
-          </a:bodyPr>
-          <a:lstStyle/>
-          <a:p>
-            <a:pPr>
-              <a:defRPr sz="2200" b="1">
-                <a:solidFill>
-                  <a:srgbClr val="0F172A"/>
-                </a:solidFill>
-                <a:latin typeface="Calibri"/>
-              </a:defRPr>
-            </a:pPr>
-            <a:r>
-              <a:t>Synthesis of Literature Survey &amp; Research Gaps</a:t>
-            </a:r>
-          </a:p>
-        </p:txBody>
-      </p:sp>
-      <p:sp>
-        <p:nvSpPr>
-          <p:cNvPr id="4" name="Rectangle 3"/>
+          <p:cNvPr id="2" name="Rectangle 1"/>
           <p:cNvSpPr/>
           <p:nvPr/>
         </p:nvSpPr>
         <p:spPr>
           <a:xfrm>
-            <a:off x="731520" y="1234440"/>
-            <a:ext cx="10725912" cy="18288"/>
+            <a:off x="0" y="0"/>
+            <a:ext cx="12191695" cy="6858000"/>
           </a:xfrm>
           <a:prstGeom prst="rect">
             <a:avLst/>
           </a:prstGeom>
           <a:solidFill>
-            <a:srgbClr val="2563EB"/>
+            <a:srgbClr val="DCE8F8"/>
           </a:solidFill>
           <a:ln>
-            <a:solidFill>
-              <a:srgbClr val="2563EB"/>
-            </a:solidFill>
+            <a:noFill/>
           </a:ln>
         </p:spPr>
         <p:style>
@@ -12271,25 +14359,23 @@
       </p:sp>
       <p:sp>
         <p:nvSpPr>
-          <p:cNvPr id="5" name="Rectangle 4"/>
+          <p:cNvPr id="3" name="Rectangle 2"/>
           <p:cNvSpPr/>
           <p:nvPr/>
         </p:nvSpPr>
         <p:spPr>
           <a:xfrm>
-            <a:off x="731520" y="6400800"/>
-            <a:ext cx="10725912" cy="13716"/>
+            <a:off x="0" y="0"/>
+            <a:ext cx="12191695" cy="1143000"/>
           </a:xfrm>
           <a:prstGeom prst="rect">
             <a:avLst/>
           </a:prstGeom>
           <a:solidFill>
-            <a:srgbClr val="E2E8F0"/>
+            <a:srgbClr val="FFFFFF"/>
           </a:solidFill>
           <a:ln>
-            <a:solidFill>
-              <a:srgbClr val="E2E8F0"/>
-            </a:solidFill>
+            <a:noFill/>
           </a:ln>
         </p:spPr>
         <p:style>
@@ -12316,14 +14402,14 @@
       </p:sp>
       <p:sp>
         <p:nvSpPr>
-          <p:cNvPr id="6" name="TextBox 5"/>
+          <p:cNvPr id="4" name="TextBox 3"/>
           <p:cNvSpPr txBox="1"/>
           <p:nvPr/>
         </p:nvSpPr>
         <p:spPr>
           <a:xfrm>
-            <a:off x="731520" y="6419088"/>
-            <a:ext cx="10725912" cy="320040"/>
+            <a:off x="365760" y="45720"/>
+            <a:ext cx="11457432" cy="502920"/>
           </a:xfrm>
           <a:prstGeom prst="rect">
             <a:avLst/>
@@ -12336,23 +14422,260 @@
           </a:bodyPr>
           <a:lstStyle/>
           <a:p>
-            <a:pPr>
-              <a:defRPr sz="950">
-                <a:solidFill>
-                  <a:srgbClr val="64748B"/>
-                </a:solidFill>
-                <a:latin typeface="Calibri"/>
-              </a:defRPr>
-            </a:pPr>
-            <a:r>
-              <a:t>Video Activity Recognition with 3D CNN &amp; Grad-CAM  |  Dept of AI &amp; ML</a:t>
-            </a:r>
-          </a:p>
-        </p:txBody>
-      </p:sp>
-      <p:sp>
-        <p:nvSpPr>
-          <p:cNvPr id="7" name="Rounded Rectangle 6"/>
+            <a:pPr algn="ctr">
+              <a:defRPr sz="1700" b="1">
+                <a:solidFill>
+                  <a:srgbClr val="0F172A"/>
+                </a:solidFill>
+                <a:latin typeface="Calibri"/>
+              </a:defRPr>
+            </a:pPr>
+            <a:r>
+              <a:t>GURU NANAK DEV ENGINEERING COLLEGE, BIDAR</a:t>
+            </a:r>
+          </a:p>
+        </p:txBody>
+      </p:sp>
+      <p:sp>
+        <p:nvSpPr>
+          <p:cNvPr id="5" name="TextBox 4"/>
+          <p:cNvSpPr txBox="1"/>
+          <p:nvPr/>
+        </p:nvSpPr>
+        <p:spPr>
+          <a:xfrm>
+            <a:off x="365760" y="502920"/>
+            <a:ext cx="11457432" cy="384048"/>
+          </a:xfrm>
+          <a:prstGeom prst="rect">
+            <a:avLst/>
+          </a:prstGeom>
+          <a:noFill/>
+        </p:spPr>
+        <p:txBody>
+          <a:bodyPr wrap="none">
+            <a:spAutoFit/>
+          </a:bodyPr>
+          <a:lstStyle/>
+          <a:p>
+            <a:pPr algn="ctr">
+              <a:defRPr sz="1300" b="1">
+                <a:solidFill>
+                  <a:srgbClr val="2563EB"/>
+                </a:solidFill>
+                <a:latin typeface="Calibri"/>
+              </a:defRPr>
+            </a:pPr>
+            <a:r>
+              <a:t>DEPARTMENT OF AI &amp; ML</a:t>
+            </a:r>
+          </a:p>
+        </p:txBody>
+      </p:sp>
+      <p:sp>
+        <p:nvSpPr>
+          <p:cNvPr id="6" name="Rectangle 5"/>
+          <p:cNvSpPr/>
+          <p:nvPr/>
+        </p:nvSpPr>
+        <p:spPr>
+          <a:xfrm>
+            <a:off x="0" y="1143000"/>
+            <a:ext cx="12191695" cy="27432"/>
+          </a:xfrm>
+          <a:prstGeom prst="rect">
+            <a:avLst/>
+          </a:prstGeom>
+          <a:solidFill>
+            <a:srgbClr val="2563EB"/>
+          </a:solidFill>
+          <a:ln>
+            <a:noFill/>
+          </a:ln>
+        </p:spPr>
+        <p:style>
+          <a:lnRef idx="1">
+            <a:schemeClr val="accent1"/>
+          </a:lnRef>
+          <a:fillRef idx="3">
+            <a:schemeClr val="accent1"/>
+          </a:fillRef>
+          <a:effectRef idx="2">
+            <a:schemeClr val="accent1"/>
+          </a:effectRef>
+          <a:fontRef idx="minor">
+            <a:schemeClr val="lt1"/>
+          </a:fontRef>
+        </p:style>
+        <p:txBody>
+          <a:bodyPr rtlCol="0" anchor="ctr"/>
+          <a:lstStyle/>
+          <a:p>
+            <a:pPr algn="ctr"/>
+          </a:p>
+        </p:txBody>
+      </p:sp>
+      <p:sp>
+        <p:nvSpPr>
+          <p:cNvPr id="7" name="Rectangle 6"/>
+          <p:cNvSpPr/>
+          <p:nvPr/>
+        </p:nvSpPr>
+        <p:spPr>
+          <a:xfrm>
+            <a:off x="457200" y="1234440"/>
+            <a:ext cx="11274552" cy="475488"/>
+          </a:xfrm>
+          <a:prstGeom prst="rect">
+            <a:avLst/>
+          </a:prstGeom>
+          <a:solidFill>
+            <a:srgbClr val="0F172A"/>
+          </a:solidFill>
+          <a:ln>
+            <a:noFill/>
+          </a:ln>
+        </p:spPr>
+        <p:style>
+          <a:lnRef idx="1">
+            <a:schemeClr val="accent1"/>
+          </a:lnRef>
+          <a:fillRef idx="3">
+            <a:schemeClr val="accent1"/>
+          </a:fillRef>
+          <a:effectRef idx="2">
+            <a:schemeClr val="accent1"/>
+          </a:effectRef>
+          <a:fontRef idx="minor">
+            <a:schemeClr val="lt1"/>
+          </a:fontRef>
+        </p:style>
+        <p:txBody>
+          <a:bodyPr rtlCol="0" anchor="ctr"/>
+          <a:lstStyle/>
+          <a:p>
+            <a:pPr algn="ctr"/>
+          </a:p>
+        </p:txBody>
+      </p:sp>
+      <p:sp>
+        <p:nvSpPr>
+          <p:cNvPr id="8" name="TextBox 7"/>
+          <p:cNvSpPr txBox="1"/>
+          <p:nvPr/>
+        </p:nvSpPr>
+        <p:spPr>
+          <a:xfrm>
+            <a:off x="548640" y="1252728"/>
+            <a:ext cx="11091672" cy="420624"/>
+          </a:xfrm>
+          <a:prstGeom prst="rect">
+            <a:avLst/>
+          </a:prstGeom>
+          <a:noFill/>
+        </p:spPr>
+        <p:txBody>
+          <a:bodyPr wrap="none">
+            <a:spAutoFit/>
+          </a:bodyPr>
+          <a:lstStyle/>
+          <a:p>
+            <a:pPr algn="ctr">
+              <a:defRPr sz="1800" b="1">
+                <a:solidFill>
+                  <a:srgbClr val="FFFFFF"/>
+                </a:solidFill>
+                <a:latin typeface="Calibri"/>
+              </a:defRPr>
+            </a:pPr>
+            <a:r>
+              <a:t>Synthesis of Literature Survey &amp; Research Gaps</a:t>
+            </a:r>
+          </a:p>
+        </p:txBody>
+      </p:sp>
+      <p:sp>
+        <p:nvSpPr>
+          <p:cNvPr id="9" name="Rectangle 8"/>
+          <p:cNvSpPr/>
+          <p:nvPr/>
+        </p:nvSpPr>
+        <p:spPr>
+          <a:xfrm>
+            <a:off x="0" y="6583680"/>
+            <a:ext cx="12191695" cy="274320"/>
+          </a:xfrm>
+          <a:prstGeom prst="rect">
+            <a:avLst/>
+          </a:prstGeom>
+          <a:solidFill>
+            <a:srgbClr val="0F172A"/>
+          </a:solidFill>
+          <a:ln>
+            <a:noFill/>
+          </a:ln>
+        </p:spPr>
+        <p:style>
+          <a:lnRef idx="1">
+            <a:schemeClr val="accent1"/>
+          </a:lnRef>
+          <a:fillRef idx="3">
+            <a:schemeClr val="accent1"/>
+          </a:fillRef>
+          <a:effectRef idx="2">
+            <a:schemeClr val="accent1"/>
+          </a:effectRef>
+          <a:fontRef idx="minor">
+            <a:schemeClr val="lt1"/>
+          </a:fontRef>
+        </p:style>
+        <p:txBody>
+          <a:bodyPr rtlCol="0" anchor="ctr"/>
+          <a:lstStyle/>
+          <a:p>
+            <a:pPr algn="ctr"/>
+          </a:p>
+        </p:txBody>
+      </p:sp>
+      <p:sp>
+        <p:nvSpPr>
+          <p:cNvPr id="10" name="TextBox 9"/>
+          <p:cNvSpPr txBox="1"/>
+          <p:nvPr/>
+        </p:nvSpPr>
+        <p:spPr>
+          <a:xfrm>
+            <a:off x="365760" y="6601968"/>
+            <a:ext cx="11457432" cy="256032"/>
+          </a:xfrm>
+          <a:prstGeom prst="rect">
+            <a:avLst/>
+          </a:prstGeom>
+          <a:noFill/>
+        </p:spPr>
+        <p:txBody>
+          <a:bodyPr wrap="none">
+            <a:spAutoFit/>
+          </a:bodyPr>
+          <a:lstStyle/>
+          <a:p>
+            <a:pPr algn="ctr">
+              <a:defRPr sz="900">
+                <a:solidFill>
+                  <a:srgbClr val="FFFFFF"/>
+                </a:solidFill>
+                <a:latin typeface="Calibri"/>
+              </a:defRPr>
+            </a:pPr>
+            <a:r>
+              <a:t>Video Activity Recognition with 3D CNN &amp; Grad-CAM  |  AIML GNDEC</a:t>
+            </a:r>
+          </a:p>
+        </p:txBody>
+      </p:sp>
+      <p:sp>
+        <p:nvSpPr>
+          <p:cNvPr id="11" name="Rounded Rectangle 10"/>
           <p:cNvSpPr/>
           <p:nvPr/>
         </p:nvSpPr>
@@ -12397,7 +14720,7 @@
       </p:sp>
       <p:sp>
         <p:nvSpPr>
-          <p:cNvPr id="8" name="TextBox 7"/>
+          <p:cNvPr id="12" name="TextBox 11"/>
           <p:cNvSpPr txBox="1"/>
           <p:nvPr/>
         </p:nvSpPr>
@@ -12449,7 +14772,7 @@
       </p:sp>
       <p:sp>
         <p:nvSpPr>
-          <p:cNvPr id="9" name="Rounded Rectangle 8"/>
+          <p:cNvPr id="13" name="Rounded Rectangle 12"/>
           <p:cNvSpPr/>
           <p:nvPr/>
         </p:nvSpPr>
@@ -12494,7 +14817,7 @@
       </p:sp>
       <p:sp>
         <p:nvSpPr>
-          <p:cNvPr id="10" name="TextBox 9"/>
+          <p:cNvPr id="14" name="TextBox 13"/>
           <p:cNvSpPr txBox="1"/>
           <p:nvPr/>
         </p:nvSpPr>
@@ -12546,7 +14869,7 @@
       </p:sp>
       <p:sp>
         <p:nvSpPr>
-          <p:cNvPr id="11" name="Rounded Rectangle 10"/>
+          <p:cNvPr id="15" name="Rounded Rectangle 14"/>
           <p:cNvSpPr/>
           <p:nvPr/>
         </p:nvSpPr>
@@ -12591,7 +14914,7 @@
       </p:sp>
       <p:sp>
         <p:nvSpPr>
-          <p:cNvPr id="12" name="TextBox 11"/>
+          <p:cNvPr id="16" name="TextBox 15"/>
           <p:cNvSpPr txBox="1"/>
           <p:nvPr/>
         </p:nvSpPr>
@@ -12643,7 +14966,7 @@
       </p:sp>
       <p:sp>
         <p:nvSpPr>
-          <p:cNvPr id="13" name="Rounded Rectangle 12"/>
+          <p:cNvPr id="17" name="Rounded Rectangle 16"/>
           <p:cNvSpPr/>
           <p:nvPr/>
         </p:nvSpPr>
@@ -12688,7 +15011,7 @@
       </p:sp>
       <p:sp>
         <p:nvSpPr>
-          <p:cNvPr id="14" name="TextBox 13"/>
+          <p:cNvPr id="18" name="TextBox 17"/>
           <p:cNvSpPr txBox="1"/>
           <p:nvPr/>
         </p:nvSpPr>
@@ -12740,7 +15063,7 @@
       </p:sp>
       <p:sp>
         <p:nvSpPr>
-          <p:cNvPr id="15" name="Rounded Rectangle 14"/>
+          <p:cNvPr id="19" name="Rounded Rectangle 18"/>
           <p:cNvSpPr/>
           <p:nvPr/>
         </p:nvSpPr>
@@ -12785,7 +15108,7 @@
       </p:sp>
       <p:sp>
         <p:nvSpPr>
-          <p:cNvPr id="16" name="TextBox 15"/>
+          <p:cNvPr id="20" name="TextBox 19"/>
           <p:cNvSpPr txBox="1"/>
           <p:nvPr/>
         </p:nvSpPr>
@@ -12839,14 +15162,100 @@
       <p:grpSpPr/>
       <p:sp>
         <p:nvSpPr>
-          <p:cNvPr id="2" name="TextBox 1"/>
+          <p:cNvPr id="2" name="Rectangle 1"/>
+          <p:cNvSpPr/>
+          <p:nvPr/>
+        </p:nvSpPr>
+        <p:spPr>
+          <a:xfrm>
+            <a:off x="0" y="0"/>
+            <a:ext cx="12191695" cy="6858000"/>
+          </a:xfrm>
+          <a:prstGeom prst="rect">
+            <a:avLst/>
+          </a:prstGeom>
+          <a:solidFill>
+            <a:srgbClr val="DCE8F8"/>
+          </a:solidFill>
+          <a:ln>
+            <a:noFill/>
+          </a:ln>
+        </p:spPr>
+        <p:style>
+          <a:lnRef idx="1">
+            <a:schemeClr val="accent1"/>
+          </a:lnRef>
+          <a:fillRef idx="3">
+            <a:schemeClr val="accent1"/>
+          </a:fillRef>
+          <a:effectRef idx="2">
+            <a:schemeClr val="accent1"/>
+          </a:effectRef>
+          <a:fontRef idx="minor">
+            <a:schemeClr val="lt1"/>
+          </a:fontRef>
+        </p:style>
+        <p:txBody>
+          <a:bodyPr rtlCol="0" anchor="ctr"/>
+          <a:lstStyle/>
+          <a:p>
+            <a:pPr algn="ctr"/>
+          </a:p>
+        </p:txBody>
+      </p:sp>
+      <p:sp>
+        <p:nvSpPr>
+          <p:cNvPr id="3" name="Rectangle 2"/>
+          <p:cNvSpPr/>
+          <p:nvPr/>
+        </p:nvSpPr>
+        <p:spPr>
+          <a:xfrm>
+            <a:off x="0" y="0"/>
+            <a:ext cx="12191695" cy="1143000"/>
+          </a:xfrm>
+          <a:prstGeom prst="rect">
+            <a:avLst/>
+          </a:prstGeom>
+          <a:solidFill>
+            <a:srgbClr val="FFFFFF"/>
+          </a:solidFill>
+          <a:ln>
+            <a:noFill/>
+          </a:ln>
+        </p:spPr>
+        <p:style>
+          <a:lnRef idx="1">
+            <a:schemeClr val="accent1"/>
+          </a:lnRef>
+          <a:fillRef idx="3">
+            <a:schemeClr val="accent1"/>
+          </a:fillRef>
+          <a:effectRef idx="2">
+            <a:schemeClr val="accent1"/>
+          </a:effectRef>
+          <a:fontRef idx="minor">
+            <a:schemeClr val="lt1"/>
+          </a:fontRef>
+        </p:style>
+        <p:txBody>
+          <a:bodyPr rtlCol="0" anchor="ctr"/>
+          <a:lstStyle/>
+          <a:p>
+            <a:pPr algn="ctr"/>
+          </a:p>
+        </p:txBody>
+      </p:sp>
+      <p:sp>
+        <p:nvSpPr>
+          <p:cNvPr id="4" name="TextBox 3"/>
           <p:cNvSpPr txBox="1"/>
           <p:nvPr/>
         </p:nvSpPr>
         <p:spPr>
           <a:xfrm>
-            <a:off x="731520" y="320040"/>
-            <a:ext cx="10725912" cy="320040"/>
+            <a:off x="365760" y="45720"/>
+            <a:ext cx="11457432" cy="502920"/>
           </a:xfrm>
           <a:prstGeom prst="rect">
             <a:avLst/>
@@ -12859,30 +15268,30 @@
           </a:bodyPr>
           <a:lstStyle/>
           <a:p>
-            <a:pPr>
-              <a:defRPr sz="1000" b="1">
-                <a:solidFill>
-                  <a:srgbClr val="2563EB"/>
-                </a:solidFill>
-                <a:latin typeface="Calibri"/>
-              </a:defRPr>
-            </a:pPr>
-            <a:r>
-              <a:t>DEPARTMENT OF ARTIFICIAL INTELLIGENCE &amp; MACHINE LEARNING (AI &amp; ML)</a:t>
-            </a:r>
-          </a:p>
-        </p:txBody>
-      </p:sp>
-      <p:sp>
-        <p:nvSpPr>
-          <p:cNvPr id="3" name="TextBox 2"/>
+            <a:pPr algn="ctr">
+              <a:defRPr sz="1700" b="1">
+                <a:solidFill>
+                  <a:srgbClr val="0F172A"/>
+                </a:solidFill>
+                <a:latin typeface="Calibri"/>
+              </a:defRPr>
+            </a:pPr>
+            <a:r>
+              <a:t>GURU NANAK DEV ENGINEERING COLLEGE, BIDAR</a:t>
+            </a:r>
+          </a:p>
+        </p:txBody>
+      </p:sp>
+      <p:sp>
+        <p:nvSpPr>
+          <p:cNvPr id="5" name="TextBox 4"/>
           <p:cNvSpPr txBox="1"/>
           <p:nvPr/>
         </p:nvSpPr>
         <p:spPr>
           <a:xfrm>
-            <a:off x="731520" y="594360"/>
-            <a:ext cx="10725912" cy="640080"/>
+            <a:off x="365760" y="502920"/>
+            <a:ext cx="11457432" cy="384048"/>
           </a:xfrm>
           <a:prstGeom prst="rect">
             <a:avLst/>
@@ -12895,10 +15304,132 @@
           </a:bodyPr>
           <a:lstStyle/>
           <a:p>
-            <a:pPr>
-              <a:defRPr sz="2200" b="1">
-                <a:solidFill>
-                  <a:srgbClr val="0F172A"/>
+            <a:pPr algn="ctr">
+              <a:defRPr sz="1300" b="1">
+                <a:solidFill>
+                  <a:srgbClr val="2563EB"/>
+                </a:solidFill>
+                <a:latin typeface="Calibri"/>
+              </a:defRPr>
+            </a:pPr>
+            <a:r>
+              <a:t>DEPARTMENT OF AI &amp; ML</a:t>
+            </a:r>
+          </a:p>
+        </p:txBody>
+      </p:sp>
+      <p:sp>
+        <p:nvSpPr>
+          <p:cNvPr id="6" name="Rectangle 5"/>
+          <p:cNvSpPr/>
+          <p:nvPr/>
+        </p:nvSpPr>
+        <p:spPr>
+          <a:xfrm>
+            <a:off x="0" y="1143000"/>
+            <a:ext cx="12191695" cy="27432"/>
+          </a:xfrm>
+          <a:prstGeom prst="rect">
+            <a:avLst/>
+          </a:prstGeom>
+          <a:solidFill>
+            <a:srgbClr val="2563EB"/>
+          </a:solidFill>
+          <a:ln>
+            <a:noFill/>
+          </a:ln>
+        </p:spPr>
+        <p:style>
+          <a:lnRef idx="1">
+            <a:schemeClr val="accent1"/>
+          </a:lnRef>
+          <a:fillRef idx="3">
+            <a:schemeClr val="accent1"/>
+          </a:fillRef>
+          <a:effectRef idx="2">
+            <a:schemeClr val="accent1"/>
+          </a:effectRef>
+          <a:fontRef idx="minor">
+            <a:schemeClr val="lt1"/>
+          </a:fontRef>
+        </p:style>
+        <p:txBody>
+          <a:bodyPr rtlCol="0" anchor="ctr"/>
+          <a:lstStyle/>
+          <a:p>
+            <a:pPr algn="ctr"/>
+          </a:p>
+        </p:txBody>
+      </p:sp>
+      <p:sp>
+        <p:nvSpPr>
+          <p:cNvPr id="7" name="Rectangle 6"/>
+          <p:cNvSpPr/>
+          <p:nvPr/>
+        </p:nvSpPr>
+        <p:spPr>
+          <a:xfrm>
+            <a:off x="457200" y="1234440"/>
+            <a:ext cx="11274552" cy="475488"/>
+          </a:xfrm>
+          <a:prstGeom prst="rect">
+            <a:avLst/>
+          </a:prstGeom>
+          <a:solidFill>
+            <a:srgbClr val="0F172A"/>
+          </a:solidFill>
+          <a:ln>
+            <a:noFill/>
+          </a:ln>
+        </p:spPr>
+        <p:style>
+          <a:lnRef idx="1">
+            <a:schemeClr val="accent1"/>
+          </a:lnRef>
+          <a:fillRef idx="3">
+            <a:schemeClr val="accent1"/>
+          </a:fillRef>
+          <a:effectRef idx="2">
+            <a:schemeClr val="accent1"/>
+          </a:effectRef>
+          <a:fontRef idx="minor">
+            <a:schemeClr val="lt1"/>
+          </a:fontRef>
+        </p:style>
+        <p:txBody>
+          <a:bodyPr rtlCol="0" anchor="ctr"/>
+          <a:lstStyle/>
+          <a:p>
+            <a:pPr algn="ctr"/>
+          </a:p>
+        </p:txBody>
+      </p:sp>
+      <p:sp>
+        <p:nvSpPr>
+          <p:cNvPr id="8" name="TextBox 7"/>
+          <p:cNvSpPr txBox="1"/>
+          <p:nvPr/>
+        </p:nvSpPr>
+        <p:spPr>
+          <a:xfrm>
+            <a:off x="548640" y="1252728"/>
+            <a:ext cx="11091672" cy="420624"/>
+          </a:xfrm>
+          <a:prstGeom prst="rect">
+            <a:avLst/>
+          </a:prstGeom>
+          <a:noFill/>
+        </p:spPr>
+        <p:txBody>
+          <a:bodyPr wrap="none">
+            <a:spAutoFit/>
+          </a:bodyPr>
+          <a:lstStyle/>
+          <a:p>
+            <a:pPr algn="ctr">
+              <a:defRPr sz="1800" b="1">
+                <a:solidFill>
+                  <a:srgbClr val="FFFFFF"/>
                 </a:solidFill>
                 <a:latin typeface="Calibri"/>
               </a:defRPr>
@@ -12911,16 +15442,140 @@
       </p:sp>
       <p:sp>
         <p:nvSpPr>
-          <p:cNvPr id="4" name="Rectangle 3"/>
+          <p:cNvPr id="9" name="Rectangle 8"/>
           <p:cNvSpPr/>
           <p:nvPr/>
         </p:nvSpPr>
         <p:spPr>
           <a:xfrm>
-            <a:off x="731520" y="1234440"/>
-            <a:ext cx="10725912" cy="18288"/>
-          </a:xfrm>
-          <a:prstGeom prst="rect">
+            <a:off x="0" y="6583680"/>
+            <a:ext cx="12191695" cy="274320"/>
+          </a:xfrm>
+          <a:prstGeom prst="rect">
+            <a:avLst/>
+          </a:prstGeom>
+          <a:solidFill>
+            <a:srgbClr val="0F172A"/>
+          </a:solidFill>
+          <a:ln>
+            <a:noFill/>
+          </a:ln>
+        </p:spPr>
+        <p:style>
+          <a:lnRef idx="1">
+            <a:schemeClr val="accent1"/>
+          </a:lnRef>
+          <a:fillRef idx="3">
+            <a:schemeClr val="accent1"/>
+          </a:fillRef>
+          <a:effectRef idx="2">
+            <a:schemeClr val="accent1"/>
+          </a:effectRef>
+          <a:fontRef idx="minor">
+            <a:schemeClr val="lt1"/>
+          </a:fontRef>
+        </p:style>
+        <p:txBody>
+          <a:bodyPr rtlCol="0" anchor="ctr"/>
+          <a:lstStyle/>
+          <a:p>
+            <a:pPr algn="ctr"/>
+          </a:p>
+        </p:txBody>
+      </p:sp>
+      <p:sp>
+        <p:nvSpPr>
+          <p:cNvPr id="10" name="TextBox 9"/>
+          <p:cNvSpPr txBox="1"/>
+          <p:nvPr/>
+        </p:nvSpPr>
+        <p:spPr>
+          <a:xfrm>
+            <a:off x="365760" y="6601968"/>
+            <a:ext cx="11457432" cy="256032"/>
+          </a:xfrm>
+          <a:prstGeom prst="rect">
+            <a:avLst/>
+          </a:prstGeom>
+          <a:noFill/>
+        </p:spPr>
+        <p:txBody>
+          <a:bodyPr wrap="none">
+            <a:spAutoFit/>
+          </a:bodyPr>
+          <a:lstStyle/>
+          <a:p>
+            <a:pPr algn="ctr">
+              <a:defRPr sz="900">
+                <a:solidFill>
+                  <a:srgbClr val="FFFFFF"/>
+                </a:solidFill>
+                <a:latin typeface="Calibri"/>
+              </a:defRPr>
+            </a:pPr>
+            <a:r>
+              <a:t>Video Activity Recognition with 3D CNN &amp; Grad-CAM  |  AIML GNDEC</a:t>
+            </a:r>
+          </a:p>
+        </p:txBody>
+      </p:sp>
+      <p:sp>
+        <p:nvSpPr>
+          <p:cNvPr id="11" name="Rounded Rectangle 10"/>
+          <p:cNvSpPr/>
+          <p:nvPr/>
+        </p:nvSpPr>
+        <p:spPr>
+          <a:xfrm>
+            <a:off x="731520" y="1645920"/>
+            <a:ext cx="2011680" cy="3474720"/>
+          </a:xfrm>
+          <a:prstGeom prst="roundRect">
+            <a:avLst/>
+          </a:prstGeom>
+          <a:solidFill>
+            <a:srgbClr val="F8FAFC"/>
+          </a:solidFill>
+          <a:ln w="12700">
+            <a:solidFill>
+              <a:srgbClr val="2563EB"/>
+            </a:solidFill>
+          </a:ln>
+        </p:spPr>
+        <p:style>
+          <a:lnRef idx="1">
+            <a:schemeClr val="accent1"/>
+          </a:lnRef>
+          <a:fillRef idx="3">
+            <a:schemeClr val="accent1"/>
+          </a:fillRef>
+          <a:effectRef idx="2">
+            <a:schemeClr val="accent1"/>
+          </a:effectRef>
+          <a:fontRef idx="minor">
+            <a:schemeClr val="lt1"/>
+          </a:fontRef>
+        </p:style>
+        <p:txBody>
+          <a:bodyPr rtlCol="0" anchor="ctr"/>
+          <a:lstStyle/>
+          <a:p>
+            <a:pPr algn="ctr"/>
+          </a:p>
+        </p:txBody>
+      </p:sp>
+      <p:sp>
+        <p:nvSpPr>
+          <p:cNvPr id="12" name="Oval 11"/>
+          <p:cNvSpPr/>
+          <p:nvPr/>
+        </p:nvSpPr>
+        <p:spPr>
+          <a:xfrm>
+            <a:off x="1463040" y="1920240"/>
+            <a:ext cx="548640" cy="548640"/>
+          </a:xfrm>
+          <a:prstGeom prst="ellipse">
             <a:avLst/>
           </a:prstGeom>
           <a:solidFill>
@@ -12950,65 +15605,29 @@
           <a:bodyPr rtlCol="0" anchor="ctr"/>
           <a:lstStyle/>
           <a:p>
-            <a:pPr algn="ctr"/>
-          </a:p>
-        </p:txBody>
-      </p:sp>
-      <p:sp>
-        <p:nvSpPr>
-          <p:cNvPr id="5" name="Rectangle 4"/>
-          <p:cNvSpPr/>
-          <p:nvPr/>
-        </p:nvSpPr>
-        <p:spPr>
-          <a:xfrm>
-            <a:off x="731520" y="6400800"/>
-            <a:ext cx="10725912" cy="13716"/>
-          </a:xfrm>
-          <a:prstGeom prst="rect">
-            <a:avLst/>
-          </a:prstGeom>
-          <a:solidFill>
-            <a:srgbClr val="E2E8F0"/>
-          </a:solidFill>
-          <a:ln>
-            <a:solidFill>
-              <a:srgbClr val="E2E8F0"/>
-            </a:solidFill>
-          </a:ln>
-        </p:spPr>
-        <p:style>
-          <a:lnRef idx="1">
-            <a:schemeClr val="accent1"/>
-          </a:lnRef>
-          <a:fillRef idx="3">
-            <a:schemeClr val="accent1"/>
-          </a:fillRef>
-          <a:effectRef idx="2">
-            <a:schemeClr val="accent1"/>
-          </a:effectRef>
-          <a:fontRef idx="minor">
-            <a:schemeClr val="lt1"/>
-          </a:fontRef>
-        </p:style>
-        <p:txBody>
-          <a:bodyPr rtlCol="0" anchor="ctr"/>
-          <a:lstStyle/>
-          <a:p>
-            <a:pPr algn="ctr"/>
-          </a:p>
-        </p:txBody>
-      </p:sp>
-      <p:sp>
-        <p:nvSpPr>
-          <p:cNvPr id="6" name="TextBox 5"/>
+            <a:pPr algn="ctr">
+              <a:defRPr sz="1400" b="1">
+                <a:solidFill>
+                  <a:srgbClr val="FFFFFF"/>
+                </a:solidFill>
+              </a:defRPr>
+            </a:pPr>
+            <a:r>
+              <a:t>1</a:t>
+            </a:r>
+          </a:p>
+        </p:txBody>
+      </p:sp>
+      <p:sp>
+        <p:nvSpPr>
+          <p:cNvPr id="13" name="TextBox 12"/>
           <p:cNvSpPr txBox="1"/>
           <p:nvPr/>
         </p:nvSpPr>
         <p:spPr>
           <a:xfrm>
-            <a:off x="731520" y="6419088"/>
-            <a:ext cx="10725912" cy="320040"/>
+            <a:off x="868680" y="2651760"/>
+            <a:ext cx="1737360" cy="2286000"/>
           </a:xfrm>
           <a:prstGeom prst="rect">
             <a:avLst/>
@@ -13016,34 +15635,50 @@
           <a:noFill/>
         </p:spPr>
         <p:txBody>
-          <a:bodyPr wrap="none">
+          <a:bodyPr wrap="square">
             <a:spAutoFit/>
           </a:bodyPr>
           <a:lstStyle/>
           <a:p>
-            <a:pPr>
-              <a:defRPr sz="950">
-                <a:solidFill>
-                  <a:srgbClr val="64748B"/>
-                </a:solidFill>
-                <a:latin typeface="Calibri"/>
-              </a:defRPr>
-            </a:pPr>
-            <a:r>
-              <a:t>Video Activity Recognition with 3D CNN &amp; Grad-CAM  |  Dept of AI &amp; ML</a:t>
-            </a:r>
-          </a:p>
-        </p:txBody>
-      </p:sp>
-      <p:sp>
-        <p:nvSpPr>
-          <p:cNvPr id="7" name="Rounded Rectangle 6"/>
+            <a:pPr algn="ctr">
+              <a:defRPr sz="1500" b="1">
+                <a:solidFill>
+                  <a:srgbClr val="0F172A"/>
+                </a:solidFill>
+                <a:latin typeface="Calibri"/>
+              </a:defRPr>
+            </a:pPr>
+            <a:r>
+              <a:t>1. Ingestion</a:t>
+            </a:r>
+          </a:p>
+          <a:p>
+            <a:pPr algn="ctr">
+              <a:spcBef>
+                <a:spcPts val="800"/>
+              </a:spcBef>
+              <a:defRPr sz="1150">
+                <a:solidFill>
+                  <a:srgbClr val="1E293B"/>
+                </a:solidFill>
+                <a:latin typeface="Calibri"/>
+              </a:defRPr>
+            </a:pPr>
+            <a:r>
+              <a:t>Webcam / MP4 Video (30 FPS)</a:t>
+            </a:r>
+          </a:p>
+        </p:txBody>
+      </p:sp>
+      <p:sp>
+        <p:nvSpPr>
+          <p:cNvPr id="14" name="Rounded Rectangle 13"/>
           <p:cNvSpPr/>
           <p:nvPr/>
         </p:nvSpPr>
         <p:spPr>
           <a:xfrm>
-            <a:off x="731520" y="1645920"/>
+            <a:off x="2926080" y="1645920"/>
             <a:ext cx="2011680" cy="3474720"/>
           </a:xfrm>
           <a:prstGeom prst="roundRect">
@@ -13082,13 +15717,13 @@
       </p:sp>
       <p:sp>
         <p:nvSpPr>
-          <p:cNvPr id="8" name="Oval 7"/>
+          <p:cNvPr id="15" name="Oval 14"/>
           <p:cNvSpPr/>
           <p:nvPr/>
         </p:nvSpPr>
         <p:spPr>
           <a:xfrm>
-            <a:off x="1463040" y="1920240"/>
+            <a:off x="3657600" y="1920240"/>
             <a:ext cx="548640" cy="548640"/>
           </a:xfrm>
           <a:prstGeom prst="ellipse">
@@ -13129,20 +15764,20 @@
               </a:defRPr>
             </a:pPr>
             <a:r>
-              <a:t>1</a:t>
-            </a:r>
-          </a:p>
-        </p:txBody>
-      </p:sp>
-      <p:sp>
-        <p:nvSpPr>
-          <p:cNvPr id="9" name="TextBox 8"/>
+              <a:t>2</a:t>
+            </a:r>
+          </a:p>
+        </p:txBody>
+      </p:sp>
+      <p:sp>
+        <p:nvSpPr>
+          <p:cNvPr id="16" name="TextBox 15"/>
           <p:cNvSpPr txBox="1"/>
           <p:nvPr/>
         </p:nvSpPr>
         <p:spPr>
           <a:xfrm>
-            <a:off x="868680" y="2651760"/>
+            <a:off x="3063240" y="2651760"/>
             <a:ext cx="1737360" cy="2286000"/>
           </a:xfrm>
           <a:prstGeom prst="rect">
@@ -13165,7 +15800,7 @@
               </a:defRPr>
             </a:pPr>
             <a:r>
-              <a:t>1. Ingestion</a:t>
+              <a:t>2. Buffer</a:t>
             </a:r>
           </a:p>
           <a:p>
@@ -13181,157 +15816,6 @@
               </a:defRPr>
             </a:pPr>
             <a:r>
-              <a:t>Webcam / MP4 Video (30 FPS)</a:t>
-            </a:r>
-          </a:p>
-        </p:txBody>
-      </p:sp>
-      <p:sp>
-        <p:nvSpPr>
-          <p:cNvPr id="10" name="Rounded Rectangle 9"/>
-          <p:cNvSpPr/>
-          <p:nvPr/>
-        </p:nvSpPr>
-        <p:spPr>
-          <a:xfrm>
-            <a:off x="2926080" y="1645920"/>
-            <a:ext cx="2011680" cy="3474720"/>
-          </a:xfrm>
-          <a:prstGeom prst="roundRect">
-            <a:avLst/>
-          </a:prstGeom>
-          <a:solidFill>
-            <a:srgbClr val="F8FAFC"/>
-          </a:solidFill>
-          <a:ln w="12700">
-            <a:solidFill>
-              <a:srgbClr val="2563EB"/>
-            </a:solidFill>
-          </a:ln>
-        </p:spPr>
-        <p:style>
-          <a:lnRef idx="1">
-            <a:schemeClr val="accent1"/>
-          </a:lnRef>
-          <a:fillRef idx="3">
-            <a:schemeClr val="accent1"/>
-          </a:fillRef>
-          <a:effectRef idx="2">
-            <a:schemeClr val="accent1"/>
-          </a:effectRef>
-          <a:fontRef idx="minor">
-            <a:schemeClr val="lt1"/>
-          </a:fontRef>
-        </p:style>
-        <p:txBody>
-          <a:bodyPr rtlCol="0" anchor="ctr"/>
-          <a:lstStyle/>
-          <a:p>
-            <a:pPr algn="ctr"/>
-          </a:p>
-        </p:txBody>
-      </p:sp>
-      <p:sp>
-        <p:nvSpPr>
-          <p:cNvPr id="11" name="Oval 10"/>
-          <p:cNvSpPr/>
-          <p:nvPr/>
-        </p:nvSpPr>
-        <p:spPr>
-          <a:xfrm>
-            <a:off x="3657600" y="1920240"/>
-            <a:ext cx="548640" cy="548640"/>
-          </a:xfrm>
-          <a:prstGeom prst="ellipse">
-            <a:avLst/>
-          </a:prstGeom>
-          <a:solidFill>
-            <a:srgbClr val="2563EB"/>
-          </a:solidFill>
-          <a:ln>
-            <a:solidFill>
-              <a:srgbClr val="2563EB"/>
-            </a:solidFill>
-          </a:ln>
-        </p:spPr>
-        <p:style>
-          <a:lnRef idx="1">
-            <a:schemeClr val="accent1"/>
-          </a:lnRef>
-          <a:fillRef idx="3">
-            <a:schemeClr val="accent1"/>
-          </a:fillRef>
-          <a:effectRef idx="2">
-            <a:schemeClr val="accent1"/>
-          </a:effectRef>
-          <a:fontRef idx="minor">
-            <a:schemeClr val="lt1"/>
-          </a:fontRef>
-        </p:style>
-        <p:txBody>
-          <a:bodyPr rtlCol="0" anchor="ctr"/>
-          <a:lstStyle/>
-          <a:p>
-            <a:pPr algn="ctr">
-              <a:defRPr sz="1400" b="1">
-                <a:solidFill>
-                  <a:srgbClr val="FFFFFF"/>
-                </a:solidFill>
-              </a:defRPr>
-            </a:pPr>
-            <a:r>
-              <a:t>2</a:t>
-            </a:r>
-          </a:p>
-        </p:txBody>
-      </p:sp>
-      <p:sp>
-        <p:nvSpPr>
-          <p:cNvPr id="12" name="TextBox 11"/>
-          <p:cNvSpPr txBox="1"/>
-          <p:nvPr/>
-        </p:nvSpPr>
-        <p:spPr>
-          <a:xfrm>
-            <a:off x="3063240" y="2651760"/>
-            <a:ext cx="1737360" cy="2286000"/>
-          </a:xfrm>
-          <a:prstGeom prst="rect">
-            <a:avLst/>
-          </a:prstGeom>
-          <a:noFill/>
-        </p:spPr>
-        <p:txBody>
-          <a:bodyPr wrap="square">
-            <a:spAutoFit/>
-          </a:bodyPr>
-          <a:lstStyle/>
-          <a:p>
-            <a:pPr algn="ctr">
-              <a:defRPr sz="1500" b="1">
-                <a:solidFill>
-                  <a:srgbClr val="0F172A"/>
-                </a:solidFill>
-                <a:latin typeface="Calibri"/>
-              </a:defRPr>
-            </a:pPr>
-            <a:r>
-              <a:t>2. Buffer</a:t>
-            </a:r>
-          </a:p>
-          <a:p>
-            <a:pPr algn="ctr">
-              <a:spcBef>
-                <a:spcPts val="800"/>
-              </a:spcBef>
-              <a:defRPr sz="1150">
-                <a:solidFill>
-                  <a:srgbClr val="1E293B"/>
-                </a:solidFill>
-                <a:latin typeface="Calibri"/>
-              </a:defRPr>
-            </a:pPr>
-            <a:r>
               <a:t>16 Frames @ 112x112 RGB</a:t>
             </a:r>
           </a:p>
@@ -13339,7 +15823,7 @@
       </p:sp>
       <p:sp>
         <p:nvSpPr>
-          <p:cNvPr id="13" name="Rounded Rectangle 12"/>
+          <p:cNvPr id="17" name="Rounded Rectangle 16"/>
           <p:cNvSpPr/>
           <p:nvPr/>
         </p:nvSpPr>
@@ -13384,7 +15868,7 @@
       </p:sp>
       <p:sp>
         <p:nvSpPr>
-          <p:cNvPr id="14" name="Oval 13"/>
+          <p:cNvPr id="18" name="Oval 17"/>
           <p:cNvSpPr/>
           <p:nvPr/>
         </p:nvSpPr>
@@ -13438,7 +15922,7 @@
       </p:sp>
       <p:sp>
         <p:nvSpPr>
-          <p:cNvPr id="15" name="TextBox 14"/>
+          <p:cNvPr id="19" name="TextBox 18"/>
           <p:cNvSpPr txBox="1"/>
           <p:nvPr/>
         </p:nvSpPr>
@@ -13490,7 +15974,7 @@
       </p:sp>
       <p:sp>
         <p:nvSpPr>
-          <p:cNvPr id="16" name="Rounded Rectangle 15"/>
+          <p:cNvPr id="20" name="Rounded Rectangle 19"/>
           <p:cNvSpPr/>
           <p:nvPr/>
         </p:nvSpPr>
@@ -13535,7 +16019,7 @@
       </p:sp>
       <p:sp>
         <p:nvSpPr>
-          <p:cNvPr id="17" name="Oval 16"/>
+          <p:cNvPr id="21" name="Oval 20"/>
           <p:cNvSpPr/>
           <p:nvPr/>
         </p:nvSpPr>
@@ -13589,7 +16073,7 @@
       </p:sp>
       <p:sp>
         <p:nvSpPr>
-          <p:cNvPr id="18" name="TextBox 17"/>
+          <p:cNvPr id="22" name="TextBox 21"/>
           <p:cNvSpPr txBox="1"/>
           <p:nvPr/>
         </p:nvSpPr>
@@ -13641,7 +16125,7 @@
       </p:sp>
       <p:sp>
         <p:nvSpPr>
-          <p:cNvPr id="19" name="Rounded Rectangle 18"/>
+          <p:cNvPr id="23" name="Rounded Rectangle 22"/>
           <p:cNvSpPr/>
           <p:nvPr/>
         </p:nvSpPr>
@@ -13686,7 +16170,7 @@
       </p:sp>
       <p:sp>
         <p:nvSpPr>
-          <p:cNvPr id="20" name="Oval 19"/>
+          <p:cNvPr id="24" name="Oval 23"/>
           <p:cNvSpPr/>
           <p:nvPr/>
         </p:nvSpPr>
@@ -13740,7 +16224,7 @@
       </p:sp>
       <p:sp>
         <p:nvSpPr>
-          <p:cNvPr id="21" name="TextBox 20"/>
+          <p:cNvPr id="25" name="TextBox 24"/>
           <p:cNvSpPr txBox="1"/>
           <p:nvPr/>
         </p:nvSpPr>
@@ -13792,7 +16276,7 @@
       </p:sp>
       <p:sp>
         <p:nvSpPr>
-          <p:cNvPr id="22" name="Rounded Rectangle 21"/>
+          <p:cNvPr id="26" name="Rounded Rectangle 25"/>
           <p:cNvSpPr/>
           <p:nvPr/>
         </p:nvSpPr>
@@ -13837,7 +16321,7 @@
       </p:sp>
       <p:sp>
         <p:nvSpPr>
-          <p:cNvPr id="23" name="TextBox 22"/>
+          <p:cNvPr id="27" name="TextBox 26"/>
           <p:cNvSpPr txBox="1"/>
           <p:nvPr/>
         </p:nvSpPr>
@@ -13904,97 +16388,23 @@
       <p:grpSpPr/>
       <p:sp>
         <p:nvSpPr>
-          <p:cNvPr id="2" name="TextBox 1"/>
-          <p:cNvSpPr txBox="1"/>
-          <p:nvPr/>
-        </p:nvSpPr>
-        <p:spPr>
-          <a:xfrm>
-            <a:off x="731520" y="320040"/>
-            <a:ext cx="10725912" cy="320040"/>
-          </a:xfrm>
-          <a:prstGeom prst="rect">
-            <a:avLst/>
-          </a:prstGeom>
-          <a:noFill/>
-        </p:spPr>
-        <p:txBody>
-          <a:bodyPr wrap="none">
-            <a:spAutoFit/>
-          </a:bodyPr>
-          <a:lstStyle/>
-          <a:p>
-            <a:pPr>
-              <a:defRPr sz="1000" b="1">
-                <a:solidFill>
-                  <a:srgbClr val="2563EB"/>
-                </a:solidFill>
-                <a:latin typeface="Calibri"/>
-              </a:defRPr>
-            </a:pPr>
-            <a:r>
-              <a:t>DEPARTMENT OF ARTIFICIAL INTELLIGENCE &amp; MACHINE LEARNING (AI &amp; ML)</a:t>
-            </a:r>
-          </a:p>
-        </p:txBody>
-      </p:sp>
-      <p:sp>
-        <p:nvSpPr>
-          <p:cNvPr id="3" name="TextBox 2"/>
-          <p:cNvSpPr txBox="1"/>
-          <p:nvPr/>
-        </p:nvSpPr>
-        <p:spPr>
-          <a:xfrm>
-            <a:off x="731520" y="594360"/>
-            <a:ext cx="10725912" cy="640080"/>
-          </a:xfrm>
-          <a:prstGeom prst="rect">
-            <a:avLst/>
-          </a:prstGeom>
-          <a:noFill/>
-        </p:spPr>
-        <p:txBody>
-          <a:bodyPr wrap="none">
-            <a:spAutoFit/>
-          </a:bodyPr>
-          <a:lstStyle/>
-          <a:p>
-            <a:pPr>
-              <a:defRPr sz="2200" b="1">
-                <a:solidFill>
-                  <a:srgbClr val="0F172A"/>
-                </a:solidFill>
-                <a:latin typeface="Calibri"/>
-              </a:defRPr>
-            </a:pPr>
-            <a:r>
-              <a:t>3D CNN Architecture &amp; Layer Specifications</a:t>
-            </a:r>
-          </a:p>
-        </p:txBody>
-      </p:sp>
-      <p:sp>
-        <p:nvSpPr>
-          <p:cNvPr id="4" name="Rectangle 3"/>
+          <p:cNvPr id="2" name="Rectangle 1"/>
           <p:cNvSpPr/>
           <p:nvPr/>
         </p:nvSpPr>
         <p:spPr>
           <a:xfrm>
-            <a:off x="731520" y="1234440"/>
-            <a:ext cx="10725912" cy="18288"/>
+            <a:off x="0" y="0"/>
+            <a:ext cx="12191695" cy="6858000"/>
           </a:xfrm>
           <a:prstGeom prst="rect">
             <a:avLst/>
           </a:prstGeom>
           <a:solidFill>
-            <a:srgbClr val="2563EB"/>
+            <a:srgbClr val="DCE8F8"/>
           </a:solidFill>
           <a:ln>
-            <a:solidFill>
-              <a:srgbClr val="2563EB"/>
-            </a:solidFill>
+            <a:noFill/>
           </a:ln>
         </p:spPr>
         <p:style>
@@ -14021,25 +16431,23 @@
       </p:sp>
       <p:sp>
         <p:nvSpPr>
-          <p:cNvPr id="5" name="Rectangle 4"/>
+          <p:cNvPr id="3" name="Rectangle 2"/>
           <p:cNvSpPr/>
           <p:nvPr/>
         </p:nvSpPr>
         <p:spPr>
           <a:xfrm>
-            <a:off x="731520" y="6400800"/>
-            <a:ext cx="10725912" cy="13716"/>
+            <a:off x="0" y="0"/>
+            <a:ext cx="12191695" cy="1143000"/>
           </a:xfrm>
           <a:prstGeom prst="rect">
             <a:avLst/>
           </a:prstGeom>
           <a:solidFill>
-            <a:srgbClr val="E2E8F0"/>
+            <a:srgbClr val="FFFFFF"/>
           </a:solidFill>
           <a:ln>
-            <a:solidFill>
-              <a:srgbClr val="E2E8F0"/>
-            </a:solidFill>
+            <a:noFill/>
           </a:ln>
         </p:spPr>
         <p:style>
@@ -14066,14 +16474,14 @@
       </p:sp>
       <p:sp>
         <p:nvSpPr>
-          <p:cNvPr id="6" name="TextBox 5"/>
+          <p:cNvPr id="4" name="TextBox 3"/>
           <p:cNvSpPr txBox="1"/>
           <p:nvPr/>
         </p:nvSpPr>
         <p:spPr>
           <a:xfrm>
-            <a:off x="731520" y="6419088"/>
-            <a:ext cx="10725912" cy="320040"/>
+            <a:off x="365760" y="45720"/>
+            <a:ext cx="11457432" cy="502920"/>
           </a:xfrm>
           <a:prstGeom prst="rect">
             <a:avLst/>
@@ -14086,23 +16494,260 @@
           </a:bodyPr>
           <a:lstStyle/>
           <a:p>
-            <a:pPr>
-              <a:defRPr sz="950">
-                <a:solidFill>
-                  <a:srgbClr val="64748B"/>
-                </a:solidFill>
-                <a:latin typeface="Calibri"/>
-              </a:defRPr>
-            </a:pPr>
-            <a:r>
-              <a:t>Video Activity Recognition with 3D CNN &amp; Grad-CAM  |  Dept of AI &amp; ML</a:t>
+            <a:pPr algn="ctr">
+              <a:defRPr sz="1700" b="1">
+                <a:solidFill>
+                  <a:srgbClr val="0F172A"/>
+                </a:solidFill>
+                <a:latin typeface="Calibri"/>
+              </a:defRPr>
+            </a:pPr>
+            <a:r>
+              <a:t>GURU NANAK DEV ENGINEERING COLLEGE, BIDAR</a:t>
+            </a:r>
+          </a:p>
+        </p:txBody>
+      </p:sp>
+      <p:sp>
+        <p:nvSpPr>
+          <p:cNvPr id="5" name="TextBox 4"/>
+          <p:cNvSpPr txBox="1"/>
+          <p:nvPr/>
+        </p:nvSpPr>
+        <p:spPr>
+          <a:xfrm>
+            <a:off x="365760" y="502920"/>
+            <a:ext cx="11457432" cy="384048"/>
+          </a:xfrm>
+          <a:prstGeom prst="rect">
+            <a:avLst/>
+          </a:prstGeom>
+          <a:noFill/>
+        </p:spPr>
+        <p:txBody>
+          <a:bodyPr wrap="none">
+            <a:spAutoFit/>
+          </a:bodyPr>
+          <a:lstStyle/>
+          <a:p>
+            <a:pPr algn="ctr">
+              <a:defRPr sz="1300" b="1">
+                <a:solidFill>
+                  <a:srgbClr val="2563EB"/>
+                </a:solidFill>
+                <a:latin typeface="Calibri"/>
+              </a:defRPr>
+            </a:pPr>
+            <a:r>
+              <a:t>DEPARTMENT OF AI &amp; ML</a:t>
+            </a:r>
+          </a:p>
+        </p:txBody>
+      </p:sp>
+      <p:sp>
+        <p:nvSpPr>
+          <p:cNvPr id="6" name="Rectangle 5"/>
+          <p:cNvSpPr/>
+          <p:nvPr/>
+        </p:nvSpPr>
+        <p:spPr>
+          <a:xfrm>
+            <a:off x="0" y="1143000"/>
+            <a:ext cx="12191695" cy="27432"/>
+          </a:xfrm>
+          <a:prstGeom prst="rect">
+            <a:avLst/>
+          </a:prstGeom>
+          <a:solidFill>
+            <a:srgbClr val="2563EB"/>
+          </a:solidFill>
+          <a:ln>
+            <a:noFill/>
+          </a:ln>
+        </p:spPr>
+        <p:style>
+          <a:lnRef idx="1">
+            <a:schemeClr val="accent1"/>
+          </a:lnRef>
+          <a:fillRef idx="3">
+            <a:schemeClr val="accent1"/>
+          </a:fillRef>
+          <a:effectRef idx="2">
+            <a:schemeClr val="accent1"/>
+          </a:effectRef>
+          <a:fontRef idx="minor">
+            <a:schemeClr val="lt1"/>
+          </a:fontRef>
+        </p:style>
+        <p:txBody>
+          <a:bodyPr rtlCol="0" anchor="ctr"/>
+          <a:lstStyle/>
+          <a:p>
+            <a:pPr algn="ctr"/>
+          </a:p>
+        </p:txBody>
+      </p:sp>
+      <p:sp>
+        <p:nvSpPr>
+          <p:cNvPr id="7" name="Rectangle 6"/>
+          <p:cNvSpPr/>
+          <p:nvPr/>
+        </p:nvSpPr>
+        <p:spPr>
+          <a:xfrm>
+            <a:off x="457200" y="1234440"/>
+            <a:ext cx="11274552" cy="475488"/>
+          </a:xfrm>
+          <a:prstGeom prst="rect">
+            <a:avLst/>
+          </a:prstGeom>
+          <a:solidFill>
+            <a:srgbClr val="0F172A"/>
+          </a:solidFill>
+          <a:ln>
+            <a:noFill/>
+          </a:ln>
+        </p:spPr>
+        <p:style>
+          <a:lnRef idx="1">
+            <a:schemeClr val="accent1"/>
+          </a:lnRef>
+          <a:fillRef idx="3">
+            <a:schemeClr val="accent1"/>
+          </a:fillRef>
+          <a:effectRef idx="2">
+            <a:schemeClr val="accent1"/>
+          </a:effectRef>
+          <a:fontRef idx="minor">
+            <a:schemeClr val="lt1"/>
+          </a:fontRef>
+        </p:style>
+        <p:txBody>
+          <a:bodyPr rtlCol="0" anchor="ctr"/>
+          <a:lstStyle/>
+          <a:p>
+            <a:pPr algn="ctr"/>
+          </a:p>
+        </p:txBody>
+      </p:sp>
+      <p:sp>
+        <p:nvSpPr>
+          <p:cNvPr id="8" name="TextBox 7"/>
+          <p:cNvSpPr txBox="1"/>
+          <p:nvPr/>
+        </p:nvSpPr>
+        <p:spPr>
+          <a:xfrm>
+            <a:off x="548640" y="1252728"/>
+            <a:ext cx="11091672" cy="420624"/>
+          </a:xfrm>
+          <a:prstGeom prst="rect">
+            <a:avLst/>
+          </a:prstGeom>
+          <a:noFill/>
+        </p:spPr>
+        <p:txBody>
+          <a:bodyPr wrap="none">
+            <a:spAutoFit/>
+          </a:bodyPr>
+          <a:lstStyle/>
+          <a:p>
+            <a:pPr algn="ctr">
+              <a:defRPr sz="1800" b="1">
+                <a:solidFill>
+                  <a:srgbClr val="FFFFFF"/>
+                </a:solidFill>
+                <a:latin typeface="Calibri"/>
+              </a:defRPr>
+            </a:pPr>
+            <a:r>
+              <a:t>3D CNN Architecture &amp; Layer Specifications</a:t>
+            </a:r>
+          </a:p>
+        </p:txBody>
+      </p:sp>
+      <p:sp>
+        <p:nvSpPr>
+          <p:cNvPr id="9" name="Rectangle 8"/>
+          <p:cNvSpPr/>
+          <p:nvPr/>
+        </p:nvSpPr>
+        <p:spPr>
+          <a:xfrm>
+            <a:off x="0" y="6583680"/>
+            <a:ext cx="12191695" cy="274320"/>
+          </a:xfrm>
+          <a:prstGeom prst="rect">
+            <a:avLst/>
+          </a:prstGeom>
+          <a:solidFill>
+            <a:srgbClr val="0F172A"/>
+          </a:solidFill>
+          <a:ln>
+            <a:noFill/>
+          </a:ln>
+        </p:spPr>
+        <p:style>
+          <a:lnRef idx="1">
+            <a:schemeClr val="accent1"/>
+          </a:lnRef>
+          <a:fillRef idx="3">
+            <a:schemeClr val="accent1"/>
+          </a:fillRef>
+          <a:effectRef idx="2">
+            <a:schemeClr val="accent1"/>
+          </a:effectRef>
+          <a:fontRef idx="minor">
+            <a:schemeClr val="lt1"/>
+          </a:fontRef>
+        </p:style>
+        <p:txBody>
+          <a:bodyPr rtlCol="0" anchor="ctr"/>
+          <a:lstStyle/>
+          <a:p>
+            <a:pPr algn="ctr"/>
+          </a:p>
+        </p:txBody>
+      </p:sp>
+      <p:sp>
+        <p:nvSpPr>
+          <p:cNvPr id="10" name="TextBox 9"/>
+          <p:cNvSpPr txBox="1"/>
+          <p:nvPr/>
+        </p:nvSpPr>
+        <p:spPr>
+          <a:xfrm>
+            <a:off x="365760" y="6601968"/>
+            <a:ext cx="11457432" cy="256032"/>
+          </a:xfrm>
+          <a:prstGeom prst="rect">
+            <a:avLst/>
+          </a:prstGeom>
+          <a:noFill/>
+        </p:spPr>
+        <p:txBody>
+          <a:bodyPr wrap="none">
+            <a:spAutoFit/>
+          </a:bodyPr>
+          <a:lstStyle/>
+          <a:p>
+            <a:pPr algn="ctr">
+              <a:defRPr sz="900">
+                <a:solidFill>
+                  <a:srgbClr val="FFFFFF"/>
+                </a:solidFill>
+                <a:latin typeface="Calibri"/>
+              </a:defRPr>
+            </a:pPr>
+            <a:r>
+              <a:t>Video Activity Recognition with 3D CNN &amp; Grad-CAM  |  AIML GNDEC</a:t>
             </a:r>
           </a:p>
         </p:txBody>
       </p:sp>
       <p:graphicFrame>
         <p:nvGraphicFramePr>
-          <p:cNvPr id="7" name="Table 6"/>
+          <p:cNvPr id="11" name="Table 10"/>
           <p:cNvGraphicFramePr>
             <a:graphicFrameLocks noGrp="1"/>
           </p:cNvGraphicFramePr>
@@ -14914,7 +17559,7 @@
       </p:graphicFrame>
       <p:sp>
         <p:nvSpPr>
-          <p:cNvPr id="8" name="Rounded Rectangle 7"/>
+          <p:cNvPr id="12" name="Rounded Rectangle 11"/>
           <p:cNvSpPr/>
           <p:nvPr/>
         </p:nvSpPr>
@@ -14959,7 +17604,7 @@
       </p:sp>
       <p:sp>
         <p:nvSpPr>
-          <p:cNvPr id="9" name="TextBox 8"/>
+          <p:cNvPr id="13" name="TextBox 12"/>
           <p:cNvSpPr txBox="1"/>
           <p:nvPr/>
         </p:nvSpPr>
